--- a/en/03_Deliverables/PPTX/M0_EN_Deck_CFG-5_Lesson03_GiveYourProjectAScreen_v1.pptx
+++ b/en/03_Deliverables/PPTX/M0_EN_Deck_CFG-5_Lesson03_GiveYourProjectAScreen_v1.pptx
@@ -4,28 +4,31 @@
   <p:sldMasterIdLst>
     <p:sldMasterId id="2147483648" r:id="rId1"/>
   </p:sldMasterIdLst>
+  <p:notesMasterIdLst>
+    <p:notesMasterId r:id="rId21"/>
+  </p:notesMasterIdLst>
   <p:sldIdLst>
-    <p:sldId id="256" r:id="rId7"/>
-    <p:sldId id="257" r:id="rId9"/>
-    <p:sldId id="258" r:id="rId10"/>
-    <p:sldId id="259" r:id="rId11"/>
-    <p:sldId id="260" r:id="rId12"/>
-    <p:sldId id="261" r:id="rId13"/>
-    <p:sldId id="262" r:id="rId14"/>
-    <p:sldId id="263" r:id="rId15"/>
-    <p:sldId id="264" r:id="rId16"/>
-    <p:sldId id="265" r:id="rId17"/>
-    <p:sldId id="266" r:id="rId18"/>
-    <p:sldId id="267" r:id="rId19"/>
-    <p:sldId id="268" r:id="rId20"/>
-    <p:sldId id="269" r:id="rId21"/>
-    <p:sldId id="270" r:id="rId22"/>
-    <p:sldId id="271" r:id="rId23"/>
-    <p:sldId id="272" r:id="rId24"/>
-    <p:sldId id="273" r:id="rId25"/>
-    <p:sldId id="274" r:id="rId26"/>
+    <p:sldId id="256" r:id="rId2"/>
+    <p:sldId id="257" r:id="rId3"/>
+    <p:sldId id="258" r:id="rId4"/>
+    <p:sldId id="259" r:id="rId5"/>
+    <p:sldId id="260" r:id="rId6"/>
+    <p:sldId id="261" r:id="rId7"/>
+    <p:sldId id="262" r:id="rId8"/>
+    <p:sldId id="263" r:id="rId9"/>
+    <p:sldId id="264" r:id="rId10"/>
+    <p:sldId id="265" r:id="rId11"/>
+    <p:sldId id="266" r:id="rId12"/>
+    <p:sldId id="267" r:id="rId13"/>
+    <p:sldId id="268" r:id="rId14"/>
+    <p:sldId id="269" r:id="rId15"/>
+    <p:sldId id="270" r:id="rId16"/>
+    <p:sldId id="271" r:id="rId17"/>
+    <p:sldId id="272" r:id="rId18"/>
+    <p:sldId id="273" r:id="rId19"/>
+    <p:sldId id="274" r:id="rId20"/>
   </p:sldIdLst>
-  <p:sldSz cx="9144000" cy="5143500" type="screen4x3"/>
+  <p:sldSz cx="9144000" cy="5143500" type="screen16x9"/>
   <p:notesSz cx="6858000" cy="9144000"/>
   <p:defaultTextStyle>
     <a:defPPr>
@@ -122,11 +125,27 @@
       </a:defRPr>
     </a:lvl9pPr>
   </p:defaultTextStyle>
+  <p:extLst>
+    <p:ext uri="{EFAFB233-063F-42B5-8137-9DF3F51BA10A}">
+      <p15:sldGuideLst xmlns:p15="http://schemas.microsoft.com/office/powerpoint/2012/main">
+        <p15:guide id="1" orient="horz" pos="2160">
+          <p15:clr>
+            <a:srgbClr val="A4A3A4"/>
+          </p15:clr>
+        </p15:guide>
+        <p15:guide id="2" pos="2880">
+          <p15:clr>
+            <a:srgbClr val="A4A3A4"/>
+          </p15:clr>
+        </p15:guide>
+      </p15:sldGuideLst>
+    </p:ext>
+  </p:extLst>
 </p:presentation>
 </file>
 
 <file path=ppt/notesMasters/notesMaster1.xml><?xml version="1.0" encoding="utf-8"?>
-<p:notesMaster xmlns:a="http://schemas.openxmlformats.org/drawingml/2006/main" xmlns:p="http://schemas.openxmlformats.org/presentationml/2006/main" xmlns:r="http://schemas.openxmlformats.org/officeDocument/2006/relationships">
+<p:notesMaster xmlns:a="http://schemas.openxmlformats.org/drawingml/2006/main" xmlns:r="http://schemas.openxmlformats.org/officeDocument/2006/relationships" xmlns:p="http://schemas.openxmlformats.org/presentationml/2006/main">
   <p:cSld>
     <p:bg>
       <p:bgRef idx="1001">
@@ -147,241 +166,16 @@
           <a:chExt cx="0" cy="0"/>
         </a:xfrm>
       </p:grpSpPr>
-      <p:sp>
-        <p:nvSpPr>
-          <p:cNvPr id="2" name="Header Placeholder 1"/>
-          <p:cNvSpPr>
-            <a:spLocks noGrp="1"/>
-          </p:cNvSpPr>
-          <p:nvPr>
-            <p:ph type="hdr" sz="quarter"/>
-          </p:nvPr>
-        </p:nvSpPr>
-        <p:spPr>
-          <a:xfrm>
-            <a:off x="0" y="0"/>
-            <a:ext cx="2971800" cy="457200"/>
-          </a:xfrm>
-          <a:prstGeom prst="rect">
-            <a:avLst/>
-          </a:prstGeom>
-        </p:spPr>
-        <p:txBody>
-          <a:bodyPr vert="horz" lIns="91440" tIns="45720" rIns="91440" bIns="45720" rtlCol="0"/>
-          <a:lstStyle>
-            <a:lvl1pPr algn="l">
-              <a:defRPr sz="1200"/>
-            </a:lvl1pPr>
-          </a:lstStyle>
-          <a:p>
-            <a:endParaRPr lang="en-US"/>
-          </a:p>
-        </p:txBody>
-      </p:sp>
-      <p:sp>
-        <p:nvSpPr>
-          <p:cNvPr id="3" name="Date Placeholder 2"/>
-          <p:cNvSpPr>
-            <a:spLocks noGrp="1"/>
-          </p:cNvSpPr>
-          <p:nvPr>
-            <p:ph type="dt" idx="1"/>
-          </p:nvPr>
-        </p:nvSpPr>
-        <p:spPr>
-          <a:xfrm>
-            <a:off x="3884613" y="0"/>
-            <a:ext cx="2971800" cy="457200"/>
-          </a:xfrm>
-          <a:prstGeom prst="rect">
-            <a:avLst/>
-          </a:prstGeom>
-        </p:spPr>
-        <p:txBody>
-          <a:bodyPr vert="horz" lIns="91440" tIns="45720" rIns="91440" bIns="45720" rtlCol="0"/>
-          <a:lstStyle>
-            <a:lvl1pPr algn="r">
-              <a:defRPr sz="1200"/>
-            </a:lvl1pPr>
-          </a:lstStyle>
-          <a:p>
-            <a:fld id="{0F89C1C7-3DCD-1040-A9CF-14679D8B5DDD}" type="datetimeFigureOut">
-              <a:rPr lang="en-US" smtClean="0"/>
-              <a:t>10/17/16</a:t>
-            </a:fld>
-            <a:endParaRPr lang="en-US"/>
-          </a:p>
-        </p:txBody>
-      </p:sp>
-      <p:sp>
-        <p:nvSpPr>
-          <p:cNvPr id="4" name="Slide Image Placeholder 3"/>
-          <p:cNvSpPr>
-            <a:spLocks noGrp="1" noRot="1" noChangeAspect="1"/>
-          </p:cNvSpPr>
-          <p:nvPr>
-            <p:ph type="sldImg" idx="2"/>
-          </p:nvPr>
-        </p:nvSpPr>
-        <p:spPr>
-          <a:xfrm>
-            <a:off x="1143000" y="685800"/>
-            <a:ext cx="4572000" cy="3429000"/>
-          </a:xfrm>
-          <a:prstGeom prst="rect">
-            <a:avLst/>
-          </a:prstGeom>
-          <a:noFill/>
-          <a:ln w="12700">
-            <a:solidFill>
-              <a:prstClr val="black"/>
-            </a:solidFill>
-          </a:ln>
-        </p:spPr>
-        <p:txBody>
-          <a:bodyPr vert="horz" lIns="91440" tIns="45720" rIns="91440" bIns="45720" rtlCol="0" anchor="ctr"/>
-          <a:lstStyle/>
-          <a:p>
-            <a:endParaRPr lang="en-US"/>
-          </a:p>
-        </p:txBody>
-      </p:sp>
-      <p:sp>
-        <p:nvSpPr>
-          <p:cNvPr id="5" name="Notes Placeholder 4"/>
-          <p:cNvSpPr>
-            <a:spLocks noGrp="1"/>
-          </p:cNvSpPr>
-          <p:nvPr>
-            <p:ph type="body" sz="quarter" idx="3"/>
-          </p:nvPr>
-        </p:nvSpPr>
-        <p:spPr>
-          <a:xfrm>
-            <a:off x="685800" y="4343400"/>
-            <a:ext cx="5486400" cy="4114800"/>
-          </a:xfrm>
-          <a:prstGeom prst="rect">
-            <a:avLst/>
-          </a:prstGeom>
-        </p:spPr>
-        <p:txBody>
-          <a:bodyPr vert="horz" lIns="91440" tIns="45720" rIns="91440" bIns="45720" rtlCol="0"/>
-          <a:lstStyle/>
-          <a:p>
-            <a:pPr lvl="0"/>
-            <a:r>
-              <a:rPr lang="en-US" smtClean="0"/>
-              <a:t>Click to edit Master text styles</a:t>
-            </a:r>
-          </a:p>
-          <a:p>
-            <a:pPr lvl="1"/>
-            <a:r>
-              <a:rPr lang="en-US" smtClean="0"/>
-              <a:t>Second level</a:t>
-            </a:r>
-          </a:p>
-          <a:p>
-            <a:pPr lvl="2"/>
-            <a:r>
-              <a:rPr lang="en-US" smtClean="0"/>
-              <a:t>Third level</a:t>
-            </a:r>
-          </a:p>
-          <a:p>
-            <a:pPr lvl="3"/>
-            <a:r>
-              <a:rPr lang="en-US" smtClean="0"/>
-              <a:t>Fourth level</a:t>
-            </a:r>
-          </a:p>
-          <a:p>
-            <a:pPr lvl="4"/>
-            <a:r>
-              <a:rPr lang="en-US" smtClean="0"/>
-              <a:t>Fifth level</a:t>
-            </a:r>
-            <a:endParaRPr lang="en-US"/>
-          </a:p>
-        </p:txBody>
-      </p:sp>
-      <p:sp>
-        <p:nvSpPr>
-          <p:cNvPr id="6" name="Footer Placeholder 5"/>
-          <p:cNvSpPr>
-            <a:spLocks noGrp="1"/>
-          </p:cNvSpPr>
-          <p:nvPr>
-            <p:ph type="ftr" sz="quarter" idx="4"/>
-          </p:nvPr>
-        </p:nvSpPr>
-        <p:spPr>
-          <a:xfrm>
-            <a:off x="0" y="8685213"/>
-            <a:ext cx="2971800" cy="457200"/>
-          </a:xfrm>
-          <a:prstGeom prst="rect">
-            <a:avLst/>
-          </a:prstGeom>
-        </p:spPr>
-        <p:txBody>
-          <a:bodyPr vert="horz" lIns="91440" tIns="45720" rIns="91440" bIns="45720" rtlCol="0" anchor="b"/>
-          <a:lstStyle>
-            <a:lvl1pPr algn="l">
-              <a:defRPr sz="1200"/>
-            </a:lvl1pPr>
-          </a:lstStyle>
-          <a:p>
-            <a:endParaRPr lang="en-US"/>
-          </a:p>
-        </p:txBody>
-      </p:sp>
-      <p:sp>
-        <p:nvSpPr>
-          <p:cNvPr id="7" name="Slide Number Placeholder 6"/>
-          <p:cNvSpPr>
-            <a:spLocks noGrp="1"/>
-          </p:cNvSpPr>
-          <p:nvPr>
-            <p:ph type="sldNum" sz="quarter" idx="5"/>
-          </p:nvPr>
-        </p:nvSpPr>
-        <p:spPr>
-          <a:xfrm>
-            <a:off x="3884613" y="8685213"/>
-            <a:ext cx="2971800" cy="457200"/>
-          </a:xfrm>
-          <a:prstGeom prst="rect">
-            <a:avLst/>
-          </a:prstGeom>
-        </p:spPr>
-        <p:txBody>
-          <a:bodyPr vert="horz" lIns="91440" tIns="45720" rIns="91440" bIns="45720" rtlCol="0" anchor="b"/>
-          <a:lstStyle>
-            <a:lvl1pPr algn="r">
-              <a:defRPr sz="1200"/>
-            </a:lvl1pPr>
-          </a:lstStyle>
-          <a:p>
-            <a:fld id="{BB5E49A5-4136-284D-997B-48E1D791AD67}" type="slidenum">
-              <a:rPr lang="en-US" smtClean="0"/>
-              <a:t>‹#›</a:t>
-            </a:fld>
-            <a:endParaRPr lang="en-US"/>
-          </a:p>
-        </p:txBody>
-      </p:sp>
     </p:spTree>
     <p:extLst>
       <p:ext uri="{BB962C8B-B14F-4D97-AF65-F5344CB8AC3E}">
-        <p14:creationId xmlns:p14="http://schemas.microsoft.com/office/powerpoint/2010/main" val="2623252185"/>
+        <p14:creationId xmlns:p14="http://schemas.microsoft.com/office/powerpoint/2010/main" val="1728588119"/>
       </p:ext>
     </p:extLst>
   </p:cSld>
   <p:clrMap bg1="lt1" tx1="dk1" bg2="lt2" tx2="dk2" accent1="accent1" accent2="accent2" accent3="accent3" accent4="accent4" accent5="accent5" accent6="accent6" hlink="hlink" folHlink="folHlink"/>
   <p:notesStyle>
-    <a:lvl1pPr marL="0" algn="l" defTabSz="457200" rtl="0" eaLnBrk="1" latinLnBrk="0" hangingPunct="1">
+    <a:lvl1pPr marL="0" algn="l" defTabSz="914400" rtl="0" eaLnBrk="1" latinLnBrk="0" hangingPunct="1">
       <a:defRPr sz="1200" kern="1200">
         <a:solidFill>
           <a:schemeClr val="tx1"/>
@@ -391,7 +185,7 @@
         <a:cs typeface="+mn-cs"/>
       </a:defRPr>
     </a:lvl1pPr>
-    <a:lvl2pPr marL="457200" algn="l" defTabSz="457200" rtl="0" eaLnBrk="1" latinLnBrk="0" hangingPunct="1">
+    <a:lvl2pPr marL="457200" algn="l" defTabSz="914400" rtl="0" eaLnBrk="1" latinLnBrk="0" hangingPunct="1">
       <a:defRPr sz="1200" kern="1200">
         <a:solidFill>
           <a:schemeClr val="tx1"/>
@@ -401,7 +195,7 @@
         <a:cs typeface="+mn-cs"/>
       </a:defRPr>
     </a:lvl2pPr>
-    <a:lvl3pPr marL="914400" algn="l" defTabSz="457200" rtl="0" eaLnBrk="1" latinLnBrk="0" hangingPunct="1">
+    <a:lvl3pPr marL="914400" algn="l" defTabSz="914400" rtl="0" eaLnBrk="1" latinLnBrk="0" hangingPunct="1">
       <a:defRPr sz="1200" kern="1200">
         <a:solidFill>
           <a:schemeClr val="tx1"/>
@@ -411,7 +205,7 @@
         <a:cs typeface="+mn-cs"/>
       </a:defRPr>
     </a:lvl3pPr>
-    <a:lvl4pPr marL="1371600" algn="l" defTabSz="457200" rtl="0" eaLnBrk="1" latinLnBrk="0" hangingPunct="1">
+    <a:lvl4pPr marL="1371600" algn="l" defTabSz="914400" rtl="0" eaLnBrk="1" latinLnBrk="0" hangingPunct="1">
       <a:defRPr sz="1200" kern="1200">
         <a:solidFill>
           <a:schemeClr val="tx1"/>
@@ -421,7 +215,7 @@
         <a:cs typeface="+mn-cs"/>
       </a:defRPr>
     </a:lvl4pPr>
-    <a:lvl5pPr marL="1828800" algn="l" defTabSz="457200" rtl="0" eaLnBrk="1" latinLnBrk="0" hangingPunct="1">
+    <a:lvl5pPr marL="1828800" algn="l" defTabSz="914400" rtl="0" eaLnBrk="1" latinLnBrk="0" hangingPunct="1">
       <a:defRPr sz="1200" kern="1200">
         <a:solidFill>
           <a:schemeClr val="tx1"/>
@@ -431,7 +225,7 @@
         <a:cs typeface="+mn-cs"/>
       </a:defRPr>
     </a:lvl5pPr>
-    <a:lvl6pPr marL="2286000" algn="l" defTabSz="457200" rtl="0" eaLnBrk="1" latinLnBrk="0" hangingPunct="1">
+    <a:lvl6pPr marL="2286000" algn="l" defTabSz="914400" rtl="0" eaLnBrk="1" latinLnBrk="0" hangingPunct="1">
       <a:defRPr sz="1200" kern="1200">
         <a:solidFill>
           <a:schemeClr val="tx1"/>
@@ -441,7 +235,7 @@
         <a:cs typeface="+mn-cs"/>
       </a:defRPr>
     </a:lvl6pPr>
-    <a:lvl7pPr marL="2743200" algn="l" defTabSz="457200" rtl="0" eaLnBrk="1" latinLnBrk="0" hangingPunct="1">
+    <a:lvl7pPr marL="2743200" algn="l" defTabSz="914400" rtl="0" eaLnBrk="1" latinLnBrk="0" hangingPunct="1">
       <a:defRPr sz="1200" kern="1200">
         <a:solidFill>
           <a:schemeClr val="tx1"/>
@@ -451,7 +245,7 @@
         <a:cs typeface="+mn-cs"/>
       </a:defRPr>
     </a:lvl7pPr>
-    <a:lvl8pPr marL="3200400" algn="l" defTabSz="457200" rtl="0" eaLnBrk="1" latinLnBrk="0" hangingPunct="1">
+    <a:lvl8pPr marL="3200400" algn="l" defTabSz="914400" rtl="0" eaLnBrk="1" latinLnBrk="0" hangingPunct="1">
       <a:defRPr sz="1200" kern="1200">
         <a:solidFill>
           <a:schemeClr val="tx1"/>
@@ -461,7 +255,7 @@
         <a:cs typeface="+mn-cs"/>
       </a:defRPr>
     </a:lvl8pPr>
-    <a:lvl9pPr marL="3657600" algn="l" defTabSz="457200" rtl="0" eaLnBrk="1" latinLnBrk="0" hangingPunct="1">
+    <a:lvl9pPr marL="3657600" algn="l" defTabSz="914400" rtl="0" eaLnBrk="1" latinLnBrk="0" hangingPunct="1">
       <a:defRPr sz="1200" kern="1200">
         <a:solidFill>
           <a:schemeClr val="tx1"/>
@@ -476,7 +270,7 @@
 </file>
 
 <file path=ppt/notesSlides/notesSlide1.xml><?xml version="1.0" encoding="utf-8"?>
-<p:notes xmlns:a="http://schemas.openxmlformats.org/drawingml/2006/main" xmlns:p="http://schemas.openxmlformats.org/presentationml/2006/main" xmlns:r="http://schemas.openxmlformats.org/officeDocument/2006/relationships">
+<p:notes xmlns:a="http://schemas.openxmlformats.org/drawingml/2006/main" xmlns:r="http://schemas.openxmlformats.org/officeDocument/2006/relationships" xmlns:p="http://schemas.openxmlformats.org/presentationml/2006/main">
   <p:cSld>
     <p:spTree>
       <p:nvGrpSpPr>
@@ -496,7 +290,7 @@
         <p:nvSpPr>
           <p:cNvPr id="2" name="Slide Image Placeholder 1"/>
           <p:cNvSpPr>
-            <a:spLocks noGrp="1"/>
+            <a:spLocks noGrp="1" noRot="1" noChangeAspect="1"/>
           </p:cNvSpPr>
           <p:nvPr>
             <p:ph type="sldImg" idx="2"/>
@@ -511,7 +305,7 @@
             <a:spLocks noGrp="1"/>
           </p:cNvSpPr>
           <p:nvPr>
-            <p:ph type="body" idx="3" sz="quarter"/>
+            <p:ph type="body" sz="quarter" idx="3"/>
           </p:nvPr>
         </p:nvSpPr>
         <p:spPr/>
@@ -532,7 +326,7 @@
             <a:spLocks noGrp="1"/>
           </p:cNvSpPr>
           <p:nvPr>
-            <p:ph type="sldNum" idx="5" sz="quarter"/>
+            <p:ph type="sldNum" sz="quarter" idx="5"/>
           </p:nvPr>
         </p:nvSpPr>
         <p:spPr/>
@@ -546,7 +340,7 @@
 </file>
 
 <file path=ppt/notesSlides/notesSlide10.xml><?xml version="1.0" encoding="utf-8"?>
-<p:notes xmlns:a="http://schemas.openxmlformats.org/drawingml/2006/main" xmlns:p="http://schemas.openxmlformats.org/presentationml/2006/main" xmlns:r="http://schemas.openxmlformats.org/officeDocument/2006/relationships">
+<p:notes xmlns:a="http://schemas.openxmlformats.org/drawingml/2006/main" xmlns:r="http://schemas.openxmlformats.org/officeDocument/2006/relationships" xmlns:p="http://schemas.openxmlformats.org/presentationml/2006/main">
   <p:cSld>
     <p:spTree>
       <p:nvGrpSpPr>
@@ -566,7 +360,7 @@
         <p:nvSpPr>
           <p:cNvPr id="2" name="Slide Image Placeholder 1"/>
           <p:cNvSpPr>
-            <a:spLocks noGrp="1"/>
+            <a:spLocks noGrp="1" noRot="1" noChangeAspect="1"/>
           </p:cNvSpPr>
           <p:nvPr>
             <p:ph type="sldImg" idx="2"/>
@@ -581,7 +375,7 @@
             <a:spLocks noGrp="1"/>
           </p:cNvSpPr>
           <p:nvPr>
-            <p:ph type="body" idx="3" sz="quarter"/>
+            <p:ph type="body" sz="quarter" idx="3"/>
           </p:nvPr>
         </p:nvSpPr>
         <p:spPr/>
@@ -602,7 +396,7 @@
             <a:spLocks noGrp="1"/>
           </p:cNvSpPr>
           <p:nvPr>
-            <p:ph type="sldNum" idx="5" sz="quarter"/>
+            <p:ph type="sldNum" sz="quarter" idx="5"/>
           </p:nvPr>
         </p:nvSpPr>
         <p:spPr/>
@@ -616,7 +410,7 @@
 </file>
 
 <file path=ppt/notesSlides/notesSlide11.xml><?xml version="1.0" encoding="utf-8"?>
-<p:notes xmlns:a="http://schemas.openxmlformats.org/drawingml/2006/main" xmlns:p="http://schemas.openxmlformats.org/presentationml/2006/main" xmlns:r="http://schemas.openxmlformats.org/officeDocument/2006/relationships">
+<p:notes xmlns:a="http://schemas.openxmlformats.org/drawingml/2006/main" xmlns:r="http://schemas.openxmlformats.org/officeDocument/2006/relationships" xmlns:p="http://schemas.openxmlformats.org/presentationml/2006/main">
   <p:cSld>
     <p:spTree>
       <p:nvGrpSpPr>
@@ -636,7 +430,7 @@
         <p:nvSpPr>
           <p:cNvPr id="2" name="Slide Image Placeholder 1"/>
           <p:cNvSpPr>
-            <a:spLocks noGrp="1"/>
+            <a:spLocks noGrp="1" noRot="1" noChangeAspect="1"/>
           </p:cNvSpPr>
           <p:nvPr>
             <p:ph type="sldImg" idx="2"/>
@@ -651,7 +445,7 @@
             <a:spLocks noGrp="1"/>
           </p:cNvSpPr>
           <p:nvPr>
-            <p:ph type="body" idx="3" sz="quarter"/>
+            <p:ph type="body" sz="quarter" idx="3"/>
           </p:nvPr>
         </p:nvSpPr>
         <p:spPr/>
@@ -672,7 +466,7 @@
             <a:spLocks noGrp="1"/>
           </p:cNvSpPr>
           <p:nvPr>
-            <p:ph type="sldNum" idx="5" sz="quarter"/>
+            <p:ph type="sldNum" sz="quarter" idx="5"/>
           </p:nvPr>
         </p:nvSpPr>
         <p:spPr/>
@@ -686,7 +480,7 @@
 </file>
 
 <file path=ppt/notesSlides/notesSlide12.xml><?xml version="1.0" encoding="utf-8"?>
-<p:notes xmlns:a="http://schemas.openxmlformats.org/drawingml/2006/main" xmlns:p="http://schemas.openxmlformats.org/presentationml/2006/main" xmlns:r="http://schemas.openxmlformats.org/officeDocument/2006/relationships">
+<p:notes xmlns:a="http://schemas.openxmlformats.org/drawingml/2006/main" xmlns:r="http://schemas.openxmlformats.org/officeDocument/2006/relationships" xmlns:p="http://schemas.openxmlformats.org/presentationml/2006/main">
   <p:cSld>
     <p:spTree>
       <p:nvGrpSpPr>
@@ -706,7 +500,7 @@
         <p:nvSpPr>
           <p:cNvPr id="2" name="Slide Image Placeholder 1"/>
           <p:cNvSpPr>
-            <a:spLocks noGrp="1"/>
+            <a:spLocks noGrp="1" noRot="1" noChangeAspect="1"/>
           </p:cNvSpPr>
           <p:nvPr>
             <p:ph type="sldImg" idx="2"/>
@@ -721,7 +515,7 @@
             <a:spLocks noGrp="1"/>
           </p:cNvSpPr>
           <p:nvPr>
-            <p:ph type="body" idx="3" sz="quarter"/>
+            <p:ph type="body" sz="quarter" idx="3"/>
           </p:nvPr>
         </p:nvSpPr>
         <p:spPr/>
@@ -742,7 +536,7 @@
             <a:spLocks noGrp="1"/>
           </p:cNvSpPr>
           <p:nvPr>
-            <p:ph type="sldNum" idx="5" sz="quarter"/>
+            <p:ph type="sldNum" sz="quarter" idx="5"/>
           </p:nvPr>
         </p:nvSpPr>
         <p:spPr/>
@@ -756,7 +550,7 @@
 </file>
 
 <file path=ppt/notesSlides/notesSlide13.xml><?xml version="1.0" encoding="utf-8"?>
-<p:notes xmlns:a="http://schemas.openxmlformats.org/drawingml/2006/main" xmlns:p="http://schemas.openxmlformats.org/presentationml/2006/main" xmlns:r="http://schemas.openxmlformats.org/officeDocument/2006/relationships">
+<p:notes xmlns:a="http://schemas.openxmlformats.org/drawingml/2006/main" xmlns:r="http://schemas.openxmlformats.org/officeDocument/2006/relationships" xmlns:p="http://schemas.openxmlformats.org/presentationml/2006/main">
   <p:cSld>
     <p:spTree>
       <p:nvGrpSpPr>
@@ -776,7 +570,7 @@
         <p:nvSpPr>
           <p:cNvPr id="2" name="Slide Image Placeholder 1"/>
           <p:cNvSpPr>
-            <a:spLocks noGrp="1"/>
+            <a:spLocks noGrp="1" noRot="1" noChangeAspect="1"/>
           </p:cNvSpPr>
           <p:nvPr>
             <p:ph type="sldImg" idx="2"/>
@@ -791,7 +585,7 @@
             <a:spLocks noGrp="1"/>
           </p:cNvSpPr>
           <p:nvPr>
-            <p:ph type="body" idx="3" sz="quarter"/>
+            <p:ph type="body" sz="quarter" idx="3"/>
           </p:nvPr>
         </p:nvSpPr>
         <p:spPr/>
@@ -812,7 +606,7 @@
             <a:spLocks noGrp="1"/>
           </p:cNvSpPr>
           <p:nvPr>
-            <p:ph type="sldNum" idx="5" sz="quarter"/>
+            <p:ph type="sldNum" sz="quarter" idx="5"/>
           </p:nvPr>
         </p:nvSpPr>
         <p:spPr/>
@@ -826,7 +620,7 @@
 </file>
 
 <file path=ppt/notesSlides/notesSlide14.xml><?xml version="1.0" encoding="utf-8"?>
-<p:notes xmlns:a="http://schemas.openxmlformats.org/drawingml/2006/main" xmlns:p="http://schemas.openxmlformats.org/presentationml/2006/main" xmlns:r="http://schemas.openxmlformats.org/officeDocument/2006/relationships">
+<p:notes xmlns:a="http://schemas.openxmlformats.org/drawingml/2006/main" xmlns:r="http://schemas.openxmlformats.org/officeDocument/2006/relationships" xmlns:p="http://schemas.openxmlformats.org/presentationml/2006/main">
   <p:cSld>
     <p:spTree>
       <p:nvGrpSpPr>
@@ -846,7 +640,7 @@
         <p:nvSpPr>
           <p:cNvPr id="2" name="Slide Image Placeholder 1"/>
           <p:cNvSpPr>
-            <a:spLocks noGrp="1"/>
+            <a:spLocks noGrp="1" noRot="1" noChangeAspect="1"/>
           </p:cNvSpPr>
           <p:nvPr>
             <p:ph type="sldImg" idx="2"/>
@@ -861,7 +655,7 @@
             <a:spLocks noGrp="1"/>
           </p:cNvSpPr>
           <p:nvPr>
-            <p:ph type="body" idx="3" sz="quarter"/>
+            <p:ph type="body" sz="quarter" idx="3"/>
           </p:nvPr>
         </p:nvSpPr>
         <p:spPr/>
@@ -882,7 +676,7 @@
             <a:spLocks noGrp="1"/>
           </p:cNvSpPr>
           <p:nvPr>
-            <p:ph type="sldNum" idx="5" sz="quarter"/>
+            <p:ph type="sldNum" sz="quarter" idx="5"/>
           </p:nvPr>
         </p:nvSpPr>
         <p:spPr/>
@@ -896,7 +690,7 @@
 </file>
 
 <file path=ppt/notesSlides/notesSlide15.xml><?xml version="1.0" encoding="utf-8"?>
-<p:notes xmlns:a="http://schemas.openxmlformats.org/drawingml/2006/main" xmlns:p="http://schemas.openxmlformats.org/presentationml/2006/main" xmlns:r="http://schemas.openxmlformats.org/officeDocument/2006/relationships">
+<p:notes xmlns:a="http://schemas.openxmlformats.org/drawingml/2006/main" xmlns:r="http://schemas.openxmlformats.org/officeDocument/2006/relationships" xmlns:p="http://schemas.openxmlformats.org/presentationml/2006/main">
   <p:cSld>
     <p:spTree>
       <p:nvGrpSpPr>
@@ -916,7 +710,7 @@
         <p:nvSpPr>
           <p:cNvPr id="2" name="Slide Image Placeholder 1"/>
           <p:cNvSpPr>
-            <a:spLocks noGrp="1"/>
+            <a:spLocks noGrp="1" noRot="1" noChangeAspect="1"/>
           </p:cNvSpPr>
           <p:nvPr>
             <p:ph type="sldImg" idx="2"/>
@@ -931,7 +725,7 @@
             <a:spLocks noGrp="1"/>
           </p:cNvSpPr>
           <p:nvPr>
-            <p:ph type="body" idx="3" sz="quarter"/>
+            <p:ph type="body" sz="quarter" idx="3"/>
           </p:nvPr>
         </p:nvSpPr>
         <p:spPr/>
@@ -952,7 +746,7 @@
             <a:spLocks noGrp="1"/>
           </p:cNvSpPr>
           <p:nvPr>
-            <p:ph type="sldNum" idx="5" sz="quarter"/>
+            <p:ph type="sldNum" sz="quarter" idx="5"/>
           </p:nvPr>
         </p:nvSpPr>
         <p:spPr/>
@@ -966,7 +760,7 @@
 </file>
 
 <file path=ppt/notesSlides/notesSlide16.xml><?xml version="1.0" encoding="utf-8"?>
-<p:notes xmlns:a="http://schemas.openxmlformats.org/drawingml/2006/main" xmlns:p="http://schemas.openxmlformats.org/presentationml/2006/main" xmlns:r="http://schemas.openxmlformats.org/officeDocument/2006/relationships">
+<p:notes xmlns:a="http://schemas.openxmlformats.org/drawingml/2006/main" xmlns:r="http://schemas.openxmlformats.org/officeDocument/2006/relationships" xmlns:p="http://schemas.openxmlformats.org/presentationml/2006/main">
   <p:cSld>
     <p:spTree>
       <p:nvGrpSpPr>
@@ -986,7 +780,7 @@
         <p:nvSpPr>
           <p:cNvPr id="2" name="Slide Image Placeholder 1"/>
           <p:cNvSpPr>
-            <a:spLocks noGrp="1"/>
+            <a:spLocks noGrp="1" noRot="1" noChangeAspect="1"/>
           </p:cNvSpPr>
           <p:nvPr>
             <p:ph type="sldImg" idx="2"/>
@@ -1001,7 +795,7 @@
             <a:spLocks noGrp="1"/>
           </p:cNvSpPr>
           <p:nvPr>
-            <p:ph type="body" idx="3" sz="quarter"/>
+            <p:ph type="body" sz="quarter" idx="3"/>
           </p:nvPr>
         </p:nvSpPr>
         <p:spPr/>
@@ -1022,7 +816,7 @@
             <a:spLocks noGrp="1"/>
           </p:cNvSpPr>
           <p:nvPr>
-            <p:ph type="sldNum" idx="5" sz="quarter"/>
+            <p:ph type="sldNum" sz="quarter" idx="5"/>
           </p:nvPr>
         </p:nvSpPr>
         <p:spPr/>
@@ -1036,7 +830,7 @@
 </file>
 
 <file path=ppt/notesSlides/notesSlide17.xml><?xml version="1.0" encoding="utf-8"?>
-<p:notes xmlns:a="http://schemas.openxmlformats.org/drawingml/2006/main" xmlns:p="http://schemas.openxmlformats.org/presentationml/2006/main" xmlns:r="http://schemas.openxmlformats.org/officeDocument/2006/relationships">
+<p:notes xmlns:a="http://schemas.openxmlformats.org/drawingml/2006/main" xmlns:r="http://schemas.openxmlformats.org/officeDocument/2006/relationships" xmlns:p="http://schemas.openxmlformats.org/presentationml/2006/main">
   <p:cSld>
     <p:spTree>
       <p:nvGrpSpPr>
@@ -1056,7 +850,7 @@
         <p:nvSpPr>
           <p:cNvPr id="2" name="Slide Image Placeholder 1"/>
           <p:cNvSpPr>
-            <a:spLocks noGrp="1"/>
+            <a:spLocks noGrp="1" noRot="1" noChangeAspect="1"/>
           </p:cNvSpPr>
           <p:nvPr>
             <p:ph type="sldImg" idx="2"/>
@@ -1071,7 +865,7 @@
             <a:spLocks noGrp="1"/>
           </p:cNvSpPr>
           <p:nvPr>
-            <p:ph type="body" idx="3" sz="quarter"/>
+            <p:ph type="body" sz="quarter" idx="3"/>
           </p:nvPr>
         </p:nvSpPr>
         <p:spPr/>
@@ -1092,7 +886,7 @@
             <a:spLocks noGrp="1"/>
           </p:cNvSpPr>
           <p:nvPr>
-            <p:ph type="sldNum" idx="5" sz="quarter"/>
+            <p:ph type="sldNum" sz="quarter" idx="5"/>
           </p:nvPr>
         </p:nvSpPr>
         <p:spPr/>
@@ -1106,7 +900,7 @@
 </file>
 
 <file path=ppt/notesSlides/notesSlide18.xml><?xml version="1.0" encoding="utf-8"?>
-<p:notes xmlns:a="http://schemas.openxmlformats.org/drawingml/2006/main" xmlns:p="http://schemas.openxmlformats.org/presentationml/2006/main" xmlns:r="http://schemas.openxmlformats.org/officeDocument/2006/relationships">
+<p:notes xmlns:a="http://schemas.openxmlformats.org/drawingml/2006/main" xmlns:r="http://schemas.openxmlformats.org/officeDocument/2006/relationships" xmlns:p="http://schemas.openxmlformats.org/presentationml/2006/main">
   <p:cSld>
     <p:spTree>
       <p:nvGrpSpPr>
@@ -1126,7 +920,7 @@
         <p:nvSpPr>
           <p:cNvPr id="2" name="Slide Image Placeholder 1"/>
           <p:cNvSpPr>
-            <a:spLocks noGrp="1"/>
+            <a:spLocks noGrp="1" noRot="1" noChangeAspect="1"/>
           </p:cNvSpPr>
           <p:nvPr>
             <p:ph type="sldImg" idx="2"/>
@@ -1141,7 +935,7 @@
             <a:spLocks noGrp="1"/>
           </p:cNvSpPr>
           <p:nvPr>
-            <p:ph type="body" idx="3" sz="quarter"/>
+            <p:ph type="body" sz="quarter" idx="3"/>
           </p:nvPr>
         </p:nvSpPr>
         <p:spPr/>
@@ -1162,7 +956,7 @@
             <a:spLocks noGrp="1"/>
           </p:cNvSpPr>
           <p:nvPr>
-            <p:ph type="sldNum" idx="5" sz="quarter"/>
+            <p:ph type="sldNum" sz="quarter" idx="5"/>
           </p:nvPr>
         </p:nvSpPr>
         <p:spPr/>
@@ -1176,7 +970,7 @@
 </file>
 
 <file path=ppt/notesSlides/notesSlide19.xml><?xml version="1.0" encoding="utf-8"?>
-<p:notes xmlns:a="http://schemas.openxmlformats.org/drawingml/2006/main" xmlns:p="http://schemas.openxmlformats.org/presentationml/2006/main" xmlns:r="http://schemas.openxmlformats.org/officeDocument/2006/relationships">
+<p:notes xmlns:a="http://schemas.openxmlformats.org/drawingml/2006/main" xmlns:r="http://schemas.openxmlformats.org/officeDocument/2006/relationships" xmlns:p="http://schemas.openxmlformats.org/presentationml/2006/main">
   <p:cSld>
     <p:spTree>
       <p:nvGrpSpPr>
@@ -1196,7 +990,7 @@
         <p:nvSpPr>
           <p:cNvPr id="2" name="Slide Image Placeholder 1"/>
           <p:cNvSpPr>
-            <a:spLocks noGrp="1"/>
+            <a:spLocks noGrp="1" noRot="1" noChangeAspect="1"/>
           </p:cNvSpPr>
           <p:nvPr>
             <p:ph type="sldImg" idx="2"/>
@@ -1211,7 +1005,7 @@
             <a:spLocks noGrp="1"/>
           </p:cNvSpPr>
           <p:nvPr>
-            <p:ph type="body" idx="3" sz="quarter"/>
+            <p:ph type="body" sz="quarter" idx="3"/>
           </p:nvPr>
         </p:nvSpPr>
         <p:spPr/>
@@ -1232,7 +1026,7 @@
             <a:spLocks noGrp="1"/>
           </p:cNvSpPr>
           <p:nvPr>
-            <p:ph type="sldNum" idx="5" sz="quarter"/>
+            <p:ph type="sldNum" sz="quarter" idx="5"/>
           </p:nvPr>
         </p:nvSpPr>
         <p:spPr/>
@@ -1246,7 +1040,7 @@
 </file>
 
 <file path=ppt/notesSlides/notesSlide2.xml><?xml version="1.0" encoding="utf-8"?>
-<p:notes xmlns:a="http://schemas.openxmlformats.org/drawingml/2006/main" xmlns:p="http://schemas.openxmlformats.org/presentationml/2006/main" xmlns:r="http://schemas.openxmlformats.org/officeDocument/2006/relationships">
+<p:notes xmlns:a="http://schemas.openxmlformats.org/drawingml/2006/main" xmlns:r="http://schemas.openxmlformats.org/officeDocument/2006/relationships" xmlns:p="http://schemas.openxmlformats.org/presentationml/2006/main">
   <p:cSld>
     <p:spTree>
       <p:nvGrpSpPr>
@@ -1266,7 +1060,7 @@
         <p:nvSpPr>
           <p:cNvPr id="2" name="Slide Image Placeholder 1"/>
           <p:cNvSpPr>
-            <a:spLocks noGrp="1"/>
+            <a:spLocks noGrp="1" noRot="1" noChangeAspect="1"/>
           </p:cNvSpPr>
           <p:nvPr>
             <p:ph type="sldImg" idx="2"/>
@@ -1281,7 +1075,7 @@
             <a:spLocks noGrp="1"/>
           </p:cNvSpPr>
           <p:nvPr>
-            <p:ph type="body" idx="3" sz="quarter"/>
+            <p:ph type="body" sz="quarter" idx="3"/>
           </p:nvPr>
         </p:nvSpPr>
         <p:spPr/>
@@ -1302,7 +1096,7 @@
             <a:spLocks noGrp="1"/>
           </p:cNvSpPr>
           <p:nvPr>
-            <p:ph type="sldNum" idx="5" sz="quarter"/>
+            <p:ph type="sldNum" sz="quarter" idx="5"/>
           </p:nvPr>
         </p:nvSpPr>
         <p:spPr/>
@@ -1316,7 +1110,7 @@
 </file>
 
 <file path=ppt/notesSlides/notesSlide3.xml><?xml version="1.0" encoding="utf-8"?>
-<p:notes xmlns:a="http://schemas.openxmlformats.org/drawingml/2006/main" xmlns:p="http://schemas.openxmlformats.org/presentationml/2006/main" xmlns:r="http://schemas.openxmlformats.org/officeDocument/2006/relationships">
+<p:notes xmlns:a="http://schemas.openxmlformats.org/drawingml/2006/main" xmlns:r="http://schemas.openxmlformats.org/officeDocument/2006/relationships" xmlns:p="http://schemas.openxmlformats.org/presentationml/2006/main">
   <p:cSld>
     <p:spTree>
       <p:nvGrpSpPr>
@@ -1336,7 +1130,7 @@
         <p:nvSpPr>
           <p:cNvPr id="2" name="Slide Image Placeholder 1"/>
           <p:cNvSpPr>
-            <a:spLocks noGrp="1"/>
+            <a:spLocks noGrp="1" noRot="1" noChangeAspect="1"/>
           </p:cNvSpPr>
           <p:nvPr>
             <p:ph type="sldImg" idx="2"/>
@@ -1351,7 +1145,7 @@
             <a:spLocks noGrp="1"/>
           </p:cNvSpPr>
           <p:nvPr>
-            <p:ph type="body" idx="3" sz="quarter"/>
+            <p:ph type="body" sz="quarter" idx="3"/>
           </p:nvPr>
         </p:nvSpPr>
         <p:spPr/>
@@ -1372,7 +1166,7 @@
             <a:spLocks noGrp="1"/>
           </p:cNvSpPr>
           <p:nvPr>
-            <p:ph type="sldNum" idx="5" sz="quarter"/>
+            <p:ph type="sldNum" sz="quarter" idx="5"/>
           </p:nvPr>
         </p:nvSpPr>
         <p:spPr/>
@@ -1386,7 +1180,7 @@
 </file>
 
 <file path=ppt/notesSlides/notesSlide4.xml><?xml version="1.0" encoding="utf-8"?>
-<p:notes xmlns:a="http://schemas.openxmlformats.org/drawingml/2006/main" xmlns:p="http://schemas.openxmlformats.org/presentationml/2006/main" xmlns:r="http://schemas.openxmlformats.org/officeDocument/2006/relationships">
+<p:notes xmlns:a="http://schemas.openxmlformats.org/drawingml/2006/main" xmlns:r="http://schemas.openxmlformats.org/officeDocument/2006/relationships" xmlns:p="http://schemas.openxmlformats.org/presentationml/2006/main">
   <p:cSld>
     <p:spTree>
       <p:nvGrpSpPr>
@@ -1406,7 +1200,7 @@
         <p:nvSpPr>
           <p:cNvPr id="2" name="Slide Image Placeholder 1"/>
           <p:cNvSpPr>
-            <a:spLocks noGrp="1"/>
+            <a:spLocks noGrp="1" noRot="1" noChangeAspect="1"/>
           </p:cNvSpPr>
           <p:nvPr>
             <p:ph type="sldImg" idx="2"/>
@@ -1421,7 +1215,7 @@
             <a:spLocks noGrp="1"/>
           </p:cNvSpPr>
           <p:nvPr>
-            <p:ph type="body" idx="3" sz="quarter"/>
+            <p:ph type="body" sz="quarter" idx="3"/>
           </p:nvPr>
         </p:nvSpPr>
         <p:spPr/>
@@ -1442,7 +1236,7 @@
             <a:spLocks noGrp="1"/>
           </p:cNvSpPr>
           <p:nvPr>
-            <p:ph type="sldNum" idx="5" sz="quarter"/>
+            <p:ph type="sldNum" sz="quarter" idx="5"/>
           </p:nvPr>
         </p:nvSpPr>
         <p:spPr/>
@@ -1456,7 +1250,7 @@
 </file>
 
 <file path=ppt/notesSlides/notesSlide5.xml><?xml version="1.0" encoding="utf-8"?>
-<p:notes xmlns:a="http://schemas.openxmlformats.org/drawingml/2006/main" xmlns:p="http://schemas.openxmlformats.org/presentationml/2006/main" xmlns:r="http://schemas.openxmlformats.org/officeDocument/2006/relationships">
+<p:notes xmlns:a="http://schemas.openxmlformats.org/drawingml/2006/main" xmlns:r="http://schemas.openxmlformats.org/officeDocument/2006/relationships" xmlns:p="http://schemas.openxmlformats.org/presentationml/2006/main">
   <p:cSld>
     <p:spTree>
       <p:nvGrpSpPr>
@@ -1476,7 +1270,7 @@
         <p:nvSpPr>
           <p:cNvPr id="2" name="Slide Image Placeholder 1"/>
           <p:cNvSpPr>
-            <a:spLocks noGrp="1"/>
+            <a:spLocks noGrp="1" noRot="1" noChangeAspect="1"/>
           </p:cNvSpPr>
           <p:nvPr>
             <p:ph type="sldImg" idx="2"/>
@@ -1491,7 +1285,7 @@
             <a:spLocks noGrp="1"/>
           </p:cNvSpPr>
           <p:nvPr>
-            <p:ph type="body" idx="3" sz="quarter"/>
+            <p:ph type="body" sz="quarter" idx="3"/>
           </p:nvPr>
         </p:nvSpPr>
         <p:spPr/>
@@ -1512,7 +1306,7 @@
             <a:spLocks noGrp="1"/>
           </p:cNvSpPr>
           <p:nvPr>
-            <p:ph type="sldNum" idx="5" sz="quarter"/>
+            <p:ph type="sldNum" sz="quarter" idx="5"/>
           </p:nvPr>
         </p:nvSpPr>
         <p:spPr/>
@@ -1526,7 +1320,7 @@
 </file>
 
 <file path=ppt/notesSlides/notesSlide6.xml><?xml version="1.0" encoding="utf-8"?>
-<p:notes xmlns:a="http://schemas.openxmlformats.org/drawingml/2006/main" xmlns:p="http://schemas.openxmlformats.org/presentationml/2006/main" xmlns:r="http://schemas.openxmlformats.org/officeDocument/2006/relationships">
+<p:notes xmlns:a="http://schemas.openxmlformats.org/drawingml/2006/main" xmlns:r="http://schemas.openxmlformats.org/officeDocument/2006/relationships" xmlns:p="http://schemas.openxmlformats.org/presentationml/2006/main">
   <p:cSld>
     <p:spTree>
       <p:nvGrpSpPr>
@@ -1546,7 +1340,7 @@
         <p:nvSpPr>
           <p:cNvPr id="2" name="Slide Image Placeholder 1"/>
           <p:cNvSpPr>
-            <a:spLocks noGrp="1"/>
+            <a:spLocks noGrp="1" noRot="1" noChangeAspect="1"/>
           </p:cNvSpPr>
           <p:nvPr>
             <p:ph type="sldImg" idx="2"/>
@@ -1561,7 +1355,7 @@
             <a:spLocks noGrp="1"/>
           </p:cNvSpPr>
           <p:nvPr>
-            <p:ph type="body" idx="3" sz="quarter"/>
+            <p:ph type="body" sz="quarter" idx="3"/>
           </p:nvPr>
         </p:nvSpPr>
         <p:spPr/>
@@ -1582,7 +1376,7 @@
             <a:spLocks noGrp="1"/>
           </p:cNvSpPr>
           <p:nvPr>
-            <p:ph type="sldNum" idx="5" sz="quarter"/>
+            <p:ph type="sldNum" sz="quarter" idx="5"/>
           </p:nvPr>
         </p:nvSpPr>
         <p:spPr/>
@@ -1596,7 +1390,7 @@
 </file>
 
 <file path=ppt/notesSlides/notesSlide7.xml><?xml version="1.0" encoding="utf-8"?>
-<p:notes xmlns:a="http://schemas.openxmlformats.org/drawingml/2006/main" xmlns:p="http://schemas.openxmlformats.org/presentationml/2006/main" xmlns:r="http://schemas.openxmlformats.org/officeDocument/2006/relationships">
+<p:notes xmlns:a="http://schemas.openxmlformats.org/drawingml/2006/main" xmlns:r="http://schemas.openxmlformats.org/officeDocument/2006/relationships" xmlns:p="http://schemas.openxmlformats.org/presentationml/2006/main">
   <p:cSld>
     <p:spTree>
       <p:nvGrpSpPr>
@@ -1616,7 +1410,7 @@
         <p:nvSpPr>
           <p:cNvPr id="2" name="Slide Image Placeholder 1"/>
           <p:cNvSpPr>
-            <a:spLocks noGrp="1"/>
+            <a:spLocks noGrp="1" noRot="1" noChangeAspect="1"/>
           </p:cNvSpPr>
           <p:nvPr>
             <p:ph type="sldImg" idx="2"/>
@@ -1631,7 +1425,7 @@
             <a:spLocks noGrp="1"/>
           </p:cNvSpPr>
           <p:nvPr>
-            <p:ph type="body" idx="3" sz="quarter"/>
+            <p:ph type="body" sz="quarter" idx="3"/>
           </p:nvPr>
         </p:nvSpPr>
         <p:spPr/>
@@ -1652,7 +1446,7 @@
             <a:spLocks noGrp="1"/>
           </p:cNvSpPr>
           <p:nvPr>
-            <p:ph type="sldNum" idx="5" sz="quarter"/>
+            <p:ph type="sldNum" sz="quarter" idx="5"/>
           </p:nvPr>
         </p:nvSpPr>
         <p:spPr/>
@@ -1666,7 +1460,7 @@
 </file>
 
 <file path=ppt/notesSlides/notesSlide8.xml><?xml version="1.0" encoding="utf-8"?>
-<p:notes xmlns:a="http://schemas.openxmlformats.org/drawingml/2006/main" xmlns:p="http://schemas.openxmlformats.org/presentationml/2006/main" xmlns:r="http://schemas.openxmlformats.org/officeDocument/2006/relationships">
+<p:notes xmlns:a="http://schemas.openxmlformats.org/drawingml/2006/main" xmlns:r="http://schemas.openxmlformats.org/officeDocument/2006/relationships" xmlns:p="http://schemas.openxmlformats.org/presentationml/2006/main">
   <p:cSld>
     <p:spTree>
       <p:nvGrpSpPr>
@@ -1686,7 +1480,7 @@
         <p:nvSpPr>
           <p:cNvPr id="2" name="Slide Image Placeholder 1"/>
           <p:cNvSpPr>
-            <a:spLocks noGrp="1"/>
+            <a:spLocks noGrp="1" noRot="1" noChangeAspect="1"/>
           </p:cNvSpPr>
           <p:nvPr>
             <p:ph type="sldImg" idx="2"/>
@@ -1701,7 +1495,7 @@
             <a:spLocks noGrp="1"/>
           </p:cNvSpPr>
           <p:nvPr>
-            <p:ph type="body" idx="3" sz="quarter"/>
+            <p:ph type="body" sz="quarter" idx="3"/>
           </p:nvPr>
         </p:nvSpPr>
         <p:spPr/>
@@ -1722,7 +1516,7 @@
             <a:spLocks noGrp="1"/>
           </p:cNvSpPr>
           <p:nvPr>
-            <p:ph type="sldNum" idx="5" sz="quarter"/>
+            <p:ph type="sldNum" sz="quarter" idx="5"/>
           </p:nvPr>
         </p:nvSpPr>
         <p:spPr/>
@@ -1736,7 +1530,7 @@
 </file>
 
 <file path=ppt/notesSlides/notesSlide9.xml><?xml version="1.0" encoding="utf-8"?>
-<p:notes xmlns:a="http://schemas.openxmlformats.org/drawingml/2006/main" xmlns:p="http://schemas.openxmlformats.org/presentationml/2006/main" xmlns:r="http://schemas.openxmlformats.org/officeDocument/2006/relationships">
+<p:notes xmlns:a="http://schemas.openxmlformats.org/drawingml/2006/main" xmlns:r="http://schemas.openxmlformats.org/officeDocument/2006/relationships" xmlns:p="http://schemas.openxmlformats.org/presentationml/2006/main">
   <p:cSld>
     <p:spTree>
       <p:nvGrpSpPr>
@@ -1756,7 +1550,7 @@
         <p:nvSpPr>
           <p:cNvPr id="2" name="Slide Image Placeholder 1"/>
           <p:cNvSpPr>
-            <a:spLocks noGrp="1"/>
+            <a:spLocks noGrp="1" noRot="1" noChangeAspect="1"/>
           </p:cNvSpPr>
           <p:nvPr>
             <p:ph type="sldImg" idx="2"/>
@@ -1771,7 +1565,7 @@
             <a:spLocks noGrp="1"/>
           </p:cNvSpPr>
           <p:nvPr>
-            <p:ph type="body" idx="3" sz="quarter"/>
+            <p:ph type="body" sz="quarter" idx="3"/>
           </p:nvPr>
         </p:nvSpPr>
         <p:spPr/>
@@ -1792,7 +1586,7 @@
             <a:spLocks noGrp="1"/>
           </p:cNvSpPr>
           <p:nvPr>
-            <p:ph type="sldNum" idx="5" sz="quarter"/>
+            <p:ph type="sldNum" sz="quarter" idx="5"/>
           </p:nvPr>
         </p:nvSpPr>
         <p:spPr/>
@@ -1843,10 +1637,9 @@
           <a:lstStyle/>
           <a:p>
             <a:r>
-              <a:rPr lang="en-US" smtClean="0"/>
+              <a:rPr lang="en-US"/>
               <a:t>Click to edit Master title style</a:t>
             </a:r>
-            <a:endParaRPr lang="en-US"/>
           </a:p>
         </p:txBody>
       </p:sp>
@@ -1962,10 +1755,9 @@
           </a:lstStyle>
           <a:p>
             <a:r>
-              <a:rPr lang="en-US" smtClean="0"/>
+              <a:rPr lang="en-US"/>
               <a:t>Click to edit Master subtitle style</a:t>
             </a:r>
-            <a:endParaRPr lang="en-US"/>
           </a:p>
         </p:txBody>
       </p:sp>
@@ -1986,7 +1778,7 @@
           <a:p>
             <a:fld id="{5BCAD085-E8A6-8845-BD4E-CB4CCA059FC4}" type="datetimeFigureOut">
               <a:rPr lang="en-US" smtClean="0"/>
-              <a:t>1/27/13</a:t>
+              <a:t>9/1/2026</a:t>
             </a:fld>
             <a:endParaRPr lang="en-US"/>
           </a:p>
@@ -2080,10 +1872,9 @@
           <a:lstStyle/>
           <a:p>
             <a:r>
-              <a:rPr lang="en-US" smtClean="0"/>
+              <a:rPr lang="en-US"/>
               <a:t>Click to edit Master title style</a:t>
             </a:r>
-            <a:endParaRPr lang="en-US"/>
           </a:p>
         </p:txBody>
       </p:sp>
@@ -2104,38 +1895,37 @@
           <a:p>
             <a:pPr lvl="0"/>
             <a:r>
-              <a:rPr lang="en-US" smtClean="0"/>
+              <a:rPr lang="en-US"/>
               <a:t>Click to edit Master text styles</a:t>
             </a:r>
           </a:p>
           <a:p>
             <a:pPr lvl="1"/>
             <a:r>
-              <a:rPr lang="en-US" smtClean="0"/>
+              <a:rPr lang="en-US"/>
               <a:t>Second level</a:t>
             </a:r>
           </a:p>
           <a:p>
             <a:pPr lvl="2"/>
             <a:r>
-              <a:rPr lang="en-US" smtClean="0"/>
+              <a:rPr lang="en-US"/>
               <a:t>Third level</a:t>
             </a:r>
           </a:p>
           <a:p>
             <a:pPr lvl="3"/>
             <a:r>
-              <a:rPr lang="en-US" smtClean="0"/>
+              <a:rPr lang="en-US"/>
               <a:t>Fourth level</a:t>
             </a:r>
           </a:p>
           <a:p>
             <a:pPr lvl="4"/>
             <a:r>
-              <a:rPr lang="en-US" smtClean="0"/>
+              <a:rPr lang="en-US"/>
               <a:t>Fifth level</a:t>
             </a:r>
-            <a:endParaRPr lang="en-US"/>
           </a:p>
         </p:txBody>
       </p:sp>
@@ -2156,7 +1946,7 @@
           <a:p>
             <a:fld id="{5BCAD085-E8A6-8845-BD4E-CB4CCA059FC4}" type="datetimeFigureOut">
               <a:rPr lang="en-US" smtClean="0"/>
-              <a:t>1/27/13</a:t>
+              <a:t>9/1/2026</a:t>
             </a:fld>
             <a:endParaRPr lang="en-US"/>
           </a:p>
@@ -2255,10 +2045,9 @@
           <a:lstStyle/>
           <a:p>
             <a:r>
-              <a:rPr lang="en-US" smtClean="0"/>
+              <a:rPr lang="en-US"/>
               <a:t>Click to edit Master title style</a:t>
             </a:r>
-            <a:endParaRPr lang="en-US"/>
           </a:p>
         </p:txBody>
       </p:sp>
@@ -2284,38 +2073,37 @@
           <a:p>
             <a:pPr lvl="0"/>
             <a:r>
-              <a:rPr lang="en-US" smtClean="0"/>
+              <a:rPr lang="en-US"/>
               <a:t>Click to edit Master text styles</a:t>
             </a:r>
           </a:p>
           <a:p>
             <a:pPr lvl="1"/>
             <a:r>
-              <a:rPr lang="en-US" smtClean="0"/>
+              <a:rPr lang="en-US"/>
               <a:t>Second level</a:t>
             </a:r>
           </a:p>
           <a:p>
             <a:pPr lvl="2"/>
             <a:r>
-              <a:rPr lang="en-US" smtClean="0"/>
+              <a:rPr lang="en-US"/>
               <a:t>Third level</a:t>
             </a:r>
           </a:p>
           <a:p>
             <a:pPr lvl="3"/>
             <a:r>
-              <a:rPr lang="en-US" smtClean="0"/>
+              <a:rPr lang="en-US"/>
               <a:t>Fourth level</a:t>
             </a:r>
           </a:p>
           <a:p>
             <a:pPr lvl="4"/>
             <a:r>
-              <a:rPr lang="en-US" smtClean="0"/>
+              <a:rPr lang="en-US"/>
               <a:t>Fifth level</a:t>
             </a:r>
-            <a:endParaRPr lang="en-US"/>
           </a:p>
         </p:txBody>
       </p:sp>
@@ -2336,7 +2124,7 @@
           <a:p>
             <a:fld id="{5BCAD085-E8A6-8845-BD4E-CB4CCA059FC4}" type="datetimeFigureOut">
               <a:rPr lang="en-US" smtClean="0"/>
-              <a:t>1/27/13</a:t>
+              <a:t>9/1/2026</a:t>
             </a:fld>
             <a:endParaRPr lang="en-US"/>
           </a:p>
@@ -2430,10 +2218,9 @@
           <a:lstStyle/>
           <a:p>
             <a:r>
-              <a:rPr lang="en-US" smtClean="0"/>
+              <a:rPr lang="en-US"/>
               <a:t>Click to edit Master title style</a:t>
             </a:r>
-            <a:endParaRPr lang="en-US"/>
           </a:p>
         </p:txBody>
       </p:sp>
@@ -2454,38 +2241,37 @@
           <a:p>
             <a:pPr lvl="0"/>
             <a:r>
-              <a:rPr lang="en-US" smtClean="0"/>
+              <a:rPr lang="en-US"/>
               <a:t>Click to edit Master text styles</a:t>
             </a:r>
           </a:p>
           <a:p>
             <a:pPr lvl="1"/>
             <a:r>
-              <a:rPr lang="en-US" smtClean="0"/>
+              <a:rPr lang="en-US"/>
               <a:t>Second level</a:t>
             </a:r>
           </a:p>
           <a:p>
             <a:pPr lvl="2"/>
             <a:r>
-              <a:rPr lang="en-US" smtClean="0"/>
+              <a:rPr lang="en-US"/>
               <a:t>Third level</a:t>
             </a:r>
           </a:p>
           <a:p>
             <a:pPr lvl="3"/>
             <a:r>
-              <a:rPr lang="en-US" smtClean="0"/>
+              <a:rPr lang="en-US"/>
               <a:t>Fourth level</a:t>
             </a:r>
           </a:p>
           <a:p>
             <a:pPr lvl="4"/>
             <a:r>
-              <a:rPr lang="en-US" smtClean="0"/>
+              <a:rPr lang="en-US"/>
               <a:t>Fifth level</a:t>
             </a:r>
-            <a:endParaRPr lang="en-US"/>
           </a:p>
         </p:txBody>
       </p:sp>
@@ -2506,7 +2292,7 @@
           <a:p>
             <a:fld id="{5BCAD085-E8A6-8845-BD4E-CB4CCA059FC4}" type="datetimeFigureOut">
               <a:rPr lang="en-US" smtClean="0"/>
-              <a:t>1/27/13</a:t>
+              <a:t>9/1/2026</a:t>
             </a:fld>
             <a:endParaRPr lang="en-US"/>
           </a:p>
@@ -2609,10 +2395,9 @@
           </a:lstStyle>
           <a:p>
             <a:r>
-              <a:rPr lang="en-US" smtClean="0"/>
+              <a:rPr lang="en-US"/>
               <a:t>Click to edit Master title style</a:t>
             </a:r>
-            <a:endParaRPr lang="en-US"/>
           </a:p>
         </p:txBody>
       </p:sp>
@@ -2729,7 +2514,7 @@
           <a:p>
             <a:pPr lvl="0"/>
             <a:r>
-              <a:rPr lang="en-US" smtClean="0"/>
+              <a:rPr lang="en-US"/>
               <a:t>Click to edit Master text styles</a:t>
             </a:r>
           </a:p>
@@ -2752,7 +2537,7 @@
           <a:p>
             <a:fld id="{5BCAD085-E8A6-8845-BD4E-CB4CCA059FC4}" type="datetimeFigureOut">
               <a:rPr lang="en-US" smtClean="0"/>
-              <a:t>1/27/13</a:t>
+              <a:t>9/1/2026</a:t>
             </a:fld>
             <a:endParaRPr lang="en-US"/>
           </a:p>
@@ -2846,10 +2631,9 @@
           <a:lstStyle/>
           <a:p>
             <a:r>
-              <a:rPr lang="en-US" smtClean="0"/>
+              <a:rPr lang="en-US"/>
               <a:t>Click to edit Master title style</a:t>
             </a:r>
-            <a:endParaRPr lang="en-US"/>
           </a:p>
         </p:txBody>
       </p:sp>
@@ -2903,38 +2687,37 @@
           <a:p>
             <a:pPr lvl="0"/>
             <a:r>
-              <a:rPr lang="en-US" smtClean="0"/>
+              <a:rPr lang="en-US"/>
               <a:t>Click to edit Master text styles</a:t>
             </a:r>
           </a:p>
           <a:p>
             <a:pPr lvl="1"/>
             <a:r>
-              <a:rPr lang="en-US" smtClean="0"/>
+              <a:rPr lang="en-US"/>
               <a:t>Second level</a:t>
             </a:r>
           </a:p>
           <a:p>
             <a:pPr lvl="2"/>
             <a:r>
-              <a:rPr lang="en-US" smtClean="0"/>
+              <a:rPr lang="en-US"/>
               <a:t>Third level</a:t>
             </a:r>
           </a:p>
           <a:p>
             <a:pPr lvl="3"/>
             <a:r>
-              <a:rPr lang="en-US" smtClean="0"/>
+              <a:rPr lang="en-US"/>
               <a:t>Fourth level</a:t>
             </a:r>
           </a:p>
           <a:p>
             <a:pPr lvl="4"/>
             <a:r>
-              <a:rPr lang="en-US" smtClean="0"/>
+              <a:rPr lang="en-US"/>
               <a:t>Fifth level</a:t>
             </a:r>
-            <a:endParaRPr lang="en-US"/>
           </a:p>
         </p:txBody>
       </p:sp>
@@ -2988,38 +2771,37 @@
           <a:p>
             <a:pPr lvl="0"/>
             <a:r>
-              <a:rPr lang="en-US" smtClean="0"/>
+              <a:rPr lang="en-US"/>
               <a:t>Click to edit Master text styles</a:t>
             </a:r>
           </a:p>
           <a:p>
             <a:pPr lvl="1"/>
             <a:r>
-              <a:rPr lang="en-US" smtClean="0"/>
+              <a:rPr lang="en-US"/>
               <a:t>Second level</a:t>
             </a:r>
           </a:p>
           <a:p>
             <a:pPr lvl="2"/>
             <a:r>
-              <a:rPr lang="en-US" smtClean="0"/>
+              <a:rPr lang="en-US"/>
               <a:t>Third level</a:t>
             </a:r>
           </a:p>
           <a:p>
             <a:pPr lvl="3"/>
             <a:r>
-              <a:rPr lang="en-US" smtClean="0"/>
+              <a:rPr lang="en-US"/>
               <a:t>Fourth level</a:t>
             </a:r>
           </a:p>
           <a:p>
             <a:pPr lvl="4"/>
             <a:r>
-              <a:rPr lang="en-US" smtClean="0"/>
+              <a:rPr lang="en-US"/>
               <a:t>Fifth level</a:t>
             </a:r>
-            <a:endParaRPr lang="en-US"/>
           </a:p>
         </p:txBody>
       </p:sp>
@@ -3040,7 +2822,7 @@
           <a:p>
             <a:fld id="{5BCAD085-E8A6-8845-BD4E-CB4CCA059FC4}" type="datetimeFigureOut">
               <a:rPr lang="en-US" smtClean="0"/>
-              <a:t>1/27/13</a:t>
+              <a:t>9/1/2026</a:t>
             </a:fld>
             <a:endParaRPr lang="en-US"/>
           </a:p>
@@ -3138,10 +2920,9 @@
           </a:lstStyle>
           <a:p>
             <a:r>
-              <a:rPr lang="en-US" smtClean="0"/>
+              <a:rPr lang="en-US"/>
               <a:t>Click to edit Master title style</a:t>
             </a:r>
-            <a:endParaRPr lang="en-US"/>
           </a:p>
         </p:txBody>
       </p:sp>
@@ -3204,7 +2985,7 @@
           <a:p>
             <a:pPr lvl="0"/>
             <a:r>
-              <a:rPr lang="en-US" smtClean="0"/>
+              <a:rPr lang="en-US"/>
               <a:t>Click to edit Master text styles</a:t>
             </a:r>
           </a:p>
@@ -3260,38 +3041,37 @@
           <a:p>
             <a:pPr lvl="0"/>
             <a:r>
-              <a:rPr lang="en-US" smtClean="0"/>
+              <a:rPr lang="en-US"/>
               <a:t>Click to edit Master text styles</a:t>
             </a:r>
           </a:p>
           <a:p>
             <a:pPr lvl="1"/>
             <a:r>
-              <a:rPr lang="en-US" smtClean="0"/>
+              <a:rPr lang="en-US"/>
               <a:t>Second level</a:t>
             </a:r>
           </a:p>
           <a:p>
             <a:pPr lvl="2"/>
             <a:r>
-              <a:rPr lang="en-US" smtClean="0"/>
+              <a:rPr lang="en-US"/>
               <a:t>Third level</a:t>
             </a:r>
           </a:p>
           <a:p>
             <a:pPr lvl="3"/>
             <a:r>
-              <a:rPr lang="en-US" smtClean="0"/>
+              <a:rPr lang="en-US"/>
               <a:t>Fourth level</a:t>
             </a:r>
           </a:p>
           <a:p>
             <a:pPr lvl="4"/>
             <a:r>
-              <a:rPr lang="en-US" smtClean="0"/>
+              <a:rPr lang="en-US"/>
               <a:t>Fifth level</a:t>
             </a:r>
-            <a:endParaRPr lang="en-US"/>
           </a:p>
         </p:txBody>
       </p:sp>
@@ -3354,7 +3134,7 @@
           <a:p>
             <a:pPr lvl="0"/>
             <a:r>
-              <a:rPr lang="en-US" smtClean="0"/>
+              <a:rPr lang="en-US"/>
               <a:t>Click to edit Master text styles</a:t>
             </a:r>
           </a:p>
@@ -3410,38 +3190,37 @@
           <a:p>
             <a:pPr lvl="0"/>
             <a:r>
-              <a:rPr lang="en-US" smtClean="0"/>
+              <a:rPr lang="en-US"/>
               <a:t>Click to edit Master text styles</a:t>
             </a:r>
           </a:p>
           <a:p>
             <a:pPr lvl="1"/>
             <a:r>
-              <a:rPr lang="en-US" smtClean="0"/>
+              <a:rPr lang="en-US"/>
               <a:t>Second level</a:t>
             </a:r>
           </a:p>
           <a:p>
             <a:pPr lvl="2"/>
             <a:r>
-              <a:rPr lang="en-US" smtClean="0"/>
+              <a:rPr lang="en-US"/>
               <a:t>Third level</a:t>
             </a:r>
           </a:p>
           <a:p>
             <a:pPr lvl="3"/>
             <a:r>
-              <a:rPr lang="en-US" smtClean="0"/>
+              <a:rPr lang="en-US"/>
               <a:t>Fourth level</a:t>
             </a:r>
           </a:p>
           <a:p>
             <a:pPr lvl="4"/>
             <a:r>
-              <a:rPr lang="en-US" smtClean="0"/>
+              <a:rPr lang="en-US"/>
               <a:t>Fifth level</a:t>
             </a:r>
-            <a:endParaRPr lang="en-US"/>
           </a:p>
         </p:txBody>
       </p:sp>
@@ -3462,7 +3241,7 @@
           <a:p>
             <a:fld id="{5BCAD085-E8A6-8845-BD4E-CB4CCA059FC4}" type="datetimeFigureOut">
               <a:rPr lang="en-US" smtClean="0"/>
-              <a:t>1/27/13</a:t>
+              <a:t>9/1/2026</a:t>
             </a:fld>
             <a:endParaRPr lang="en-US"/>
           </a:p>
@@ -3556,10 +3335,9 @@
           <a:lstStyle/>
           <a:p>
             <a:r>
-              <a:rPr lang="en-US" smtClean="0"/>
+              <a:rPr lang="en-US"/>
               <a:t>Click to edit Master title style</a:t>
             </a:r>
-            <a:endParaRPr lang="en-US"/>
           </a:p>
         </p:txBody>
       </p:sp>
@@ -3580,7 +3358,7 @@
           <a:p>
             <a:fld id="{5BCAD085-E8A6-8845-BD4E-CB4CCA059FC4}" type="datetimeFigureOut">
               <a:rPr lang="en-US" smtClean="0"/>
-              <a:t>1/27/13</a:t>
+              <a:t>9/1/2026</a:t>
             </a:fld>
             <a:endParaRPr lang="en-US"/>
           </a:p>
@@ -3675,7 +3453,7 @@
           <a:p>
             <a:fld id="{5BCAD085-E8A6-8845-BD4E-CB4CCA059FC4}" type="datetimeFigureOut">
               <a:rPr lang="en-US" smtClean="0"/>
-              <a:t>1/27/13</a:t>
+              <a:t>9/1/2026</a:t>
             </a:fld>
             <a:endParaRPr lang="en-US"/>
           </a:p>
@@ -3778,10 +3556,9 @@
           </a:lstStyle>
           <a:p>
             <a:r>
-              <a:rPr lang="en-US" smtClean="0"/>
+              <a:rPr lang="en-US"/>
               <a:t>Click to edit Master title style</a:t>
             </a:r>
-            <a:endParaRPr lang="en-US"/>
           </a:p>
         </p:txBody>
       </p:sp>
@@ -3835,38 +3612,37 @@
           <a:p>
             <a:pPr lvl="0"/>
             <a:r>
-              <a:rPr lang="en-US" smtClean="0"/>
+              <a:rPr lang="en-US"/>
               <a:t>Click to edit Master text styles</a:t>
             </a:r>
           </a:p>
           <a:p>
             <a:pPr lvl="1"/>
             <a:r>
-              <a:rPr lang="en-US" smtClean="0"/>
+              <a:rPr lang="en-US"/>
               <a:t>Second level</a:t>
             </a:r>
           </a:p>
           <a:p>
             <a:pPr lvl="2"/>
             <a:r>
-              <a:rPr lang="en-US" smtClean="0"/>
+              <a:rPr lang="en-US"/>
               <a:t>Third level</a:t>
             </a:r>
           </a:p>
           <a:p>
             <a:pPr lvl="3"/>
             <a:r>
-              <a:rPr lang="en-US" smtClean="0"/>
+              <a:rPr lang="en-US"/>
               <a:t>Fourth level</a:t>
             </a:r>
           </a:p>
           <a:p>
             <a:pPr lvl="4"/>
             <a:r>
-              <a:rPr lang="en-US" smtClean="0"/>
+              <a:rPr lang="en-US"/>
               <a:t>Fifth level</a:t>
             </a:r>
-            <a:endParaRPr lang="en-US"/>
           </a:p>
         </p:txBody>
       </p:sp>
@@ -3929,7 +3705,7 @@
           <a:p>
             <a:pPr lvl="0"/>
             <a:r>
-              <a:rPr lang="en-US" smtClean="0"/>
+              <a:rPr lang="en-US"/>
               <a:t>Click to edit Master text styles</a:t>
             </a:r>
           </a:p>
@@ -3952,7 +3728,7 @@
           <a:p>
             <a:fld id="{5BCAD085-E8A6-8845-BD4E-CB4CCA059FC4}" type="datetimeFigureOut">
               <a:rPr lang="en-US" smtClean="0"/>
-              <a:t>1/27/13</a:t>
+              <a:t>9/1/2026</a:t>
             </a:fld>
             <a:endParaRPr lang="en-US"/>
           </a:p>
@@ -4055,10 +3831,9 @@
           </a:lstStyle>
           <a:p>
             <a:r>
-              <a:rPr lang="en-US" smtClean="0"/>
+              <a:rPr lang="en-US"/>
               <a:t>Click to edit Master title style</a:t>
             </a:r>
-            <a:endParaRPr lang="en-US"/>
           </a:p>
         </p:txBody>
       </p:sp>
@@ -4182,7 +3957,7 @@
           <a:p>
             <a:pPr lvl="0"/>
             <a:r>
-              <a:rPr lang="en-US" smtClean="0"/>
+              <a:rPr lang="en-US"/>
               <a:t>Click to edit Master text styles</a:t>
             </a:r>
           </a:p>
@@ -4205,7 +3980,7 @@
           <a:p>
             <a:fld id="{5BCAD085-E8A6-8845-BD4E-CB4CCA059FC4}" type="datetimeFigureOut">
               <a:rPr lang="en-US" smtClean="0"/>
-              <a:t>1/27/13</a:t>
+              <a:t>9/1/2026</a:t>
             </a:fld>
             <a:endParaRPr lang="en-US"/>
           </a:p>
@@ -4314,10 +4089,9 @@
           <a:lstStyle/>
           <a:p>
             <a:r>
-              <a:rPr lang="en-US" smtClean="0"/>
+              <a:rPr lang="en-US"/>
               <a:t>Click to edit Master title style</a:t>
             </a:r>
-            <a:endParaRPr lang="en-US"/>
           </a:p>
         </p:txBody>
       </p:sp>
@@ -4348,38 +4122,37 @@
           <a:p>
             <a:pPr lvl="0"/>
             <a:r>
-              <a:rPr lang="en-US" smtClean="0"/>
+              <a:rPr lang="en-US"/>
               <a:t>Click to edit Master text styles</a:t>
             </a:r>
           </a:p>
           <a:p>
             <a:pPr lvl="1"/>
             <a:r>
-              <a:rPr lang="en-US" smtClean="0"/>
+              <a:rPr lang="en-US"/>
               <a:t>Second level</a:t>
             </a:r>
           </a:p>
           <a:p>
             <a:pPr lvl="2"/>
             <a:r>
-              <a:rPr lang="en-US" smtClean="0"/>
+              <a:rPr lang="en-US"/>
               <a:t>Third level</a:t>
             </a:r>
           </a:p>
           <a:p>
             <a:pPr lvl="3"/>
             <a:r>
-              <a:rPr lang="en-US" smtClean="0"/>
+              <a:rPr lang="en-US"/>
               <a:t>Fourth level</a:t>
             </a:r>
           </a:p>
           <a:p>
             <a:pPr lvl="4"/>
             <a:r>
-              <a:rPr lang="en-US" smtClean="0"/>
+              <a:rPr lang="en-US"/>
               <a:t>Fifth level</a:t>
             </a:r>
-            <a:endParaRPr lang="en-US"/>
           </a:p>
         </p:txBody>
       </p:sp>
@@ -4418,7 +4191,7 @@
           <a:p>
             <a:fld id="{5BCAD085-E8A6-8845-BD4E-CB4CCA059FC4}" type="datetimeFigureOut">
               <a:rPr lang="en-US" smtClean="0"/>
-              <a:t>1/27/13</a:t>
+              <a:t>9/1/2026</a:t>
             </a:fld>
             <a:endParaRPr lang="en-US"/>
           </a:p>
@@ -4777,7 +4550,7 @@
 </file>
 
 <file path=ppt/slides/slide1.xml><?xml version="1.0" encoding="utf-8"?>
-<p:sld xmlns:a="http://schemas.openxmlformats.org/drawingml/2006/main" xmlns:p="http://schemas.openxmlformats.org/presentationml/2006/main" xmlns:r="http://schemas.openxmlformats.org/officeDocument/2006/relationships">
+<p:sld xmlns:a="http://schemas.openxmlformats.org/drawingml/2006/main" xmlns:r="http://schemas.openxmlformats.org/officeDocument/2006/relationships" xmlns:p="http://schemas.openxmlformats.org/presentationml/2006/main">
   <p:cSld>
     <p:spTree>
       <p:nvGrpSpPr>
@@ -4785,7 +4558,14 @@
         <p:cNvGrpSpPr/>
         <p:nvPr/>
       </p:nvGrpSpPr>
-      <p:grpSpPr/>
+      <p:grpSpPr>
+        <a:xfrm>
+          <a:off x="0" y="0"/>
+          <a:ext cx="0" cy="0"/>
+          <a:chOff x="0" y="0"/>
+          <a:chExt cx="0" cy="0"/>
+        </a:xfrm>
+      </p:grpSpPr>
       <p:sp>
         <p:nvSpPr>
           <p:cNvPr id="2" name="Rectangle 1"/>
@@ -4826,6 +4606,7 @@
           <a:lstStyle/>
           <a:p>
             <a:pPr algn="ctr"/>
+            <a:endParaRPr/>
           </a:p>
         </p:txBody>
       </p:sp>
@@ -4846,7 +4627,7 @@
           <a:noFill/>
         </p:spPr>
         <p:txBody>
-          <a:bodyPr wrap="square" anchor="t" lIns="0" rIns="0" tIns="0" bIns="0">
+          <a:bodyPr wrap="square" lIns="0" tIns="0" rIns="0" bIns="0" anchor="t">
             <a:spAutoFit/>
           </a:bodyPr>
           <a:lstStyle/>
@@ -4885,7 +4666,7 @@
           <a:noFill/>
         </p:spPr>
         <p:txBody>
-          <a:bodyPr wrap="square" anchor="t" lIns="0" rIns="0" tIns="0" bIns="0">
+          <a:bodyPr wrap="square" lIns="0" tIns="0" rIns="0" bIns="0" anchor="t">
             <a:spAutoFit/>
           </a:bodyPr>
           <a:lstStyle/>
@@ -4924,7 +4705,7 @@
           <a:noFill/>
         </p:spPr>
         <p:txBody>
-          <a:bodyPr wrap="square" anchor="t" lIns="0" rIns="0" tIns="0" bIns="0">
+          <a:bodyPr wrap="square" lIns="0" tIns="0" rIns="0" bIns="0" anchor="t">
             <a:spAutoFit/>
           </a:bodyPr>
           <a:lstStyle/>
@@ -4986,6 +4767,7 @@
           <a:lstStyle/>
           <a:p>
             <a:pPr algn="ctr"/>
+            <a:endParaRPr/>
           </a:p>
         </p:txBody>
       </p:sp>
@@ -5006,7 +4788,7 @@
           <a:noFill/>
         </p:spPr>
         <p:txBody>
-          <a:bodyPr wrap="square" anchor="t" lIns="0" rIns="0" tIns="0" bIns="0">
+          <a:bodyPr wrap="square" lIns="0" tIns="0" rIns="0" bIns="0" anchor="t">
             <a:spAutoFit/>
           </a:bodyPr>
           <a:lstStyle/>
@@ -5045,7 +4827,7 @@
           <a:noFill/>
         </p:spPr>
         <p:txBody>
-          <a:bodyPr wrap="square" anchor="t" lIns="0" rIns="0" tIns="0" bIns="0">
+          <a:bodyPr wrap="square" lIns="0" tIns="0" rIns="0" bIns="0" anchor="t">
             <a:spAutoFit/>
           </a:bodyPr>
           <a:lstStyle/>
@@ -5109,6 +4891,7 @@
           <a:lstStyle/>
           <a:p>
             <a:pPr algn="ctr"/>
+            <a:endParaRPr/>
           </a:p>
         </p:txBody>
       </p:sp>
@@ -5154,6 +4937,7 @@
           <a:lstStyle/>
           <a:p>
             <a:pPr algn="ctr"/>
+            <a:endParaRPr/>
           </a:p>
         </p:txBody>
       </p:sp>
@@ -5174,7 +4958,7 @@
           <a:noFill/>
         </p:spPr>
         <p:txBody>
-          <a:bodyPr wrap="square" anchor="t" lIns="0" rIns="0" tIns="0" bIns="0">
+          <a:bodyPr wrap="square" lIns="0" tIns="0" rIns="0" bIns="0" anchor="t">
             <a:spAutoFit/>
           </a:bodyPr>
           <a:lstStyle/>
@@ -5238,6 +5022,7 @@
           <a:lstStyle/>
           <a:p>
             <a:pPr algn="ctr"/>
+            <a:endParaRPr/>
           </a:p>
         </p:txBody>
       </p:sp>
@@ -5283,6 +5068,7 @@
           <a:lstStyle/>
           <a:p>
             <a:pPr algn="ctr"/>
+            <a:endParaRPr/>
           </a:p>
         </p:txBody>
       </p:sp>
@@ -5328,6 +5114,7 @@
           <a:lstStyle/>
           <a:p>
             <a:pPr algn="ctr"/>
+            <a:endParaRPr/>
           </a:p>
         </p:txBody>
       </p:sp>
@@ -5373,6 +5160,7 @@
           <a:lstStyle/>
           <a:p>
             <a:pPr algn="ctr"/>
+            <a:endParaRPr/>
           </a:p>
         </p:txBody>
       </p:sp>
@@ -5393,7 +5181,7 @@
           <a:noFill/>
         </p:spPr>
         <p:txBody>
-          <a:bodyPr wrap="square" anchor="t" lIns="0" rIns="0" tIns="0" bIns="0">
+          <a:bodyPr wrap="square" lIns="0" tIns="0" rIns="0" bIns="0" anchor="t">
             <a:spAutoFit/>
           </a:bodyPr>
           <a:lstStyle/>
@@ -5424,7 +5212,7 @@
 </file>
 
 <file path=ppt/slides/slide10.xml><?xml version="1.0" encoding="utf-8"?>
-<p:sld xmlns:a="http://schemas.openxmlformats.org/drawingml/2006/main" xmlns:p="http://schemas.openxmlformats.org/presentationml/2006/main" xmlns:r="http://schemas.openxmlformats.org/officeDocument/2006/relationships">
+<p:sld xmlns:a="http://schemas.openxmlformats.org/drawingml/2006/main" xmlns:r="http://schemas.openxmlformats.org/officeDocument/2006/relationships" xmlns:p="http://schemas.openxmlformats.org/presentationml/2006/main">
   <p:cSld>
     <p:spTree>
       <p:nvGrpSpPr>
@@ -5432,7 +5220,14 @@
         <p:cNvGrpSpPr/>
         <p:nvPr/>
       </p:nvGrpSpPr>
-      <p:grpSpPr/>
+      <p:grpSpPr>
+        <a:xfrm>
+          <a:off x="0" y="0"/>
+          <a:ext cx="0" cy="0"/>
+          <a:chOff x="0" y="0"/>
+          <a:chExt cx="0" cy="0"/>
+        </a:xfrm>
+      </p:grpSpPr>
       <p:sp>
         <p:nvSpPr>
           <p:cNvPr id="2" name="Rectangle 1"/>
@@ -5473,6 +5268,7 @@
           <a:lstStyle/>
           <a:p>
             <a:pPr algn="ctr"/>
+            <a:endParaRPr/>
           </a:p>
         </p:txBody>
       </p:sp>
@@ -5493,7 +5289,7 @@
           <a:noFill/>
         </p:spPr>
         <p:txBody>
-          <a:bodyPr wrap="square" anchor="t" lIns="0" rIns="0" tIns="0" bIns="0">
+          <a:bodyPr wrap="square" lIns="0" tIns="0" rIns="0" bIns="0" anchor="t">
             <a:spAutoFit/>
           </a:bodyPr>
           <a:lstStyle/>
@@ -5555,6 +5351,7 @@
           <a:lstStyle/>
           <a:p>
             <a:pPr algn="ctr"/>
+            <a:endParaRPr/>
           </a:p>
         </p:txBody>
       </p:sp>
@@ -5575,7 +5372,7 @@
           <a:noFill/>
         </p:spPr>
         <p:txBody>
-          <a:bodyPr wrap="square" anchor="t" lIns="0" rIns="0" tIns="0" bIns="0">
+          <a:bodyPr wrap="square" lIns="0" tIns="0" rIns="0" bIns="0" anchor="t">
             <a:spAutoFit/>
           </a:bodyPr>
           <a:lstStyle/>
@@ -5614,7 +5411,7 @@
           <a:noFill/>
         </p:spPr>
         <p:txBody>
-          <a:bodyPr wrap="square" anchor="t" lIns="0" rIns="0" tIns="0" bIns="0">
+          <a:bodyPr wrap="square" lIns="0" tIns="0" rIns="0" bIns="0" anchor="t">
             <a:spAutoFit/>
           </a:bodyPr>
           <a:lstStyle/>
@@ -5678,6 +5475,7 @@
           <a:lstStyle/>
           <a:p>
             <a:pPr algn="ctr"/>
+            <a:endParaRPr/>
           </a:p>
         </p:txBody>
       </p:sp>
@@ -5698,7 +5496,7 @@
           <a:noFill/>
         </p:spPr>
         <p:txBody>
-          <a:bodyPr wrap="square" anchor="t" lIns="0" rIns="0" tIns="0" bIns="0">
+          <a:bodyPr wrap="square" lIns="0" tIns="0" rIns="0" bIns="0" anchor="t">
             <a:spAutoFit/>
           </a:bodyPr>
           <a:lstStyle/>
@@ -5794,6 +5592,7 @@
           <a:lstStyle/>
           <a:p>
             <a:pPr algn="ctr"/>
+            <a:endParaRPr/>
           </a:p>
         </p:txBody>
       </p:sp>
@@ -5814,7 +5613,7 @@
           <a:noFill/>
         </p:spPr>
         <p:txBody>
-          <a:bodyPr wrap="square" anchor="t" lIns="0" rIns="0" tIns="0" bIns="0">
+          <a:bodyPr wrap="square" lIns="0" tIns="0" rIns="0" bIns="0" anchor="t">
             <a:spAutoFit/>
           </a:bodyPr>
           <a:lstStyle/>
@@ -5885,7 +5684,7 @@
           <a:noFill/>
         </p:spPr>
         <p:txBody>
-          <a:bodyPr wrap="square" anchor="t" lIns="0" rIns="0" tIns="0" bIns="0">
+          <a:bodyPr wrap="square" lIns="0" tIns="0" rIns="0" bIns="0" anchor="t">
             <a:spAutoFit/>
           </a:bodyPr>
           <a:lstStyle/>
@@ -5924,7 +5723,7 @@
           <a:noFill/>
         </p:spPr>
         <p:txBody>
-          <a:bodyPr wrap="square" anchor="t" lIns="0" rIns="0" tIns="0" bIns="0">
+          <a:bodyPr wrap="square" lIns="0" tIns="0" rIns="0" bIns="0" anchor="t">
             <a:spAutoFit/>
           </a:bodyPr>
           <a:lstStyle/>
@@ -5963,7 +5762,7 @@
           <a:noFill/>
         </p:spPr>
         <p:txBody>
-          <a:bodyPr wrap="square" anchor="t" lIns="0" rIns="0" tIns="0" bIns="0">
+          <a:bodyPr wrap="square" lIns="0" tIns="0" rIns="0" bIns="0" anchor="t">
             <a:spAutoFit/>
           </a:bodyPr>
           <a:lstStyle/>
@@ -5994,7 +5793,7 @@
 </file>
 
 <file path=ppt/slides/slide11.xml><?xml version="1.0" encoding="utf-8"?>
-<p:sld xmlns:a="http://schemas.openxmlformats.org/drawingml/2006/main" xmlns:p="http://schemas.openxmlformats.org/presentationml/2006/main" xmlns:r="http://schemas.openxmlformats.org/officeDocument/2006/relationships">
+<p:sld xmlns:a="http://schemas.openxmlformats.org/drawingml/2006/main" xmlns:r="http://schemas.openxmlformats.org/officeDocument/2006/relationships" xmlns:p="http://schemas.openxmlformats.org/presentationml/2006/main">
   <p:cSld>
     <p:spTree>
       <p:nvGrpSpPr>
@@ -6002,7 +5801,14 @@
         <p:cNvGrpSpPr/>
         <p:nvPr/>
       </p:nvGrpSpPr>
-      <p:grpSpPr/>
+      <p:grpSpPr>
+        <a:xfrm>
+          <a:off x="0" y="0"/>
+          <a:ext cx="0" cy="0"/>
+          <a:chOff x="0" y="0"/>
+          <a:chExt cx="0" cy="0"/>
+        </a:xfrm>
+      </p:grpSpPr>
       <p:sp>
         <p:nvSpPr>
           <p:cNvPr id="2" name="Rectangle 1"/>
@@ -6043,6 +5849,7 @@
           <a:lstStyle/>
           <a:p>
             <a:pPr algn="ctr"/>
+            <a:endParaRPr/>
           </a:p>
         </p:txBody>
       </p:sp>
@@ -6063,7 +5870,7 @@
           <a:noFill/>
         </p:spPr>
         <p:txBody>
-          <a:bodyPr wrap="square" anchor="t" lIns="0" rIns="0" tIns="0" bIns="0">
+          <a:bodyPr wrap="square" lIns="0" tIns="0" rIns="0" bIns="0" anchor="t">
             <a:spAutoFit/>
           </a:bodyPr>
           <a:lstStyle/>
@@ -6125,6 +5932,7 @@
           <a:lstStyle/>
           <a:p>
             <a:pPr algn="ctr"/>
+            <a:endParaRPr/>
           </a:p>
         </p:txBody>
       </p:sp>
@@ -6145,7 +5953,7 @@
           <a:noFill/>
         </p:spPr>
         <p:txBody>
-          <a:bodyPr wrap="square" anchor="t" lIns="0" rIns="0" tIns="0" bIns="0">
+          <a:bodyPr wrap="square" lIns="0" tIns="0" rIns="0" bIns="0" anchor="t">
             <a:spAutoFit/>
           </a:bodyPr>
           <a:lstStyle/>
@@ -6184,7 +5992,7 @@
           <a:noFill/>
         </p:spPr>
         <p:txBody>
-          <a:bodyPr wrap="square" anchor="t" lIns="0" rIns="0" tIns="0" bIns="0">
+          <a:bodyPr wrap="square" lIns="0" tIns="0" rIns="0" bIns="0" anchor="t">
             <a:spAutoFit/>
           </a:bodyPr>
           <a:lstStyle/>
@@ -6248,6 +6056,7 @@
           <a:lstStyle/>
           <a:p>
             <a:pPr algn="ctr"/>
+            <a:endParaRPr/>
           </a:p>
         </p:txBody>
       </p:sp>
@@ -6268,7 +6077,7 @@
           <a:noFill/>
         </p:spPr>
         <p:txBody>
-          <a:bodyPr wrap="square" anchor="t" lIns="0" rIns="0" tIns="0" bIns="0">
+          <a:bodyPr wrap="square" lIns="0" tIns="0" rIns="0" bIns="0" anchor="t">
             <a:spAutoFit/>
           </a:bodyPr>
           <a:lstStyle/>
@@ -6380,6 +6189,7 @@
           <a:lstStyle/>
           <a:p>
             <a:pPr algn="ctr"/>
+            <a:endParaRPr/>
           </a:p>
         </p:txBody>
       </p:sp>
@@ -6400,7 +6210,7 @@
           <a:noFill/>
         </p:spPr>
         <p:txBody>
-          <a:bodyPr wrap="square" anchor="t" lIns="0" rIns="0" tIns="0" bIns="0">
+          <a:bodyPr wrap="square" lIns="0" tIns="0" rIns="0" bIns="0" anchor="t">
             <a:spAutoFit/>
           </a:bodyPr>
           <a:lstStyle/>
@@ -6471,7 +6281,7 @@
           <a:noFill/>
         </p:spPr>
         <p:txBody>
-          <a:bodyPr wrap="square" anchor="t" lIns="0" rIns="0" tIns="0" bIns="0">
+          <a:bodyPr wrap="square" lIns="0" tIns="0" rIns="0" bIns="0" anchor="t">
             <a:spAutoFit/>
           </a:bodyPr>
           <a:lstStyle/>
@@ -6510,7 +6320,7 @@
           <a:noFill/>
         </p:spPr>
         <p:txBody>
-          <a:bodyPr wrap="square" anchor="t" lIns="0" rIns="0" tIns="0" bIns="0">
+          <a:bodyPr wrap="square" lIns="0" tIns="0" rIns="0" bIns="0" anchor="t">
             <a:spAutoFit/>
           </a:bodyPr>
           <a:lstStyle/>
@@ -6549,7 +6359,7 @@
           <a:noFill/>
         </p:spPr>
         <p:txBody>
-          <a:bodyPr wrap="square" anchor="t" lIns="0" rIns="0" tIns="0" bIns="0">
+          <a:bodyPr wrap="square" lIns="0" tIns="0" rIns="0" bIns="0" anchor="t">
             <a:spAutoFit/>
           </a:bodyPr>
           <a:lstStyle/>
@@ -6580,7 +6390,7 @@
 </file>
 
 <file path=ppt/slides/slide12.xml><?xml version="1.0" encoding="utf-8"?>
-<p:sld xmlns:a="http://schemas.openxmlformats.org/drawingml/2006/main" xmlns:p="http://schemas.openxmlformats.org/presentationml/2006/main" xmlns:r="http://schemas.openxmlformats.org/officeDocument/2006/relationships">
+<p:sld xmlns:a="http://schemas.openxmlformats.org/drawingml/2006/main" xmlns:r="http://schemas.openxmlformats.org/officeDocument/2006/relationships" xmlns:p="http://schemas.openxmlformats.org/presentationml/2006/main">
   <p:cSld>
     <p:spTree>
       <p:nvGrpSpPr>
@@ -6588,7 +6398,14 @@
         <p:cNvGrpSpPr/>
         <p:nvPr/>
       </p:nvGrpSpPr>
-      <p:grpSpPr/>
+      <p:grpSpPr>
+        <a:xfrm>
+          <a:off x="0" y="0"/>
+          <a:ext cx="0" cy="0"/>
+          <a:chOff x="0" y="0"/>
+          <a:chExt cx="0" cy="0"/>
+        </a:xfrm>
+      </p:grpSpPr>
       <p:sp>
         <p:nvSpPr>
           <p:cNvPr id="2" name="Rectangle 1"/>
@@ -6629,6 +6446,7 @@
           <a:lstStyle/>
           <a:p>
             <a:pPr algn="ctr"/>
+            <a:endParaRPr/>
           </a:p>
         </p:txBody>
       </p:sp>
@@ -6649,7 +6467,7 @@
           <a:noFill/>
         </p:spPr>
         <p:txBody>
-          <a:bodyPr wrap="square" anchor="t" lIns="0" rIns="0" tIns="0" bIns="0">
+          <a:bodyPr wrap="square" lIns="0" tIns="0" rIns="0" bIns="0" anchor="t">
             <a:spAutoFit/>
           </a:bodyPr>
           <a:lstStyle/>
@@ -6711,6 +6529,7 @@
           <a:lstStyle/>
           <a:p>
             <a:pPr algn="ctr"/>
+            <a:endParaRPr/>
           </a:p>
         </p:txBody>
       </p:sp>
@@ -6731,7 +6550,7 @@
           <a:noFill/>
         </p:spPr>
         <p:txBody>
-          <a:bodyPr wrap="square" anchor="t" lIns="0" rIns="0" tIns="0" bIns="0">
+          <a:bodyPr wrap="square" lIns="0" tIns="0" rIns="0" bIns="0" anchor="t">
             <a:spAutoFit/>
           </a:bodyPr>
           <a:lstStyle/>
@@ -6770,7 +6589,7 @@
           <a:noFill/>
         </p:spPr>
         <p:txBody>
-          <a:bodyPr wrap="square" anchor="t" lIns="0" rIns="0" tIns="0" bIns="0">
+          <a:bodyPr wrap="square" lIns="0" tIns="0" rIns="0" bIns="0" anchor="t">
             <a:spAutoFit/>
           </a:bodyPr>
           <a:lstStyle/>
@@ -6834,6 +6653,7 @@
           <a:lstStyle/>
           <a:p>
             <a:pPr algn="ctr"/>
+            <a:endParaRPr/>
           </a:p>
         </p:txBody>
       </p:sp>
@@ -6854,7 +6674,7 @@
           <a:noFill/>
         </p:spPr>
         <p:txBody>
-          <a:bodyPr wrap="square" anchor="t" lIns="0" rIns="0" tIns="0" bIns="0">
+          <a:bodyPr wrap="square" lIns="0" tIns="0" rIns="0" bIns="0" anchor="t">
             <a:spAutoFit/>
           </a:bodyPr>
           <a:lstStyle/>
@@ -6950,6 +6770,7 @@
           <a:lstStyle/>
           <a:p>
             <a:pPr algn="ctr"/>
+            <a:endParaRPr/>
           </a:p>
         </p:txBody>
       </p:sp>
@@ -6970,7 +6791,7 @@
           <a:noFill/>
         </p:spPr>
         <p:txBody>
-          <a:bodyPr wrap="square" anchor="t" lIns="0" rIns="0" tIns="0" bIns="0">
+          <a:bodyPr wrap="square" lIns="0" tIns="0" rIns="0" bIns="0" anchor="t">
             <a:spAutoFit/>
           </a:bodyPr>
           <a:lstStyle/>
@@ -7041,7 +6862,7 @@
           <a:noFill/>
         </p:spPr>
         <p:txBody>
-          <a:bodyPr wrap="square" anchor="t" lIns="0" rIns="0" tIns="0" bIns="0">
+          <a:bodyPr wrap="square" lIns="0" tIns="0" rIns="0" bIns="0" anchor="t">
             <a:spAutoFit/>
           </a:bodyPr>
           <a:lstStyle/>
@@ -7080,7 +6901,7 @@
           <a:noFill/>
         </p:spPr>
         <p:txBody>
-          <a:bodyPr wrap="square" anchor="t" lIns="0" rIns="0" tIns="0" bIns="0">
+          <a:bodyPr wrap="square" lIns="0" tIns="0" rIns="0" bIns="0" anchor="t">
             <a:spAutoFit/>
           </a:bodyPr>
           <a:lstStyle/>
@@ -7119,7 +6940,7 @@
           <a:noFill/>
         </p:spPr>
         <p:txBody>
-          <a:bodyPr wrap="square" anchor="t" lIns="0" rIns="0" tIns="0" bIns="0">
+          <a:bodyPr wrap="square" lIns="0" tIns="0" rIns="0" bIns="0" anchor="t">
             <a:spAutoFit/>
           </a:bodyPr>
           <a:lstStyle/>
@@ -7181,6 +7002,7 @@
           <a:lstStyle/>
           <a:p>
             <a:pPr algn="ctr"/>
+            <a:endParaRPr/>
           </a:p>
         </p:txBody>
       </p:sp>
@@ -7201,7 +7023,7 @@
           <a:noFill/>
         </p:spPr>
         <p:txBody>
-          <a:bodyPr wrap="square" anchor="t" lIns="0" rIns="0" tIns="0" bIns="0">
+          <a:bodyPr wrap="square" lIns="0" tIns="0" rIns="0" bIns="0" anchor="t">
             <a:spAutoFit/>
           </a:bodyPr>
           <a:lstStyle/>
@@ -7232,7 +7054,7 @@
 </file>
 
 <file path=ppt/slides/slide13.xml><?xml version="1.0" encoding="utf-8"?>
-<p:sld xmlns:a="http://schemas.openxmlformats.org/drawingml/2006/main" xmlns:p="http://schemas.openxmlformats.org/presentationml/2006/main" xmlns:r="http://schemas.openxmlformats.org/officeDocument/2006/relationships">
+<p:sld xmlns:a="http://schemas.openxmlformats.org/drawingml/2006/main" xmlns:r="http://schemas.openxmlformats.org/officeDocument/2006/relationships" xmlns:p="http://schemas.openxmlformats.org/presentationml/2006/main">
   <p:cSld>
     <p:spTree>
       <p:nvGrpSpPr>
@@ -7240,7 +7062,14 @@
         <p:cNvGrpSpPr/>
         <p:nvPr/>
       </p:nvGrpSpPr>
-      <p:grpSpPr/>
+      <p:grpSpPr>
+        <a:xfrm>
+          <a:off x="0" y="0"/>
+          <a:ext cx="0" cy="0"/>
+          <a:chOff x="0" y="0"/>
+          <a:chExt cx="0" cy="0"/>
+        </a:xfrm>
+      </p:grpSpPr>
       <p:sp>
         <p:nvSpPr>
           <p:cNvPr id="2" name="Rectangle 1"/>
@@ -7281,6 +7110,7 @@
           <a:lstStyle/>
           <a:p>
             <a:pPr algn="ctr"/>
+            <a:endParaRPr/>
           </a:p>
         </p:txBody>
       </p:sp>
@@ -7301,7 +7131,7 @@
           <a:noFill/>
         </p:spPr>
         <p:txBody>
-          <a:bodyPr wrap="square" anchor="t" lIns="0" rIns="0" tIns="0" bIns="0">
+          <a:bodyPr wrap="square" lIns="0" tIns="0" rIns="0" bIns="0" anchor="t">
             <a:spAutoFit/>
           </a:bodyPr>
           <a:lstStyle/>
@@ -7363,6 +7193,7 @@
           <a:lstStyle/>
           <a:p>
             <a:pPr algn="ctr"/>
+            <a:endParaRPr/>
           </a:p>
         </p:txBody>
       </p:sp>
@@ -7383,7 +7214,7 @@
           <a:noFill/>
         </p:spPr>
         <p:txBody>
-          <a:bodyPr wrap="square" anchor="t" lIns="0" rIns="0" tIns="0" bIns="0">
+          <a:bodyPr wrap="square" lIns="0" tIns="0" rIns="0" bIns="0" anchor="t">
             <a:spAutoFit/>
           </a:bodyPr>
           <a:lstStyle/>
@@ -7447,6 +7278,7 @@
           <a:lstStyle/>
           <a:p>
             <a:pPr algn="ctr"/>
+            <a:endParaRPr/>
           </a:p>
         </p:txBody>
       </p:sp>
@@ -7467,7 +7299,7 @@
           <a:noFill/>
         </p:spPr>
         <p:txBody>
-          <a:bodyPr wrap="square" anchor="t" lIns="0" rIns="0" tIns="0" bIns="0">
+          <a:bodyPr wrap="square" lIns="0" tIns="0" rIns="0" bIns="0" anchor="t">
             <a:spAutoFit/>
           </a:bodyPr>
           <a:lstStyle/>
@@ -7506,7 +7338,7 @@
           <a:noFill/>
         </p:spPr>
         <p:txBody>
-          <a:bodyPr wrap="square" anchor="t" lIns="0" rIns="0" tIns="0" bIns="0">
+          <a:bodyPr wrap="square" lIns="0" tIns="0" rIns="0" bIns="0" anchor="t">
             <a:spAutoFit/>
           </a:bodyPr>
           <a:lstStyle/>
@@ -7545,7 +7377,7 @@
           <a:noFill/>
         </p:spPr>
         <p:txBody>
-          <a:bodyPr wrap="square" anchor="t" lIns="0" rIns="0" tIns="0" bIns="0">
+          <a:bodyPr wrap="square" lIns="0" tIns="0" rIns="0" bIns="0" anchor="t">
             <a:spAutoFit/>
           </a:bodyPr>
           <a:lstStyle/>
@@ -7584,7 +7416,7 @@
           <a:noFill/>
         </p:spPr>
         <p:txBody>
-          <a:bodyPr wrap="square" anchor="t" lIns="0" rIns="0" tIns="0" bIns="0">
+          <a:bodyPr wrap="square" lIns="0" tIns="0" rIns="0" bIns="0" anchor="t">
             <a:spAutoFit/>
           </a:bodyPr>
           <a:lstStyle/>
@@ -7648,6 +7480,7 @@
           <a:lstStyle/>
           <a:p>
             <a:pPr algn="ctr"/>
+            <a:endParaRPr/>
           </a:p>
         </p:txBody>
       </p:sp>
@@ -7668,7 +7501,7 @@
           <a:noFill/>
         </p:spPr>
         <p:txBody>
-          <a:bodyPr wrap="square" anchor="t" lIns="0" rIns="0" tIns="0" bIns="0">
+          <a:bodyPr wrap="square" lIns="0" tIns="0" rIns="0" bIns="0" anchor="t">
             <a:spAutoFit/>
           </a:bodyPr>
           <a:lstStyle/>
@@ -7771,7 +7604,7 @@
           <a:noFill/>
         </p:spPr>
         <p:txBody>
-          <a:bodyPr wrap="square" anchor="t" lIns="0" rIns="0" tIns="0" bIns="0">
+          <a:bodyPr wrap="square" lIns="0" tIns="0" rIns="0" bIns="0" anchor="t">
             <a:spAutoFit/>
           </a:bodyPr>
           <a:lstStyle/>
@@ -7835,6 +7668,7 @@
           <a:lstStyle/>
           <a:p>
             <a:pPr algn="ctr"/>
+            <a:endParaRPr/>
           </a:p>
         </p:txBody>
       </p:sp>
@@ -7855,7 +7689,7 @@
           <a:noFill/>
         </p:spPr>
         <p:txBody>
-          <a:bodyPr wrap="square" anchor="t" lIns="0" rIns="0" tIns="0" bIns="0">
+          <a:bodyPr wrap="square" lIns="0" tIns="0" rIns="0" bIns="0" anchor="t">
             <a:spAutoFit/>
           </a:bodyPr>
           <a:lstStyle/>
@@ -7902,7 +7736,7 @@
 </file>
 
 <file path=ppt/slides/slide14.xml><?xml version="1.0" encoding="utf-8"?>
-<p:sld xmlns:a="http://schemas.openxmlformats.org/drawingml/2006/main" xmlns:p="http://schemas.openxmlformats.org/presentationml/2006/main" xmlns:r="http://schemas.openxmlformats.org/officeDocument/2006/relationships">
+<p:sld xmlns:a="http://schemas.openxmlformats.org/drawingml/2006/main" xmlns:r="http://schemas.openxmlformats.org/officeDocument/2006/relationships" xmlns:p="http://schemas.openxmlformats.org/presentationml/2006/main">
   <p:cSld>
     <p:spTree>
       <p:nvGrpSpPr>
@@ -7910,7 +7744,14 @@
         <p:cNvGrpSpPr/>
         <p:nvPr/>
       </p:nvGrpSpPr>
-      <p:grpSpPr/>
+      <p:grpSpPr>
+        <a:xfrm>
+          <a:off x="0" y="0"/>
+          <a:ext cx="0" cy="0"/>
+          <a:chOff x="0" y="0"/>
+          <a:chExt cx="0" cy="0"/>
+        </a:xfrm>
+      </p:grpSpPr>
       <p:sp>
         <p:nvSpPr>
           <p:cNvPr id="2" name="Rectangle 1"/>
@@ -7951,6 +7792,7 @@
           <a:lstStyle/>
           <a:p>
             <a:pPr algn="ctr"/>
+            <a:endParaRPr/>
           </a:p>
         </p:txBody>
       </p:sp>
@@ -7971,7 +7813,7 @@
           <a:noFill/>
         </p:spPr>
         <p:txBody>
-          <a:bodyPr wrap="square" anchor="t" lIns="0" rIns="0" tIns="0" bIns="0">
+          <a:bodyPr wrap="square" lIns="0" tIns="0" rIns="0" bIns="0" anchor="t">
             <a:spAutoFit/>
           </a:bodyPr>
           <a:lstStyle/>
@@ -8033,6 +7875,7 @@
           <a:lstStyle/>
           <a:p>
             <a:pPr algn="ctr"/>
+            <a:endParaRPr/>
           </a:p>
         </p:txBody>
       </p:sp>
@@ -8053,7 +7896,7 @@
           <a:noFill/>
         </p:spPr>
         <p:txBody>
-          <a:bodyPr wrap="square" anchor="t" lIns="0" rIns="0" tIns="0" bIns="0">
+          <a:bodyPr wrap="square" lIns="0" tIns="0" rIns="0" bIns="0" anchor="t">
             <a:spAutoFit/>
           </a:bodyPr>
           <a:lstStyle/>
@@ -8092,7 +7935,7 @@
           <a:noFill/>
         </p:spPr>
         <p:txBody>
-          <a:bodyPr wrap="square" anchor="t" lIns="0" rIns="0" tIns="0" bIns="0">
+          <a:bodyPr wrap="square" lIns="0" tIns="0" rIns="0" bIns="0" anchor="t">
             <a:spAutoFit/>
           </a:bodyPr>
           <a:lstStyle/>
@@ -8156,6 +7999,7 @@
           <a:lstStyle/>
           <a:p>
             <a:pPr algn="ctr"/>
+            <a:endParaRPr/>
           </a:p>
         </p:txBody>
       </p:sp>
@@ -8176,7 +8020,7 @@
           <a:noFill/>
         </p:spPr>
         <p:txBody>
-          <a:bodyPr wrap="square" anchor="t" lIns="0" rIns="0" tIns="0" bIns="0">
+          <a:bodyPr wrap="square" lIns="0" tIns="0" rIns="0" bIns="0" anchor="t">
             <a:spAutoFit/>
           </a:bodyPr>
           <a:lstStyle/>
@@ -8215,7 +8059,7 @@
           <a:noFill/>
         </p:spPr>
         <p:txBody>
-          <a:bodyPr wrap="square" anchor="t" lIns="0" rIns="0" tIns="0" bIns="0">
+          <a:bodyPr wrap="square" lIns="0" tIns="0" rIns="0" bIns="0" anchor="t">
             <a:spAutoFit/>
           </a:bodyPr>
           <a:lstStyle/>
@@ -8279,6 +8123,7 @@
           <a:lstStyle/>
           <a:p>
             <a:pPr algn="ctr"/>
+            <a:endParaRPr/>
           </a:p>
         </p:txBody>
       </p:sp>
@@ -8299,7 +8144,7 @@
           <a:noFill/>
         </p:spPr>
         <p:txBody>
-          <a:bodyPr wrap="square" anchor="t" lIns="0" rIns="0" tIns="0" bIns="0">
+          <a:bodyPr wrap="square" lIns="0" tIns="0" rIns="0" bIns="0" anchor="t">
             <a:spAutoFit/>
           </a:bodyPr>
           <a:lstStyle/>
@@ -8377,6 +8222,7 @@
           <a:lstStyle/>
           <a:p>
             <a:pPr algn="ctr"/>
+            <a:endParaRPr/>
           </a:p>
         </p:txBody>
       </p:sp>
@@ -8397,7 +8243,7 @@
           <a:noFill/>
         </p:spPr>
         <p:txBody>
-          <a:bodyPr wrap="square" anchor="t" lIns="0" rIns="0" tIns="0" bIns="0">
+          <a:bodyPr wrap="square" lIns="0" tIns="0" rIns="0" bIns="0" anchor="t">
             <a:spAutoFit/>
           </a:bodyPr>
           <a:lstStyle/>
@@ -8444,7 +8290,7 @@
 </file>
 
 <file path=ppt/slides/slide15.xml><?xml version="1.0" encoding="utf-8"?>
-<p:sld xmlns:a="http://schemas.openxmlformats.org/drawingml/2006/main" xmlns:p="http://schemas.openxmlformats.org/presentationml/2006/main" xmlns:r="http://schemas.openxmlformats.org/officeDocument/2006/relationships">
+<p:sld xmlns:a="http://schemas.openxmlformats.org/drawingml/2006/main" xmlns:r="http://schemas.openxmlformats.org/officeDocument/2006/relationships" xmlns:p="http://schemas.openxmlformats.org/presentationml/2006/main">
   <p:cSld>
     <p:spTree>
       <p:nvGrpSpPr>
@@ -8452,7 +8298,14 @@
         <p:cNvGrpSpPr/>
         <p:nvPr/>
       </p:nvGrpSpPr>
-      <p:grpSpPr/>
+      <p:grpSpPr>
+        <a:xfrm>
+          <a:off x="0" y="0"/>
+          <a:ext cx="0" cy="0"/>
+          <a:chOff x="0" y="0"/>
+          <a:chExt cx="0" cy="0"/>
+        </a:xfrm>
+      </p:grpSpPr>
       <p:sp>
         <p:nvSpPr>
           <p:cNvPr id="2" name="Rectangle 1"/>
@@ -8493,6 +8346,7 @@
           <a:lstStyle/>
           <a:p>
             <a:pPr algn="ctr"/>
+            <a:endParaRPr/>
           </a:p>
         </p:txBody>
       </p:sp>
@@ -8513,7 +8367,7 @@
           <a:noFill/>
         </p:spPr>
         <p:txBody>
-          <a:bodyPr wrap="square" anchor="t" lIns="0" rIns="0" tIns="0" bIns="0">
+          <a:bodyPr wrap="square" lIns="0" tIns="0" rIns="0" bIns="0" anchor="t">
             <a:spAutoFit/>
           </a:bodyPr>
           <a:lstStyle/>
@@ -8575,6 +8429,7 @@
           <a:lstStyle/>
           <a:p>
             <a:pPr algn="ctr"/>
+            <a:endParaRPr/>
           </a:p>
         </p:txBody>
       </p:sp>
@@ -8595,7 +8450,7 @@
           <a:noFill/>
         </p:spPr>
         <p:txBody>
-          <a:bodyPr wrap="square" anchor="t" lIns="0" rIns="0" tIns="0" bIns="0">
+          <a:bodyPr wrap="square" lIns="0" tIns="0" rIns="0" bIns="0" anchor="t">
             <a:spAutoFit/>
           </a:bodyPr>
           <a:lstStyle/>
@@ -8634,7 +8489,7 @@
           <a:noFill/>
         </p:spPr>
         <p:txBody>
-          <a:bodyPr wrap="square" anchor="t" lIns="0" rIns="0" tIns="0" bIns="0">
+          <a:bodyPr wrap="square" lIns="0" tIns="0" rIns="0" bIns="0" anchor="t">
             <a:spAutoFit/>
           </a:bodyPr>
           <a:lstStyle/>
@@ -8673,7 +8528,7 @@
           <a:noFill/>
         </p:spPr>
         <p:txBody>
-          <a:bodyPr wrap="square" anchor="t" lIns="0" rIns="0" tIns="0" bIns="0">
+          <a:bodyPr wrap="square" lIns="0" tIns="0" rIns="0" bIns="0" anchor="t">
             <a:spAutoFit/>
           </a:bodyPr>
           <a:lstStyle/>
@@ -8737,6 +8592,7 @@
           <a:lstStyle/>
           <a:p>
             <a:pPr algn="ctr"/>
+            <a:endParaRPr/>
           </a:p>
         </p:txBody>
       </p:sp>
@@ -8757,7 +8613,7 @@
           <a:noFill/>
         </p:spPr>
         <p:txBody>
-          <a:bodyPr wrap="square" anchor="t" lIns="0" rIns="0" tIns="0" bIns="0">
+          <a:bodyPr wrap="square" lIns="0" tIns="0" rIns="0" bIns="0" anchor="t">
             <a:spAutoFit/>
           </a:bodyPr>
           <a:lstStyle/>
@@ -8821,6 +8677,7 @@
           <a:lstStyle/>
           <a:p>
             <a:pPr algn="ctr"/>
+            <a:endParaRPr/>
           </a:p>
         </p:txBody>
       </p:sp>
@@ -8841,7 +8698,7 @@
           <a:noFill/>
         </p:spPr>
         <p:txBody>
-          <a:bodyPr wrap="square" anchor="t" lIns="0" rIns="0" tIns="0" bIns="0">
+          <a:bodyPr wrap="square" lIns="0" tIns="0" rIns="0" bIns="0" anchor="t">
             <a:spAutoFit/>
           </a:bodyPr>
           <a:lstStyle/>
@@ -8905,6 +8762,7 @@
           <a:lstStyle/>
           <a:p>
             <a:pPr algn="ctr"/>
+            <a:endParaRPr/>
           </a:p>
         </p:txBody>
       </p:sp>
@@ -8925,7 +8783,7 @@
           <a:noFill/>
         </p:spPr>
         <p:txBody>
-          <a:bodyPr wrap="square" anchor="t" lIns="0" rIns="0" tIns="0" bIns="0">
+          <a:bodyPr wrap="square" lIns="0" tIns="0" rIns="0" bIns="0" anchor="t">
             <a:spAutoFit/>
           </a:bodyPr>
           <a:lstStyle/>
@@ -8989,6 +8847,7 @@
           <a:lstStyle/>
           <a:p>
             <a:pPr algn="ctr"/>
+            <a:endParaRPr/>
           </a:p>
         </p:txBody>
       </p:sp>
@@ -9009,7 +8868,7 @@
           <a:noFill/>
         </p:spPr>
         <p:txBody>
-          <a:bodyPr wrap="square" anchor="t" lIns="0" rIns="0" tIns="0" bIns="0">
+          <a:bodyPr wrap="square" lIns="0" tIns="0" rIns="0" bIns="0" anchor="t">
             <a:spAutoFit/>
           </a:bodyPr>
           <a:lstStyle/>
@@ -9073,6 +8932,7 @@
           <a:lstStyle/>
           <a:p>
             <a:pPr algn="ctr"/>
+            <a:endParaRPr/>
           </a:p>
         </p:txBody>
       </p:sp>
@@ -9093,7 +8953,7 @@
           <a:noFill/>
         </p:spPr>
         <p:txBody>
-          <a:bodyPr wrap="square" anchor="t" lIns="0" rIns="0" tIns="0" bIns="0">
+          <a:bodyPr wrap="square" lIns="0" tIns="0" rIns="0" bIns="0" anchor="t">
             <a:spAutoFit/>
           </a:bodyPr>
           <a:lstStyle/>
@@ -9132,7 +8992,7 @@
           <a:noFill/>
         </p:spPr>
         <p:txBody>
-          <a:bodyPr wrap="square" anchor="t" lIns="0" rIns="0" tIns="0" bIns="0">
+          <a:bodyPr wrap="square" lIns="0" tIns="0" rIns="0" bIns="0" anchor="t">
             <a:spAutoFit/>
           </a:bodyPr>
           <a:lstStyle/>
@@ -9194,6 +9054,7 @@
           <a:lstStyle/>
           <a:p>
             <a:pPr algn="ctr"/>
+            <a:endParaRPr/>
           </a:p>
         </p:txBody>
       </p:sp>
@@ -9214,7 +9075,7 @@
           <a:noFill/>
         </p:spPr>
         <p:txBody>
-          <a:bodyPr wrap="square" anchor="t" lIns="0" rIns="0" tIns="0" bIns="0">
+          <a:bodyPr wrap="square" lIns="0" tIns="0" rIns="0" bIns="0" anchor="t">
             <a:spAutoFit/>
           </a:bodyPr>
           <a:lstStyle/>
@@ -9253,7 +9114,7 @@
           <a:noFill/>
         </p:spPr>
         <p:txBody>
-          <a:bodyPr wrap="square" anchor="t" lIns="0" rIns="0" tIns="0" bIns="0">
+          <a:bodyPr wrap="square" lIns="0" tIns="0" rIns="0" bIns="0" anchor="t">
             <a:spAutoFit/>
           </a:bodyPr>
           <a:lstStyle/>
@@ -9315,6 +9176,7 @@
           <a:lstStyle/>
           <a:p>
             <a:pPr algn="ctr"/>
+            <a:endParaRPr/>
           </a:p>
         </p:txBody>
       </p:sp>
@@ -9335,7 +9197,7 @@
           <a:noFill/>
         </p:spPr>
         <p:txBody>
-          <a:bodyPr wrap="square" anchor="t" lIns="0" rIns="0" tIns="0" bIns="0">
+          <a:bodyPr wrap="square" lIns="0" tIns="0" rIns="0" bIns="0" anchor="t">
             <a:spAutoFit/>
           </a:bodyPr>
           <a:lstStyle/>
@@ -9366,7 +9228,7 @@
 </file>
 
 <file path=ppt/slides/slide16.xml><?xml version="1.0" encoding="utf-8"?>
-<p:sld xmlns:a="http://schemas.openxmlformats.org/drawingml/2006/main" xmlns:p="http://schemas.openxmlformats.org/presentationml/2006/main" xmlns:r="http://schemas.openxmlformats.org/officeDocument/2006/relationships">
+<p:sld xmlns:a="http://schemas.openxmlformats.org/drawingml/2006/main" xmlns:r="http://schemas.openxmlformats.org/officeDocument/2006/relationships" xmlns:p="http://schemas.openxmlformats.org/presentationml/2006/main">
   <p:cSld>
     <p:spTree>
       <p:nvGrpSpPr>
@@ -9374,7 +9236,14 @@
         <p:cNvGrpSpPr/>
         <p:nvPr/>
       </p:nvGrpSpPr>
-      <p:grpSpPr/>
+      <p:grpSpPr>
+        <a:xfrm>
+          <a:off x="0" y="0"/>
+          <a:ext cx="0" cy="0"/>
+          <a:chOff x="0" y="0"/>
+          <a:chExt cx="0" cy="0"/>
+        </a:xfrm>
+      </p:grpSpPr>
       <p:sp>
         <p:nvSpPr>
           <p:cNvPr id="2" name="Rectangle 1"/>
@@ -9415,6 +9284,7 @@
           <a:lstStyle/>
           <a:p>
             <a:pPr algn="ctr"/>
+            <a:endParaRPr/>
           </a:p>
         </p:txBody>
       </p:sp>
@@ -9435,7 +9305,7 @@
           <a:noFill/>
         </p:spPr>
         <p:txBody>
-          <a:bodyPr wrap="square" anchor="t" lIns="0" rIns="0" tIns="0" bIns="0">
+          <a:bodyPr wrap="square" lIns="0" tIns="0" rIns="0" bIns="0" anchor="t">
             <a:spAutoFit/>
           </a:bodyPr>
           <a:lstStyle/>
@@ -9497,6 +9367,7 @@
           <a:lstStyle/>
           <a:p>
             <a:pPr algn="ctr"/>
+            <a:endParaRPr/>
           </a:p>
         </p:txBody>
       </p:sp>
@@ -9517,7 +9388,7 @@
           <a:noFill/>
         </p:spPr>
         <p:txBody>
-          <a:bodyPr wrap="square" anchor="t" lIns="0" rIns="0" tIns="0" bIns="0">
+          <a:bodyPr wrap="square" lIns="0" tIns="0" rIns="0" bIns="0" anchor="t">
             <a:spAutoFit/>
           </a:bodyPr>
           <a:lstStyle/>
@@ -9581,6 +9452,7 @@
           <a:lstStyle/>
           <a:p>
             <a:pPr algn="ctr"/>
+            <a:endParaRPr/>
           </a:p>
         </p:txBody>
       </p:sp>
@@ -9601,7 +9473,7 @@
           <a:noFill/>
         </p:spPr>
         <p:txBody>
-          <a:bodyPr wrap="square" anchor="t" lIns="0" rIns="0" tIns="0" bIns="0">
+          <a:bodyPr wrap="square" lIns="0" tIns="0" rIns="0" bIns="0" anchor="t">
             <a:spAutoFit/>
           </a:bodyPr>
           <a:lstStyle/>
@@ -9704,7 +9576,7 @@
           <a:noFill/>
         </p:spPr>
         <p:txBody>
-          <a:bodyPr wrap="square" anchor="t" lIns="0" rIns="0" tIns="0" bIns="0">
+          <a:bodyPr wrap="square" lIns="0" tIns="0" rIns="0" bIns="0" anchor="t">
             <a:spAutoFit/>
           </a:bodyPr>
           <a:lstStyle/>
@@ -9743,7 +9615,7 @@
           <a:noFill/>
         </p:spPr>
         <p:txBody>
-          <a:bodyPr wrap="square" anchor="t" lIns="0" rIns="0" tIns="0" bIns="0">
+          <a:bodyPr wrap="square" lIns="0" tIns="0" rIns="0" bIns="0" anchor="t">
             <a:spAutoFit/>
           </a:bodyPr>
           <a:lstStyle/>
@@ -9805,6 +9677,7 @@
           <a:lstStyle/>
           <a:p>
             <a:pPr algn="ctr"/>
+            <a:endParaRPr/>
           </a:p>
         </p:txBody>
       </p:sp>
@@ -9825,7 +9698,7 @@
           <a:noFill/>
         </p:spPr>
         <p:txBody>
-          <a:bodyPr wrap="square" anchor="t" lIns="0" rIns="0" tIns="0" bIns="0">
+          <a:bodyPr wrap="square" lIns="0" tIns="0" rIns="0" bIns="0" anchor="t">
             <a:spAutoFit/>
           </a:bodyPr>
           <a:lstStyle/>
@@ -9856,7 +9729,7 @@
 </file>
 
 <file path=ppt/slides/slide17.xml><?xml version="1.0" encoding="utf-8"?>
-<p:sld xmlns:a="http://schemas.openxmlformats.org/drawingml/2006/main" xmlns:p="http://schemas.openxmlformats.org/presentationml/2006/main" xmlns:r="http://schemas.openxmlformats.org/officeDocument/2006/relationships">
+<p:sld xmlns:a="http://schemas.openxmlformats.org/drawingml/2006/main" xmlns:r="http://schemas.openxmlformats.org/officeDocument/2006/relationships" xmlns:p="http://schemas.openxmlformats.org/presentationml/2006/main">
   <p:cSld>
     <p:spTree>
       <p:nvGrpSpPr>
@@ -9864,7 +9737,14 @@
         <p:cNvGrpSpPr/>
         <p:nvPr/>
       </p:nvGrpSpPr>
-      <p:grpSpPr/>
+      <p:grpSpPr>
+        <a:xfrm>
+          <a:off x="0" y="0"/>
+          <a:ext cx="0" cy="0"/>
+          <a:chOff x="0" y="0"/>
+          <a:chExt cx="0" cy="0"/>
+        </a:xfrm>
+      </p:grpSpPr>
       <p:sp>
         <p:nvSpPr>
           <p:cNvPr id="2" name="Rectangle 1"/>
@@ -9905,6 +9785,7 @@
           <a:lstStyle/>
           <a:p>
             <a:pPr algn="ctr"/>
+            <a:endParaRPr/>
           </a:p>
         </p:txBody>
       </p:sp>
@@ -9925,7 +9806,7 @@
           <a:noFill/>
         </p:spPr>
         <p:txBody>
-          <a:bodyPr wrap="square" anchor="t" lIns="0" rIns="0" tIns="0" bIns="0">
+          <a:bodyPr wrap="square" lIns="0" tIns="0" rIns="0" bIns="0" anchor="t">
             <a:spAutoFit/>
           </a:bodyPr>
           <a:lstStyle/>
@@ -9987,6 +9868,7 @@
           <a:lstStyle/>
           <a:p>
             <a:pPr algn="ctr"/>
+            <a:endParaRPr/>
           </a:p>
         </p:txBody>
       </p:sp>
@@ -10007,7 +9889,7 @@
           <a:noFill/>
         </p:spPr>
         <p:txBody>
-          <a:bodyPr wrap="square" anchor="t" lIns="0" rIns="0" tIns="0" bIns="0">
+          <a:bodyPr wrap="square" lIns="0" tIns="0" rIns="0" bIns="0" anchor="t">
             <a:spAutoFit/>
           </a:bodyPr>
           <a:lstStyle/>
@@ -10069,6 +9951,7 @@
           <a:lstStyle/>
           <a:p>
             <a:pPr algn="ctr"/>
+            <a:endParaRPr/>
           </a:p>
         </p:txBody>
       </p:sp>
@@ -10089,7 +9972,7 @@
           <a:noFill/>
         </p:spPr>
         <p:txBody>
-          <a:bodyPr wrap="square" anchor="t" lIns="0" rIns="0" tIns="0" bIns="0">
+          <a:bodyPr wrap="square" lIns="0" tIns="0" rIns="0" bIns="0" anchor="t">
             <a:spAutoFit/>
           </a:bodyPr>
           <a:lstStyle/>
@@ -10128,7 +10011,7 @@
           <a:noFill/>
         </p:spPr>
         <p:txBody>
-          <a:bodyPr wrap="square" anchor="t" lIns="0" rIns="0" tIns="0" bIns="0">
+          <a:bodyPr wrap="square" lIns="0" tIns="0" rIns="0" bIns="0" anchor="t">
             <a:spAutoFit/>
           </a:bodyPr>
           <a:lstStyle/>
@@ -10190,6 +10073,7 @@
           <a:lstStyle/>
           <a:p>
             <a:pPr algn="ctr"/>
+            <a:endParaRPr/>
           </a:p>
         </p:txBody>
       </p:sp>
@@ -10210,7 +10094,7 @@
           <a:noFill/>
         </p:spPr>
         <p:txBody>
-          <a:bodyPr wrap="square" anchor="t" lIns="0" rIns="0" tIns="0" bIns="0">
+          <a:bodyPr wrap="square" lIns="0" tIns="0" rIns="0" bIns="0" anchor="t">
             <a:spAutoFit/>
           </a:bodyPr>
           <a:lstStyle/>
@@ -10249,7 +10133,7 @@
           <a:noFill/>
         </p:spPr>
         <p:txBody>
-          <a:bodyPr wrap="square" anchor="t" lIns="0" rIns="0" tIns="0" bIns="0">
+          <a:bodyPr wrap="square" lIns="0" tIns="0" rIns="0" bIns="0" anchor="t">
             <a:spAutoFit/>
           </a:bodyPr>
           <a:lstStyle/>
@@ -10311,6 +10195,7 @@
           <a:lstStyle/>
           <a:p>
             <a:pPr algn="ctr"/>
+            <a:endParaRPr/>
           </a:p>
         </p:txBody>
       </p:sp>
@@ -10331,7 +10216,7 @@
           <a:noFill/>
         </p:spPr>
         <p:txBody>
-          <a:bodyPr wrap="square" anchor="t" lIns="0" rIns="0" tIns="0" bIns="0">
+          <a:bodyPr wrap="square" lIns="0" tIns="0" rIns="0" bIns="0" anchor="t">
             <a:spAutoFit/>
           </a:bodyPr>
           <a:lstStyle/>
@@ -10370,7 +10255,7 @@
           <a:noFill/>
         </p:spPr>
         <p:txBody>
-          <a:bodyPr wrap="square" anchor="t" lIns="0" rIns="0" tIns="0" bIns="0">
+          <a:bodyPr wrap="square" lIns="0" tIns="0" rIns="0" bIns="0" anchor="t">
             <a:spAutoFit/>
           </a:bodyPr>
           <a:lstStyle/>
@@ -10409,7 +10294,7 @@
           <a:noFill/>
         </p:spPr>
         <p:txBody>
-          <a:bodyPr wrap="square" anchor="t" lIns="0" rIns="0" tIns="0" bIns="0">
+          <a:bodyPr wrap="square" lIns="0" tIns="0" rIns="0" bIns="0" anchor="t">
             <a:spAutoFit/>
           </a:bodyPr>
           <a:lstStyle/>
@@ -10448,7 +10333,7 @@
           <a:noFill/>
         </p:spPr>
         <p:txBody>
-          <a:bodyPr wrap="square" anchor="t" lIns="0" rIns="0" tIns="0" bIns="0">
+          <a:bodyPr wrap="square" lIns="0" tIns="0" rIns="0" bIns="0" anchor="t">
             <a:spAutoFit/>
           </a:bodyPr>
           <a:lstStyle/>
@@ -10510,6 +10395,7 @@
           <a:lstStyle/>
           <a:p>
             <a:pPr algn="ctr"/>
+            <a:endParaRPr/>
           </a:p>
         </p:txBody>
       </p:sp>
@@ -10530,7 +10416,7 @@
           <a:noFill/>
         </p:spPr>
         <p:txBody>
-          <a:bodyPr wrap="square" anchor="t" lIns="0" rIns="0" tIns="0" bIns="0">
+          <a:bodyPr wrap="square" lIns="0" tIns="0" rIns="0" bIns="0" anchor="t">
             <a:spAutoFit/>
           </a:bodyPr>
           <a:lstStyle/>
@@ -10592,6 +10478,7 @@
           <a:lstStyle/>
           <a:p>
             <a:pPr algn="ctr"/>
+            <a:endParaRPr/>
           </a:p>
         </p:txBody>
       </p:sp>
@@ -10612,7 +10499,7 @@
           <a:noFill/>
         </p:spPr>
         <p:txBody>
-          <a:bodyPr wrap="square" anchor="t" lIns="0" rIns="0" tIns="0" bIns="0">
+          <a:bodyPr wrap="square" lIns="0" tIns="0" rIns="0" bIns="0" anchor="t">
             <a:spAutoFit/>
           </a:bodyPr>
           <a:lstStyle/>
@@ -10674,6 +10561,7 @@
           <a:lstStyle/>
           <a:p>
             <a:pPr algn="ctr"/>
+            <a:endParaRPr/>
           </a:p>
         </p:txBody>
       </p:sp>
@@ -10694,7 +10582,7 @@
           <a:noFill/>
         </p:spPr>
         <p:txBody>
-          <a:bodyPr wrap="square" anchor="t" lIns="0" rIns="0" tIns="0" bIns="0">
+          <a:bodyPr wrap="square" lIns="0" tIns="0" rIns="0" bIns="0" anchor="t">
             <a:spAutoFit/>
           </a:bodyPr>
           <a:lstStyle/>
@@ -10756,6 +10644,7 @@
           <a:lstStyle/>
           <a:p>
             <a:pPr algn="ctr"/>
+            <a:endParaRPr/>
           </a:p>
         </p:txBody>
       </p:sp>
@@ -10776,7 +10665,7 @@
           <a:noFill/>
         </p:spPr>
         <p:txBody>
-          <a:bodyPr wrap="square" anchor="t" lIns="0" rIns="0" tIns="0" bIns="0">
+          <a:bodyPr wrap="square" lIns="0" tIns="0" rIns="0" bIns="0" anchor="t">
             <a:spAutoFit/>
           </a:bodyPr>
           <a:lstStyle/>
@@ -10806,8 +10695,8 @@
         </p:nvSpPr>
         <p:spPr>
           <a:xfrm>
-            <a:off x="566928" y="3749039"/>
-            <a:ext cx="8010144" cy="411480"/>
+            <a:off x="566928" y="3749038"/>
+            <a:ext cx="8010144" cy="521209"/>
           </a:xfrm>
           <a:prstGeom prst="rect">
             <a:avLst/>
@@ -10840,6 +10729,7 @@
           <a:lstStyle/>
           <a:p>
             <a:pPr algn="ctr"/>
+            <a:endParaRPr/>
           </a:p>
         </p:txBody>
       </p:sp>
@@ -10860,7 +10750,7 @@
           <a:noFill/>
         </p:spPr>
         <p:txBody>
-          <a:bodyPr wrap="square" anchor="t" lIns="0" rIns="0" tIns="0" bIns="0">
+          <a:bodyPr wrap="square" lIns="0" tIns="0" rIns="0" bIns="0" anchor="t">
             <a:spAutoFit/>
           </a:bodyPr>
           <a:lstStyle/>
@@ -10922,6 +10812,7 @@
           <a:lstStyle/>
           <a:p>
             <a:pPr algn="ctr"/>
+            <a:endParaRPr/>
           </a:p>
         </p:txBody>
       </p:sp>
@@ -10965,6 +10856,7 @@
           <a:lstStyle/>
           <a:p>
             <a:pPr algn="ctr"/>
+            <a:endParaRPr/>
           </a:p>
         </p:txBody>
       </p:sp>
@@ -10985,7 +10877,7 @@
           <a:noFill/>
         </p:spPr>
         <p:txBody>
-          <a:bodyPr wrap="square" anchor="t" lIns="0" rIns="0" tIns="0" bIns="0">
+          <a:bodyPr wrap="square" lIns="0" tIns="0" rIns="0" bIns="0" anchor="t">
             <a:spAutoFit/>
           </a:bodyPr>
           <a:lstStyle/>
@@ -11016,7 +10908,7 @@
 </file>
 
 <file path=ppt/slides/slide18.xml><?xml version="1.0" encoding="utf-8"?>
-<p:sld xmlns:a="http://schemas.openxmlformats.org/drawingml/2006/main" xmlns:p="http://schemas.openxmlformats.org/presentationml/2006/main" xmlns:r="http://schemas.openxmlformats.org/officeDocument/2006/relationships">
+<p:sld xmlns:a="http://schemas.openxmlformats.org/drawingml/2006/main" xmlns:r="http://schemas.openxmlformats.org/officeDocument/2006/relationships" xmlns:p="http://schemas.openxmlformats.org/presentationml/2006/main">
   <p:cSld>
     <p:spTree>
       <p:nvGrpSpPr>
@@ -11024,50 +10916,14 @@
         <p:cNvGrpSpPr/>
         <p:nvPr/>
       </p:nvGrpSpPr>
-      <p:grpSpPr/>
-      <p:sp>
-        <p:nvSpPr>
-          <p:cNvPr id="2" name="Rectangle 1"/>
-          <p:cNvSpPr/>
-          <p:nvPr/>
-        </p:nvSpPr>
-        <p:spPr>
-          <a:xfrm>
-            <a:off x="0" y="0"/>
-            <a:ext cx="9144000" cy="5143500"/>
-          </a:xfrm>
-          <a:prstGeom prst="rect">
-            <a:avLst/>
-          </a:prstGeom>
-          <a:solidFill>
-            <a:srgbClr val="FFFFFF"/>
-          </a:solidFill>
-          <a:ln>
-            <a:noFill/>
-          </a:ln>
-        </p:spPr>
-        <p:style>
-          <a:lnRef idx="1">
-            <a:schemeClr val="accent1"/>
-          </a:lnRef>
-          <a:fillRef idx="3">
-            <a:schemeClr val="accent1"/>
-          </a:fillRef>
-          <a:effectRef idx="2">
-            <a:schemeClr val="accent1"/>
-          </a:effectRef>
-          <a:fontRef idx="minor">
-            <a:schemeClr val="lt1"/>
-          </a:fontRef>
-        </p:style>
-        <p:txBody>
-          <a:bodyPr rtlCol="0" anchor="ctr"/>
-          <a:lstStyle/>
-          <a:p>
-            <a:pPr algn="ctr"/>
-          </a:p>
-        </p:txBody>
-      </p:sp>
+      <p:grpSpPr>
+        <a:xfrm>
+          <a:off x="0" y="0"/>
+          <a:ext cx="0" cy="0"/>
+          <a:chOff x="0" y="0"/>
+          <a:chExt cx="0" cy="0"/>
+        </a:xfrm>
+      </p:grpSpPr>
       <p:sp>
         <p:nvSpPr>
           <p:cNvPr id="3" name="TextBox 2"/>
@@ -11085,7 +10941,7 @@
           <a:noFill/>
         </p:spPr>
         <p:txBody>
-          <a:bodyPr wrap="square" anchor="t" lIns="0" rIns="0" tIns="0" bIns="0">
+          <a:bodyPr wrap="square" lIns="0" tIns="0" rIns="0" bIns="0" anchor="t">
             <a:spAutoFit/>
           </a:bodyPr>
           <a:lstStyle/>
@@ -11115,7 +10971,7 @@
         </p:nvSpPr>
         <p:spPr>
           <a:xfrm>
-            <a:off x="566928" y="960120"/>
+            <a:off x="548363" y="1347355"/>
             <a:ext cx="2743200" cy="1600200"/>
           </a:xfrm>
           <a:prstGeom prst="rect">
@@ -11124,7 +10980,7 @@
           <a:noFill/>
         </p:spPr>
         <p:txBody>
-          <a:bodyPr wrap="square" anchor="t" lIns="0" rIns="0" tIns="0" bIns="0">
+          <a:bodyPr wrap="square" lIns="0" tIns="0" rIns="0" bIns="0" anchor="t">
             <a:spAutoFit/>
           </a:bodyPr>
           <a:lstStyle/>
@@ -11135,7 +10991,7 @@
               </a:lnSpc>
             </a:pPr>
             <a:r>
-              <a:rPr sz="9600" b="1">
+              <a:rPr sz="9600" b="1" dirty="0">
                 <a:solidFill>
                   <a:srgbClr val="000000"/>
                 </a:solidFill>
@@ -11163,7 +11019,7 @@
           <a:noFill/>
         </p:spPr>
         <p:txBody>
-          <a:bodyPr wrap="square" anchor="t" lIns="0" rIns="0" tIns="0" bIns="0">
+          <a:bodyPr wrap="square" lIns="0" tIns="0" rIns="0" bIns="0" anchor="t">
             <a:spAutoFit/>
           </a:bodyPr>
           <a:lstStyle/>
@@ -11225,6 +11081,7 @@
           <a:lstStyle/>
           <a:p>
             <a:pPr algn="ctr"/>
+            <a:endParaRPr/>
           </a:p>
         </p:txBody>
       </p:sp>
@@ -11245,7 +11102,7 @@
           <a:noFill/>
         </p:spPr>
         <p:txBody>
-          <a:bodyPr wrap="square" anchor="t" lIns="0" rIns="0" tIns="0" bIns="0">
+          <a:bodyPr wrap="square" lIns="0" tIns="0" rIns="0" bIns="0" anchor="t">
             <a:spAutoFit/>
           </a:bodyPr>
           <a:lstStyle/>
@@ -11325,6 +11182,7 @@
           <a:lstStyle/>
           <a:p>
             <a:pPr algn="ctr"/>
+            <a:endParaRPr/>
           </a:p>
         </p:txBody>
       </p:sp>
@@ -11345,7 +11203,7 @@
           <a:noFill/>
         </p:spPr>
         <p:txBody>
-          <a:bodyPr wrap="square" anchor="t" lIns="0" rIns="0" tIns="0" bIns="0">
+          <a:bodyPr wrap="square" lIns="0" tIns="0" rIns="0" bIns="0" anchor="t">
             <a:spAutoFit/>
           </a:bodyPr>
           <a:lstStyle/>
@@ -11441,6 +11299,7 @@
           <a:lstStyle/>
           <a:p>
             <a:pPr algn="ctr"/>
+            <a:endParaRPr/>
           </a:p>
         </p:txBody>
       </p:sp>
@@ -11461,7 +11320,7 @@
           <a:noFill/>
         </p:spPr>
         <p:txBody>
-          <a:bodyPr wrap="square" anchor="t" lIns="0" rIns="0" tIns="0" bIns="0">
+          <a:bodyPr wrap="square" lIns="0" tIns="0" rIns="0" bIns="0" anchor="t">
             <a:spAutoFit/>
           </a:bodyPr>
           <a:lstStyle/>
@@ -11539,6 +11398,7 @@
           <a:lstStyle/>
           <a:p>
             <a:pPr algn="ctr"/>
+            <a:endParaRPr/>
           </a:p>
         </p:txBody>
       </p:sp>
@@ -11559,7 +11419,7 @@
           <a:noFill/>
         </p:spPr>
         <p:txBody>
-          <a:bodyPr wrap="square" anchor="t" lIns="0" rIns="0" tIns="0" bIns="0">
+          <a:bodyPr wrap="square" lIns="0" tIns="0" rIns="0" bIns="0" anchor="t">
             <a:spAutoFit/>
           </a:bodyPr>
           <a:lstStyle/>
@@ -11589,7 +11449,7 @@
         </p:nvSpPr>
         <p:spPr>
           <a:xfrm>
-            <a:off x="566928" y="3977639"/>
+            <a:off x="548363" y="3925547"/>
             <a:ext cx="2743200" cy="685800"/>
           </a:xfrm>
           <a:prstGeom prst="rect">
@@ -11598,7 +11458,7 @@
           <a:noFill/>
         </p:spPr>
         <p:txBody>
-          <a:bodyPr wrap="square" anchor="t" lIns="0" rIns="0" tIns="0" bIns="0">
+          <a:bodyPr wrap="square" lIns="0" tIns="0" rIns="0" bIns="0" anchor="t">
             <a:spAutoFit/>
           </a:bodyPr>
           <a:lstStyle/>
@@ -11609,7 +11469,7 @@
               </a:lnSpc>
             </a:pPr>
             <a:r>
-              <a:rPr sz="1050" b="0">
+              <a:rPr sz="1050" b="0" dirty="0">
                 <a:solidFill>
                   <a:srgbClr val="000000"/>
                 </a:solidFill>
@@ -11628,7 +11488,7 @@
         </p:nvSpPr>
         <p:spPr>
           <a:xfrm>
-            <a:off x="566928" y="4590288"/>
+            <a:off x="267670" y="4492475"/>
             <a:ext cx="8010144" cy="256032"/>
           </a:xfrm>
           <a:prstGeom prst="rect">
@@ -11637,7 +11497,7 @@
           <a:noFill/>
         </p:spPr>
         <p:txBody>
-          <a:bodyPr wrap="square" anchor="t" lIns="0" rIns="0" tIns="0" bIns="0">
+          <a:bodyPr wrap="square" lIns="0" tIns="0" rIns="0" bIns="0" anchor="t">
             <a:spAutoFit/>
           </a:bodyPr>
           <a:lstStyle/>
@@ -11648,7 +11508,7 @@
               </a:lnSpc>
             </a:pPr>
             <a:r>
-              <a:rPr sz="1050" b="0">
+              <a:rPr sz="1050" b="0" dirty="0">
                 <a:solidFill>
                   <a:srgbClr val="000000"/>
                 </a:solidFill>
@@ -11668,7 +11528,7 @@
 </file>
 
 <file path=ppt/slides/slide19.xml><?xml version="1.0" encoding="utf-8"?>
-<p:sld xmlns:a="http://schemas.openxmlformats.org/drawingml/2006/main" xmlns:p="http://schemas.openxmlformats.org/presentationml/2006/main" xmlns:r="http://schemas.openxmlformats.org/officeDocument/2006/relationships">
+<p:sld xmlns:a="http://schemas.openxmlformats.org/drawingml/2006/main" xmlns:r="http://schemas.openxmlformats.org/officeDocument/2006/relationships" xmlns:p="http://schemas.openxmlformats.org/presentationml/2006/main">
   <p:cSld>
     <p:spTree>
       <p:nvGrpSpPr>
@@ -11676,7 +11536,14 @@
         <p:cNvGrpSpPr/>
         <p:nvPr/>
       </p:nvGrpSpPr>
-      <p:grpSpPr/>
+      <p:grpSpPr>
+        <a:xfrm>
+          <a:off x="0" y="0"/>
+          <a:ext cx="0" cy="0"/>
+          <a:chOff x="0" y="0"/>
+          <a:chExt cx="0" cy="0"/>
+        </a:xfrm>
+      </p:grpSpPr>
       <p:sp>
         <p:nvSpPr>
           <p:cNvPr id="2" name="Rectangle 1"/>
@@ -11717,6 +11584,7 @@
           <a:lstStyle/>
           <a:p>
             <a:pPr algn="ctr"/>
+            <a:endParaRPr/>
           </a:p>
         </p:txBody>
       </p:sp>
@@ -11737,7 +11605,7 @@
           <a:noFill/>
         </p:spPr>
         <p:txBody>
-          <a:bodyPr wrap="square" anchor="t" lIns="0" rIns="0" tIns="0" bIns="0">
+          <a:bodyPr wrap="square" lIns="0" tIns="0" rIns="0" bIns="0" anchor="t">
             <a:spAutoFit/>
           </a:bodyPr>
           <a:lstStyle/>
@@ -11799,6 +11667,7 @@
           <a:lstStyle/>
           <a:p>
             <a:pPr algn="ctr"/>
+            <a:endParaRPr/>
           </a:p>
         </p:txBody>
       </p:sp>
@@ -11819,7 +11688,7 @@
           <a:noFill/>
         </p:spPr>
         <p:txBody>
-          <a:bodyPr wrap="square" anchor="t" lIns="0" rIns="0" tIns="0" bIns="0">
+          <a:bodyPr wrap="square" lIns="0" tIns="0" rIns="0" bIns="0" anchor="t">
             <a:spAutoFit/>
           </a:bodyPr>
           <a:lstStyle/>
@@ -11858,7 +11727,7 @@
           <a:noFill/>
         </p:spPr>
         <p:txBody>
-          <a:bodyPr wrap="square" anchor="t" lIns="0" rIns="0" tIns="0" bIns="0">
+          <a:bodyPr wrap="square" lIns="0" tIns="0" rIns="0" bIns="0" anchor="t">
             <a:spAutoFit/>
           </a:bodyPr>
           <a:lstStyle/>
@@ -11897,7 +11766,7 @@
           <a:noFill/>
         </p:spPr>
         <p:txBody>
-          <a:bodyPr wrap="square" anchor="t" lIns="0" rIns="0" tIns="0" bIns="0">
+          <a:bodyPr wrap="square" lIns="0" tIns="0" rIns="0" bIns="0" anchor="t">
             <a:spAutoFit/>
           </a:bodyPr>
           <a:lstStyle/>
@@ -11959,6 +11828,7 @@
           <a:lstStyle/>
           <a:p>
             <a:pPr algn="ctr"/>
+            <a:endParaRPr/>
           </a:p>
         </p:txBody>
       </p:sp>
@@ -11979,7 +11849,7 @@
           <a:noFill/>
         </p:spPr>
         <p:txBody>
-          <a:bodyPr wrap="square" anchor="t" lIns="0" rIns="0" tIns="0" bIns="0">
+          <a:bodyPr wrap="square" lIns="0" tIns="0" rIns="0" bIns="0" anchor="t">
             <a:spAutoFit/>
           </a:bodyPr>
           <a:lstStyle/>
@@ -12018,7 +11888,7 @@
           <a:noFill/>
         </p:spPr>
         <p:txBody>
-          <a:bodyPr wrap="square" anchor="t" lIns="0" rIns="0" tIns="0" bIns="0">
+          <a:bodyPr wrap="square" lIns="0" tIns="0" rIns="0" bIns="0" anchor="t">
             <a:spAutoFit/>
           </a:bodyPr>
           <a:lstStyle/>
@@ -12080,6 +11950,7 @@
           <a:lstStyle/>
           <a:p>
             <a:pPr algn="ctr"/>
+            <a:endParaRPr/>
           </a:p>
         </p:txBody>
       </p:sp>
@@ -12100,7 +11971,7 @@
           <a:noFill/>
         </p:spPr>
         <p:txBody>
-          <a:bodyPr wrap="square" anchor="t" lIns="0" rIns="0" tIns="0" bIns="0">
+          <a:bodyPr wrap="square" lIns="0" tIns="0" rIns="0" bIns="0" anchor="t">
             <a:spAutoFit/>
           </a:bodyPr>
           <a:lstStyle/>
@@ -12139,7 +12010,7 @@
           <a:noFill/>
         </p:spPr>
         <p:txBody>
-          <a:bodyPr wrap="square" anchor="t" lIns="0" rIns="0" tIns="0" bIns="0">
+          <a:bodyPr wrap="square" lIns="0" tIns="0" rIns="0" bIns="0" anchor="t">
             <a:spAutoFit/>
           </a:bodyPr>
           <a:lstStyle/>
@@ -12178,7 +12049,7 @@
           <a:noFill/>
         </p:spPr>
         <p:txBody>
-          <a:bodyPr wrap="square" anchor="t" lIns="0" rIns="0" tIns="0" bIns="0">
+          <a:bodyPr wrap="square" lIns="0" tIns="0" rIns="0" bIns="0" anchor="t">
             <a:spAutoFit/>
           </a:bodyPr>
           <a:lstStyle/>
@@ -12240,6 +12111,7 @@
           <a:lstStyle/>
           <a:p>
             <a:pPr algn="ctr"/>
+            <a:endParaRPr/>
           </a:p>
         </p:txBody>
       </p:sp>
@@ -12260,7 +12132,7 @@
           <a:noFill/>
         </p:spPr>
         <p:txBody>
-          <a:bodyPr wrap="square" anchor="t" lIns="0" rIns="0" tIns="0" bIns="0">
+          <a:bodyPr wrap="square" lIns="0" tIns="0" rIns="0" bIns="0" anchor="t">
             <a:spAutoFit/>
           </a:bodyPr>
           <a:lstStyle/>
@@ -12271,7 +12143,7 @@
               </a:lnSpc>
             </a:pPr>
             <a:r>
-              <a:rPr sz="1400" b="0">
+              <a:rPr sz="1400" b="0" dirty="0">
                 <a:solidFill>
                   <a:srgbClr val="000000"/>
                 </a:solidFill>
@@ -12306,7 +12178,7 @@
         </p:nvSpPr>
         <p:spPr>
           <a:xfrm>
-            <a:off x="566928" y="4617720"/>
+            <a:off x="548640" y="4557037"/>
             <a:ext cx="8010144" cy="256032"/>
           </a:xfrm>
           <a:prstGeom prst="rect">
@@ -12315,7 +12187,7 @@
           <a:noFill/>
         </p:spPr>
         <p:txBody>
-          <a:bodyPr wrap="square" anchor="t" lIns="0" rIns="0" tIns="0" bIns="0">
+          <a:bodyPr wrap="square" lIns="0" tIns="0" rIns="0" bIns="0" anchor="t">
             <a:spAutoFit/>
           </a:bodyPr>
           <a:lstStyle/>
@@ -12326,7 +12198,7 @@
               </a:lnSpc>
             </a:pPr>
             <a:r>
-              <a:rPr sz="1050" b="0">
+              <a:rPr sz="1050" b="0" dirty="0">
                 <a:solidFill>
                   <a:srgbClr val="000000"/>
                 </a:solidFill>
@@ -12346,7 +12218,7 @@
 </file>
 
 <file path=ppt/slides/slide2.xml><?xml version="1.0" encoding="utf-8"?>
-<p:sld xmlns:a="http://schemas.openxmlformats.org/drawingml/2006/main" xmlns:p="http://schemas.openxmlformats.org/presentationml/2006/main" xmlns:r="http://schemas.openxmlformats.org/officeDocument/2006/relationships">
+<p:sld xmlns:a="http://schemas.openxmlformats.org/drawingml/2006/main" xmlns:r="http://schemas.openxmlformats.org/officeDocument/2006/relationships" xmlns:p="http://schemas.openxmlformats.org/presentationml/2006/main">
   <p:cSld>
     <p:spTree>
       <p:nvGrpSpPr>
@@ -12354,7 +12226,14 @@
         <p:cNvGrpSpPr/>
         <p:nvPr/>
       </p:nvGrpSpPr>
-      <p:grpSpPr/>
+      <p:grpSpPr>
+        <a:xfrm>
+          <a:off x="0" y="0"/>
+          <a:ext cx="0" cy="0"/>
+          <a:chOff x="0" y="0"/>
+          <a:chExt cx="0" cy="0"/>
+        </a:xfrm>
+      </p:grpSpPr>
       <p:sp>
         <p:nvSpPr>
           <p:cNvPr id="2" name="Rectangle 1"/>
@@ -12395,6 +12274,7 @@
           <a:lstStyle/>
           <a:p>
             <a:pPr algn="ctr"/>
+            <a:endParaRPr/>
           </a:p>
         </p:txBody>
       </p:sp>
@@ -12415,7 +12295,7 @@
           <a:noFill/>
         </p:spPr>
         <p:txBody>
-          <a:bodyPr wrap="square" anchor="t" lIns="0" rIns="0" tIns="0" bIns="0">
+          <a:bodyPr wrap="square" lIns="0" tIns="0" rIns="0" bIns="0" anchor="t">
             <a:spAutoFit/>
           </a:bodyPr>
           <a:lstStyle/>
@@ -12477,6 +12357,7 @@
           <a:lstStyle/>
           <a:p>
             <a:pPr algn="ctr"/>
+            <a:endParaRPr/>
           </a:p>
         </p:txBody>
       </p:sp>
@@ -12497,7 +12378,7 @@
           <a:noFill/>
         </p:spPr>
         <p:txBody>
-          <a:bodyPr wrap="square" anchor="t" lIns="0" rIns="0" tIns="0" bIns="0">
+          <a:bodyPr wrap="square" lIns="0" tIns="0" rIns="0" bIns="0" anchor="t">
             <a:spAutoFit/>
           </a:bodyPr>
           <a:lstStyle/>
@@ -12559,6 +12440,7 @@
           <a:lstStyle/>
           <a:p>
             <a:pPr algn="ctr"/>
+            <a:endParaRPr/>
           </a:p>
         </p:txBody>
       </p:sp>
@@ -12579,7 +12461,7 @@
           <a:noFill/>
         </p:spPr>
         <p:txBody>
-          <a:bodyPr wrap="square" anchor="t" lIns="0" rIns="0" tIns="0" bIns="0">
+          <a:bodyPr wrap="square" lIns="0" tIns="0" rIns="0" bIns="0" anchor="t">
             <a:spAutoFit/>
           </a:bodyPr>
           <a:lstStyle/>
@@ -12618,7 +12500,7 @@
           <a:noFill/>
         </p:spPr>
         <p:txBody>
-          <a:bodyPr wrap="square" anchor="t" lIns="0" rIns="0" tIns="0" bIns="0">
+          <a:bodyPr wrap="square" lIns="0" tIns="0" rIns="0" bIns="0" anchor="t">
             <a:spAutoFit/>
           </a:bodyPr>
           <a:lstStyle/>
@@ -12696,6 +12578,7 @@
           <a:lstStyle/>
           <a:p>
             <a:pPr algn="ctr"/>
+            <a:endParaRPr/>
           </a:p>
         </p:txBody>
       </p:sp>
@@ -12716,7 +12599,7 @@
           <a:noFill/>
         </p:spPr>
         <p:txBody>
-          <a:bodyPr wrap="square" anchor="t" lIns="0" rIns="0" tIns="0" bIns="0">
+          <a:bodyPr wrap="square" lIns="0" tIns="0" rIns="0" bIns="0" anchor="t">
             <a:spAutoFit/>
           </a:bodyPr>
           <a:lstStyle/>
@@ -12755,7 +12638,7 @@
           <a:noFill/>
         </p:spPr>
         <p:txBody>
-          <a:bodyPr wrap="square" anchor="t" lIns="0" rIns="0" tIns="0" bIns="0">
+          <a:bodyPr wrap="square" lIns="0" tIns="0" rIns="0" bIns="0" anchor="t">
             <a:spAutoFit/>
           </a:bodyPr>
           <a:lstStyle/>
@@ -12833,6 +12716,7 @@
           <a:lstStyle/>
           <a:p>
             <a:pPr algn="ctr"/>
+            <a:endParaRPr/>
           </a:p>
         </p:txBody>
       </p:sp>
@@ -12853,7 +12737,7 @@
           <a:noFill/>
         </p:spPr>
         <p:txBody>
-          <a:bodyPr wrap="square" anchor="t" lIns="0" rIns="0" tIns="0" bIns="0">
+          <a:bodyPr wrap="square" lIns="0" tIns="0" rIns="0" bIns="0" anchor="t">
             <a:spAutoFit/>
           </a:bodyPr>
           <a:lstStyle/>
@@ -12900,7 +12784,7 @@
 </file>
 
 <file path=ppt/slides/slide3.xml><?xml version="1.0" encoding="utf-8"?>
-<p:sld xmlns:a="http://schemas.openxmlformats.org/drawingml/2006/main" xmlns:p="http://schemas.openxmlformats.org/presentationml/2006/main" xmlns:r="http://schemas.openxmlformats.org/officeDocument/2006/relationships">
+<p:sld xmlns:a="http://schemas.openxmlformats.org/drawingml/2006/main" xmlns:r="http://schemas.openxmlformats.org/officeDocument/2006/relationships" xmlns:p="http://schemas.openxmlformats.org/presentationml/2006/main">
   <p:cSld>
     <p:spTree>
       <p:nvGrpSpPr>
@@ -12908,7 +12792,14 @@
         <p:cNvGrpSpPr/>
         <p:nvPr/>
       </p:nvGrpSpPr>
-      <p:grpSpPr/>
+      <p:grpSpPr>
+        <a:xfrm>
+          <a:off x="0" y="0"/>
+          <a:ext cx="0" cy="0"/>
+          <a:chOff x="0" y="0"/>
+          <a:chExt cx="0" cy="0"/>
+        </a:xfrm>
+      </p:grpSpPr>
       <p:sp>
         <p:nvSpPr>
           <p:cNvPr id="2" name="Rectangle 1"/>
@@ -12949,6 +12840,7 @@
           <a:lstStyle/>
           <a:p>
             <a:pPr algn="ctr"/>
+            <a:endParaRPr/>
           </a:p>
         </p:txBody>
       </p:sp>
@@ -12969,7 +12861,7 @@
           <a:noFill/>
         </p:spPr>
         <p:txBody>
-          <a:bodyPr wrap="square" anchor="t" lIns="0" rIns="0" tIns="0" bIns="0">
+          <a:bodyPr wrap="square" lIns="0" tIns="0" rIns="0" bIns="0" anchor="t">
             <a:spAutoFit/>
           </a:bodyPr>
           <a:lstStyle/>
@@ -13031,6 +12923,7 @@
           <a:lstStyle/>
           <a:p>
             <a:pPr algn="ctr"/>
+            <a:endParaRPr/>
           </a:p>
         </p:txBody>
       </p:sp>
@@ -13051,7 +12944,7 @@
           <a:noFill/>
         </p:spPr>
         <p:txBody>
-          <a:bodyPr wrap="square" anchor="t" lIns="0" rIns="0" tIns="0" bIns="0">
+          <a:bodyPr wrap="square" lIns="0" tIns="0" rIns="0" bIns="0" anchor="t">
             <a:spAutoFit/>
           </a:bodyPr>
           <a:lstStyle/>
@@ -13090,7 +12983,7 @@
           <a:noFill/>
         </p:spPr>
         <p:txBody>
-          <a:bodyPr wrap="square" anchor="t" lIns="0" rIns="0" tIns="0" bIns="0">
+          <a:bodyPr wrap="square" lIns="0" tIns="0" rIns="0" bIns="0" anchor="t">
             <a:spAutoFit/>
           </a:bodyPr>
           <a:lstStyle/>
@@ -13154,6 +13047,7 @@
           <a:lstStyle/>
           <a:p>
             <a:pPr algn="ctr"/>
+            <a:endParaRPr/>
           </a:p>
         </p:txBody>
       </p:sp>
@@ -13199,6 +13093,7 @@
           <a:lstStyle/>
           <a:p>
             <a:pPr algn="ctr"/>
+            <a:endParaRPr/>
           </a:p>
         </p:txBody>
       </p:sp>
@@ -13219,7 +13114,7 @@
           <a:noFill/>
         </p:spPr>
         <p:txBody>
-          <a:bodyPr wrap="square" anchor="t" lIns="0" rIns="0" tIns="0" bIns="0">
+          <a:bodyPr wrap="square" lIns="0" tIns="0" rIns="0" bIns="0" anchor="t">
             <a:spAutoFit/>
           </a:bodyPr>
           <a:lstStyle/>
@@ -13283,6 +13178,7 @@
           <a:lstStyle/>
           <a:p>
             <a:pPr algn="ctr"/>
+            <a:endParaRPr/>
           </a:p>
         </p:txBody>
       </p:sp>
@@ -13328,6 +13224,7 @@
           <a:lstStyle/>
           <a:p>
             <a:pPr algn="ctr"/>
+            <a:endParaRPr/>
           </a:p>
         </p:txBody>
       </p:sp>
@@ -13373,6 +13270,7 @@
           <a:lstStyle/>
           <a:p>
             <a:pPr algn="ctr"/>
+            <a:endParaRPr/>
           </a:p>
         </p:txBody>
       </p:sp>
@@ -13418,6 +13316,7 @@
           <a:lstStyle/>
           <a:p>
             <a:pPr algn="ctr"/>
+            <a:endParaRPr/>
           </a:p>
         </p:txBody>
       </p:sp>
@@ -13461,6 +13360,7 @@
           <a:lstStyle/>
           <a:p>
             <a:pPr algn="ctr"/>
+            <a:endParaRPr/>
           </a:p>
         </p:txBody>
       </p:sp>
@@ -13481,7 +13381,7 @@
           <a:noFill/>
         </p:spPr>
         <p:txBody>
-          <a:bodyPr wrap="square" anchor="t" lIns="0" rIns="0" tIns="0" bIns="0">
+          <a:bodyPr wrap="square" lIns="0" tIns="0" rIns="0" bIns="0" anchor="t">
             <a:spAutoFit/>
           </a:bodyPr>
           <a:lstStyle/>
@@ -13543,6 +13443,7 @@
           <a:lstStyle/>
           <a:p>
             <a:pPr algn="ctr"/>
+            <a:endParaRPr/>
           </a:p>
         </p:txBody>
       </p:sp>
@@ -13563,7 +13464,7 @@
           <a:noFill/>
         </p:spPr>
         <p:txBody>
-          <a:bodyPr wrap="square" anchor="t" lIns="0" rIns="0" tIns="0" bIns="0">
+          <a:bodyPr wrap="square" lIns="0" tIns="0" rIns="0" bIns="0" anchor="t">
             <a:spAutoFit/>
           </a:bodyPr>
           <a:lstStyle/>
@@ -13625,6 +13526,7 @@
           <a:lstStyle/>
           <a:p>
             <a:pPr algn="ctr"/>
+            <a:endParaRPr/>
           </a:p>
         </p:txBody>
       </p:sp>
@@ -13645,7 +13547,7 @@
           <a:noFill/>
         </p:spPr>
         <p:txBody>
-          <a:bodyPr wrap="square" anchor="t" lIns="0" rIns="0" tIns="0" bIns="0">
+          <a:bodyPr wrap="square" lIns="0" tIns="0" rIns="0" bIns="0" anchor="t">
             <a:spAutoFit/>
           </a:bodyPr>
           <a:lstStyle/>
@@ -13709,6 +13611,7 @@
           <a:lstStyle/>
           <a:p>
             <a:pPr algn="ctr"/>
+            <a:endParaRPr/>
           </a:p>
         </p:txBody>
       </p:sp>
@@ -13729,7 +13632,7 @@
           <a:noFill/>
         </p:spPr>
         <p:txBody>
-          <a:bodyPr wrap="square" anchor="t" lIns="0" rIns="0" tIns="0" bIns="0">
+          <a:bodyPr wrap="square" lIns="0" tIns="0" rIns="0" bIns="0" anchor="t">
             <a:spAutoFit/>
           </a:bodyPr>
           <a:lstStyle/>
@@ -13807,6 +13710,7 @@
           <a:lstStyle/>
           <a:p>
             <a:pPr algn="ctr"/>
+            <a:endParaRPr/>
           </a:p>
         </p:txBody>
       </p:sp>
@@ -13827,7 +13731,7 @@
           <a:noFill/>
         </p:spPr>
         <p:txBody>
-          <a:bodyPr wrap="square" anchor="t" lIns="0" rIns="0" tIns="0" bIns="0">
+          <a:bodyPr wrap="square" lIns="0" tIns="0" rIns="0" bIns="0" anchor="t">
             <a:spAutoFit/>
           </a:bodyPr>
           <a:lstStyle/>
@@ -13858,7 +13762,7 @@
 </file>
 
 <file path=ppt/slides/slide4.xml><?xml version="1.0" encoding="utf-8"?>
-<p:sld xmlns:a="http://schemas.openxmlformats.org/drawingml/2006/main" xmlns:p="http://schemas.openxmlformats.org/presentationml/2006/main" xmlns:r="http://schemas.openxmlformats.org/officeDocument/2006/relationships">
+<p:sld xmlns:a="http://schemas.openxmlformats.org/drawingml/2006/main" xmlns:r="http://schemas.openxmlformats.org/officeDocument/2006/relationships" xmlns:p="http://schemas.openxmlformats.org/presentationml/2006/main">
   <p:cSld>
     <p:spTree>
       <p:nvGrpSpPr>
@@ -13866,7 +13770,14 @@
         <p:cNvGrpSpPr/>
         <p:nvPr/>
       </p:nvGrpSpPr>
-      <p:grpSpPr/>
+      <p:grpSpPr>
+        <a:xfrm>
+          <a:off x="0" y="0"/>
+          <a:ext cx="0" cy="0"/>
+          <a:chOff x="0" y="0"/>
+          <a:chExt cx="0" cy="0"/>
+        </a:xfrm>
+      </p:grpSpPr>
       <p:sp>
         <p:nvSpPr>
           <p:cNvPr id="2" name="Rectangle 1"/>
@@ -13907,6 +13818,7 @@
           <a:lstStyle/>
           <a:p>
             <a:pPr algn="ctr"/>
+            <a:endParaRPr/>
           </a:p>
         </p:txBody>
       </p:sp>
@@ -13927,7 +13839,7 @@
           <a:noFill/>
         </p:spPr>
         <p:txBody>
-          <a:bodyPr wrap="square" anchor="t" lIns="0" rIns="0" tIns="0" bIns="0">
+          <a:bodyPr wrap="square" lIns="0" tIns="0" rIns="0" bIns="0" anchor="t">
             <a:spAutoFit/>
           </a:bodyPr>
           <a:lstStyle/>
@@ -13989,6 +13901,7 @@
           <a:lstStyle/>
           <a:p>
             <a:pPr algn="ctr"/>
+            <a:endParaRPr/>
           </a:p>
         </p:txBody>
       </p:sp>
@@ -14009,7 +13922,7 @@
           <a:noFill/>
         </p:spPr>
         <p:txBody>
-          <a:bodyPr wrap="square" anchor="t" lIns="0" rIns="0" tIns="0" bIns="0">
+          <a:bodyPr wrap="square" lIns="0" tIns="0" rIns="0" bIns="0" anchor="t">
             <a:spAutoFit/>
           </a:bodyPr>
           <a:lstStyle/>
@@ -14073,6 +13986,7 @@
           <a:lstStyle/>
           <a:p>
             <a:pPr algn="ctr"/>
+            <a:endParaRPr/>
           </a:p>
         </p:txBody>
       </p:sp>
@@ -14093,7 +14007,7 @@
           <a:noFill/>
         </p:spPr>
         <p:txBody>
-          <a:bodyPr wrap="square" anchor="t" lIns="0" rIns="0" tIns="0" bIns="0">
+          <a:bodyPr wrap="square" lIns="0" tIns="0" rIns="0" bIns="0" anchor="t">
             <a:spAutoFit/>
           </a:bodyPr>
           <a:lstStyle/>
@@ -14173,6 +14087,7 @@
           <a:lstStyle/>
           <a:p>
             <a:pPr algn="ctr"/>
+            <a:endParaRPr/>
           </a:p>
         </p:txBody>
       </p:sp>
@@ -14193,7 +14108,7 @@
           <a:noFill/>
         </p:spPr>
         <p:txBody>
-          <a:bodyPr wrap="square" anchor="t" lIns="0" rIns="0" tIns="0" bIns="0">
+          <a:bodyPr wrap="square" lIns="0" tIns="0" rIns="0" bIns="0" anchor="t">
             <a:spAutoFit/>
           </a:bodyPr>
           <a:lstStyle/>
@@ -14287,6 +14202,7 @@
           <a:lstStyle/>
           <a:p>
             <a:pPr algn="ctr"/>
+            <a:endParaRPr/>
           </a:p>
         </p:txBody>
       </p:sp>
@@ -14307,7 +14223,7 @@
           <a:noFill/>
         </p:spPr>
         <p:txBody>
-          <a:bodyPr wrap="square" anchor="t" lIns="0" rIns="0" tIns="0" bIns="0">
+          <a:bodyPr wrap="square" lIns="0" tIns="0" rIns="0" bIns="0" anchor="t">
             <a:spAutoFit/>
           </a:bodyPr>
           <a:lstStyle/>
@@ -14346,7 +14262,7 @@
           <a:noFill/>
         </p:spPr>
         <p:txBody>
-          <a:bodyPr wrap="square" anchor="t" lIns="0" rIns="0" tIns="0" bIns="0">
+          <a:bodyPr wrap="square" lIns="0" tIns="0" rIns="0" bIns="0" anchor="t">
             <a:spAutoFit/>
           </a:bodyPr>
           <a:lstStyle/>
@@ -14393,7 +14309,7 @@
 </file>
 
 <file path=ppt/slides/slide5.xml><?xml version="1.0" encoding="utf-8"?>
-<p:sld xmlns:a="http://schemas.openxmlformats.org/drawingml/2006/main" xmlns:p="http://schemas.openxmlformats.org/presentationml/2006/main" xmlns:r="http://schemas.openxmlformats.org/officeDocument/2006/relationships">
+<p:sld xmlns:a="http://schemas.openxmlformats.org/drawingml/2006/main" xmlns:r="http://schemas.openxmlformats.org/officeDocument/2006/relationships" xmlns:p="http://schemas.openxmlformats.org/presentationml/2006/main">
   <p:cSld>
     <p:spTree>
       <p:nvGrpSpPr>
@@ -14401,50 +14317,14 @@
         <p:cNvGrpSpPr/>
         <p:nvPr/>
       </p:nvGrpSpPr>
-      <p:grpSpPr/>
-      <p:sp>
-        <p:nvSpPr>
-          <p:cNvPr id="2" name="Rectangle 1"/>
-          <p:cNvSpPr/>
-          <p:nvPr/>
-        </p:nvSpPr>
-        <p:spPr>
-          <a:xfrm>
-            <a:off x="0" y="0"/>
-            <a:ext cx="9144000" cy="5143500"/>
-          </a:xfrm>
-          <a:prstGeom prst="rect">
-            <a:avLst/>
-          </a:prstGeom>
-          <a:solidFill>
-            <a:srgbClr val="FFFFFF"/>
-          </a:solidFill>
-          <a:ln>
-            <a:noFill/>
-          </a:ln>
-        </p:spPr>
-        <p:style>
-          <a:lnRef idx="1">
-            <a:schemeClr val="accent1"/>
-          </a:lnRef>
-          <a:fillRef idx="3">
-            <a:schemeClr val="accent1"/>
-          </a:fillRef>
-          <a:effectRef idx="2">
-            <a:schemeClr val="accent1"/>
-          </a:effectRef>
-          <a:fontRef idx="minor">
-            <a:schemeClr val="lt1"/>
-          </a:fontRef>
-        </p:style>
-        <p:txBody>
-          <a:bodyPr rtlCol="0" anchor="ctr"/>
-          <a:lstStyle/>
-          <a:p>
-            <a:pPr algn="ctr"/>
-          </a:p>
-        </p:txBody>
-      </p:sp>
+      <p:grpSpPr>
+        <a:xfrm>
+          <a:off x="0" y="0"/>
+          <a:ext cx="0" cy="0"/>
+          <a:chOff x="0" y="0"/>
+          <a:chExt cx="0" cy="0"/>
+        </a:xfrm>
+      </p:grpSpPr>
       <p:sp>
         <p:nvSpPr>
           <p:cNvPr id="3" name="TextBox 2"/>
@@ -14462,7 +14342,7 @@
           <a:noFill/>
         </p:spPr>
         <p:txBody>
-          <a:bodyPr wrap="square" anchor="t" lIns="0" rIns="0" tIns="0" bIns="0">
+          <a:bodyPr wrap="square" lIns="0" tIns="0" rIns="0" bIns="0" anchor="t">
             <a:spAutoFit/>
           </a:bodyPr>
           <a:lstStyle/>
@@ -14524,6 +14404,7 @@
           <a:lstStyle/>
           <a:p>
             <a:pPr algn="ctr"/>
+            <a:endParaRPr/>
           </a:p>
         </p:txBody>
       </p:sp>
@@ -14544,7 +14425,7 @@
           <a:noFill/>
         </p:spPr>
         <p:txBody>
-          <a:bodyPr wrap="square" anchor="t" lIns="0" rIns="0" tIns="0" bIns="0">
+          <a:bodyPr wrap="square" lIns="0" tIns="0" rIns="0" bIns="0" anchor="t">
             <a:spAutoFit/>
           </a:bodyPr>
           <a:lstStyle/>
@@ -14568,322 +14449,13 @@
       </p:sp>
       <p:sp>
         <p:nvSpPr>
-          <p:cNvPr id="6" name="Rectangle 5"/>
-          <p:cNvSpPr/>
-          <p:nvPr/>
-        </p:nvSpPr>
-        <p:spPr>
-          <a:xfrm>
-            <a:off x="566928" y="1280160"/>
-            <a:ext cx="3017520" cy="2286000"/>
-          </a:xfrm>
-          <a:prstGeom prst="rect">
-            <a:avLst/>
-          </a:prstGeom>
-          <a:solidFill>
-            <a:srgbClr val="FFFFFF"/>
-          </a:solidFill>
-          <a:ln w="25400">
-            <a:solidFill>
-              <a:srgbClr val="000000"/>
-            </a:solidFill>
-          </a:ln>
-        </p:spPr>
-        <p:style>
-          <a:lnRef idx="1">
-            <a:schemeClr val="accent1"/>
-          </a:lnRef>
-          <a:fillRef idx="3">
-            <a:schemeClr val="accent1"/>
-          </a:fillRef>
-          <a:effectRef idx="2">
-            <a:schemeClr val="accent1"/>
-          </a:effectRef>
-          <a:fontRef idx="minor">
-            <a:schemeClr val="lt1"/>
-          </a:fontRef>
-        </p:style>
-        <p:txBody>
-          <a:bodyPr rtlCol="0" anchor="ctr"/>
-          <a:lstStyle/>
-          <a:p>
-            <a:pPr algn="ctr"/>
-          </a:p>
-        </p:txBody>
-      </p:sp>
-      <p:sp>
-        <p:nvSpPr>
-          <p:cNvPr id="7" name="Rectangle 6"/>
-          <p:cNvSpPr/>
-          <p:nvPr/>
-        </p:nvSpPr>
-        <p:spPr>
-          <a:xfrm>
-            <a:off x="1140256" y="1389888"/>
-            <a:ext cx="1870862" cy="1188720"/>
-          </a:xfrm>
-          <a:prstGeom prst="rect">
-            <a:avLst/>
-          </a:prstGeom>
-          <a:solidFill>
-            <a:srgbClr val="FFFFFF"/>
-          </a:solidFill>
-          <a:ln w="19050">
-            <a:solidFill>
-              <a:srgbClr val="000000"/>
-            </a:solidFill>
-          </a:ln>
-        </p:spPr>
-        <p:style>
-          <a:lnRef idx="1">
-            <a:schemeClr val="accent1"/>
-          </a:lnRef>
-          <a:fillRef idx="3">
-            <a:schemeClr val="accent1"/>
-          </a:fillRef>
-          <a:effectRef idx="2">
-            <a:schemeClr val="accent1"/>
-          </a:effectRef>
-          <a:fontRef idx="minor">
-            <a:schemeClr val="lt1"/>
-          </a:fontRef>
-        </p:style>
-        <p:txBody>
-          <a:bodyPr rtlCol="0" anchor="ctr"/>
-          <a:lstStyle/>
-          <a:p>
-            <a:pPr algn="ctr"/>
-          </a:p>
-        </p:txBody>
-      </p:sp>
-      <p:sp>
-        <p:nvSpPr>
-          <p:cNvPr id="8" name="TextBox 7"/>
-          <p:cNvSpPr txBox="1"/>
-          <p:nvPr/>
-        </p:nvSpPr>
-        <p:spPr>
-          <a:xfrm>
-            <a:off x="1140256" y="1819656"/>
-            <a:ext cx="1870862" cy="329184"/>
-          </a:xfrm>
-          <a:prstGeom prst="rect">
-            <a:avLst/>
-          </a:prstGeom>
-          <a:noFill/>
-        </p:spPr>
-        <p:txBody>
-          <a:bodyPr wrap="square" anchor="t" lIns="0" rIns="0" tIns="0" bIns="0">
-            <a:spAutoFit/>
-          </a:bodyPr>
-          <a:lstStyle/>
-          <a:p>
-            <a:pPr algn="ctr">
-              <a:lnSpc>
-                <a:spcPct val="100000"/>
-              </a:lnSpc>
-            </a:pPr>
-            <a:r>
-              <a:rPr sz="1300" b="1">
-                <a:solidFill>
-                  <a:srgbClr val="000000"/>
-                </a:solidFill>
-                <a:latin typeface="Source Code Pro"/>
-              </a:rPr>
-              <a:t>WIO</a:t>
-            </a:r>
-          </a:p>
-        </p:txBody>
-      </p:sp>
-      <p:sp>
-        <p:nvSpPr>
-          <p:cNvPr id="9" name="Oval 8"/>
-          <p:cNvSpPr/>
-          <p:nvPr/>
-        </p:nvSpPr>
-        <p:spPr>
-          <a:xfrm>
-            <a:off x="822960" y="3255264"/>
-            <a:ext cx="146304" cy="146304"/>
-          </a:xfrm>
-          <a:prstGeom prst="ellipse">
-            <a:avLst/>
-          </a:prstGeom>
-          <a:solidFill>
-            <a:srgbClr val="F3D230"/>
-          </a:solidFill>
-          <a:ln w="12700">
-            <a:solidFill>
-              <a:srgbClr val="000000"/>
-            </a:solidFill>
-          </a:ln>
-        </p:spPr>
-        <p:style>
-          <a:lnRef idx="1">
-            <a:schemeClr val="accent1"/>
-          </a:lnRef>
-          <a:fillRef idx="3">
-            <a:schemeClr val="accent1"/>
-          </a:fillRef>
-          <a:effectRef idx="2">
-            <a:schemeClr val="accent1"/>
-          </a:effectRef>
-          <a:fontRef idx="minor">
-            <a:schemeClr val="lt1"/>
-          </a:fontRef>
-        </p:style>
-        <p:txBody>
-          <a:bodyPr rtlCol="0" anchor="ctr"/>
-          <a:lstStyle/>
-          <a:p>
-            <a:pPr algn="ctr"/>
-          </a:p>
-        </p:txBody>
-      </p:sp>
-      <p:sp>
-        <p:nvSpPr>
-          <p:cNvPr id="10" name="Oval 9"/>
-          <p:cNvSpPr/>
-          <p:nvPr/>
-        </p:nvSpPr>
-        <p:spPr>
-          <a:xfrm>
-            <a:off x="1207008" y="3255264"/>
-            <a:ext cx="146304" cy="146304"/>
-          </a:xfrm>
-          <a:prstGeom prst="ellipse">
-            <a:avLst/>
-          </a:prstGeom>
-          <a:solidFill>
-            <a:srgbClr val="F3D230"/>
-          </a:solidFill>
-          <a:ln w="12700">
-            <a:solidFill>
-              <a:srgbClr val="000000"/>
-            </a:solidFill>
-          </a:ln>
-        </p:spPr>
-        <p:style>
-          <a:lnRef idx="1">
-            <a:schemeClr val="accent1"/>
-          </a:lnRef>
-          <a:fillRef idx="3">
-            <a:schemeClr val="accent1"/>
-          </a:fillRef>
-          <a:effectRef idx="2">
-            <a:schemeClr val="accent1"/>
-          </a:effectRef>
-          <a:fontRef idx="minor">
-            <a:schemeClr val="lt1"/>
-          </a:fontRef>
-        </p:style>
-        <p:txBody>
-          <a:bodyPr rtlCol="0" anchor="ctr"/>
-          <a:lstStyle/>
-          <a:p>
-            <a:pPr algn="ctr"/>
-          </a:p>
-        </p:txBody>
-      </p:sp>
-      <p:sp>
-        <p:nvSpPr>
-          <p:cNvPr id="11" name="Oval 10"/>
-          <p:cNvSpPr/>
-          <p:nvPr/>
-        </p:nvSpPr>
-        <p:spPr>
-          <a:xfrm>
-            <a:off x="1591056" y="3255264"/>
-            <a:ext cx="146304" cy="146304"/>
-          </a:xfrm>
-          <a:prstGeom prst="ellipse">
-            <a:avLst/>
-          </a:prstGeom>
-          <a:solidFill>
-            <a:srgbClr val="F3D230"/>
-          </a:solidFill>
-          <a:ln w="12700">
-            <a:solidFill>
-              <a:srgbClr val="000000"/>
-            </a:solidFill>
-          </a:ln>
-        </p:spPr>
-        <p:style>
-          <a:lnRef idx="1">
-            <a:schemeClr val="accent1"/>
-          </a:lnRef>
-          <a:fillRef idx="3">
-            <a:schemeClr val="accent1"/>
-          </a:fillRef>
-          <a:effectRef idx="2">
-            <a:schemeClr val="accent1"/>
-          </a:effectRef>
-          <a:fontRef idx="minor">
-            <a:schemeClr val="lt1"/>
-          </a:fontRef>
-        </p:style>
-        <p:txBody>
-          <a:bodyPr rtlCol="0" anchor="ctr"/>
-          <a:lstStyle/>
-          <a:p>
-            <a:pPr algn="ctr"/>
-          </a:p>
-        </p:txBody>
-      </p:sp>
-      <p:sp>
-        <p:nvSpPr>
-          <p:cNvPr id="12" name="Oval 11"/>
-          <p:cNvSpPr/>
-          <p:nvPr/>
-        </p:nvSpPr>
-        <p:spPr>
-          <a:xfrm>
-            <a:off x="3127248" y="3191256"/>
-            <a:ext cx="237744" cy="237744"/>
-          </a:xfrm>
-          <a:prstGeom prst="ellipse">
-            <a:avLst/>
-          </a:prstGeom>
-          <a:solidFill>
-            <a:srgbClr val="FFFFFF"/>
-          </a:solidFill>
-          <a:ln w="12700">
-            <a:solidFill>
-              <a:srgbClr val="000000"/>
-            </a:solidFill>
-          </a:ln>
-        </p:spPr>
-        <p:style>
-          <a:lnRef idx="1">
-            <a:schemeClr val="accent1"/>
-          </a:lnRef>
-          <a:fillRef idx="3">
-            <a:schemeClr val="accent1"/>
-          </a:fillRef>
-          <a:effectRef idx="2">
-            <a:schemeClr val="accent1"/>
-          </a:effectRef>
-          <a:fontRef idx="minor">
-            <a:schemeClr val="lt1"/>
-          </a:fontRef>
-        </p:style>
-        <p:txBody>
-          <a:bodyPr rtlCol="0" anchor="ctr"/>
-          <a:lstStyle/>
-          <a:p>
-            <a:pPr algn="ctr"/>
-          </a:p>
-        </p:txBody>
-      </p:sp>
-      <p:sp>
-        <p:nvSpPr>
           <p:cNvPr id="13" name="Oval 12"/>
           <p:cNvSpPr/>
           <p:nvPr/>
         </p:nvSpPr>
         <p:spPr>
           <a:xfrm>
-            <a:off x="3840480" y="1325880"/>
+            <a:off x="5566538" y="883248"/>
             <a:ext cx="100584" cy="100584"/>
           </a:xfrm>
           <a:prstGeom prst="ellipse">
@@ -14915,6 +14487,7 @@
           <a:lstStyle/>
           <a:p>
             <a:pPr algn="ctr"/>
+            <a:endParaRPr/>
           </a:p>
         </p:txBody>
       </p:sp>
@@ -14926,7 +14499,7 @@
         </p:nvSpPr>
         <p:spPr>
           <a:xfrm>
-            <a:off x="3986784" y="1234440"/>
+            <a:off x="5712842" y="791808"/>
             <a:ext cx="4608576" cy="548640"/>
           </a:xfrm>
           <a:prstGeom prst="rect">
@@ -14935,7 +14508,7 @@
           <a:noFill/>
         </p:spPr>
         <p:txBody>
-          <a:bodyPr wrap="square" anchor="t" lIns="0" rIns="0" tIns="0" bIns="0">
+          <a:bodyPr wrap="square" lIns="0" tIns="0" rIns="0" bIns="0" anchor="t">
             <a:spAutoFit/>
           </a:bodyPr>
           <a:lstStyle/>
@@ -14965,7 +14538,7 @@
         </p:nvSpPr>
         <p:spPr>
           <a:xfrm>
-            <a:off x="3986784" y="1417320"/>
+            <a:off x="5712842" y="974688"/>
             <a:ext cx="4608576" cy="182880"/>
           </a:xfrm>
           <a:prstGeom prst="rect">
@@ -14974,7 +14547,7 @@
           <a:noFill/>
         </p:spPr>
         <p:txBody>
-          <a:bodyPr wrap="square" anchor="t" lIns="0" rIns="0" tIns="0" bIns="0">
+          <a:bodyPr wrap="square" lIns="0" tIns="0" rIns="0" bIns="0" anchor="t">
             <a:spAutoFit/>
           </a:bodyPr>
           <a:lstStyle/>
@@ -14985,7 +14558,7 @@
               </a:lnSpc>
             </a:pPr>
             <a:r>
-              <a:rPr sz="850" b="0">
+              <a:rPr sz="850" b="0" dirty="0">
                 <a:solidFill>
                   <a:srgbClr val="000000"/>
                 </a:solidFill>
@@ -15004,7 +14577,7 @@
         </p:nvSpPr>
         <p:spPr>
           <a:xfrm>
-            <a:off x="3840480" y="1709928"/>
+            <a:off x="5566538" y="1267296"/>
             <a:ext cx="100584" cy="100584"/>
           </a:xfrm>
           <a:prstGeom prst="ellipse">
@@ -15036,6 +14609,7 @@
           <a:lstStyle/>
           <a:p>
             <a:pPr algn="ctr"/>
+            <a:endParaRPr/>
           </a:p>
         </p:txBody>
       </p:sp>
@@ -15047,7 +14621,7 @@
         </p:nvSpPr>
         <p:spPr>
           <a:xfrm>
-            <a:off x="3986784" y="1618488"/>
+            <a:off x="5712842" y="1175856"/>
             <a:ext cx="4608576" cy="548640"/>
           </a:xfrm>
           <a:prstGeom prst="rect">
@@ -15056,7 +14630,7 @@
           <a:noFill/>
         </p:spPr>
         <p:txBody>
-          <a:bodyPr wrap="square" anchor="t" lIns="0" rIns="0" tIns="0" bIns="0">
+          <a:bodyPr wrap="square" lIns="0" tIns="0" rIns="0" bIns="0" anchor="t">
             <a:spAutoFit/>
           </a:bodyPr>
           <a:lstStyle/>
@@ -15086,7 +14660,7 @@
         </p:nvSpPr>
         <p:spPr>
           <a:xfrm>
-            <a:off x="3986784" y="1801368"/>
+            <a:off x="5712842" y="1358736"/>
             <a:ext cx="4608576" cy="182880"/>
           </a:xfrm>
           <a:prstGeom prst="rect">
@@ -15095,7 +14669,7 @@
           <a:noFill/>
         </p:spPr>
         <p:txBody>
-          <a:bodyPr wrap="square" anchor="t" lIns="0" rIns="0" tIns="0" bIns="0">
+          <a:bodyPr wrap="square" lIns="0" tIns="0" rIns="0" bIns="0" anchor="t">
             <a:spAutoFit/>
           </a:bodyPr>
           <a:lstStyle/>
@@ -15125,7 +14699,7 @@
         </p:nvSpPr>
         <p:spPr>
           <a:xfrm>
-            <a:off x="3840480" y="2093976"/>
+            <a:off x="5566538" y="1651344"/>
             <a:ext cx="100584" cy="100584"/>
           </a:xfrm>
           <a:prstGeom prst="ellipse">
@@ -15157,6 +14731,7 @@
           <a:lstStyle/>
           <a:p>
             <a:pPr algn="ctr"/>
+            <a:endParaRPr/>
           </a:p>
         </p:txBody>
       </p:sp>
@@ -15168,7 +14743,7 @@
         </p:nvSpPr>
         <p:spPr>
           <a:xfrm>
-            <a:off x="3986784" y="2002536"/>
+            <a:off x="5712842" y="1559904"/>
             <a:ext cx="4608576" cy="548640"/>
           </a:xfrm>
           <a:prstGeom prst="rect">
@@ -15177,7 +14752,7 @@
           <a:noFill/>
         </p:spPr>
         <p:txBody>
-          <a:bodyPr wrap="square" anchor="t" lIns="0" rIns="0" tIns="0" bIns="0">
+          <a:bodyPr wrap="square" lIns="0" tIns="0" rIns="0" bIns="0" anchor="t">
             <a:spAutoFit/>
           </a:bodyPr>
           <a:lstStyle/>
@@ -15207,7 +14782,7 @@
         </p:nvSpPr>
         <p:spPr>
           <a:xfrm>
-            <a:off x="3986784" y="2185416"/>
+            <a:off x="5712842" y="1742784"/>
             <a:ext cx="4608576" cy="182880"/>
           </a:xfrm>
           <a:prstGeom prst="rect">
@@ -15216,7 +14791,7 @@
           <a:noFill/>
         </p:spPr>
         <p:txBody>
-          <a:bodyPr wrap="square" anchor="t" lIns="0" rIns="0" tIns="0" bIns="0">
+          <a:bodyPr wrap="square" lIns="0" tIns="0" rIns="0" bIns="0" anchor="t">
             <a:spAutoFit/>
           </a:bodyPr>
           <a:lstStyle/>
@@ -15246,7 +14821,7 @@
         </p:nvSpPr>
         <p:spPr>
           <a:xfrm>
-            <a:off x="3840480" y="2478024"/>
+            <a:off x="5566538" y="2035392"/>
             <a:ext cx="100584" cy="100584"/>
           </a:xfrm>
           <a:prstGeom prst="ellipse">
@@ -15278,6 +14853,7 @@
           <a:lstStyle/>
           <a:p>
             <a:pPr algn="ctr"/>
+            <a:endParaRPr/>
           </a:p>
         </p:txBody>
       </p:sp>
@@ -15289,7 +14865,7 @@
         </p:nvSpPr>
         <p:spPr>
           <a:xfrm>
-            <a:off x="3986784" y="2386584"/>
+            <a:off x="5712842" y="1943952"/>
             <a:ext cx="4608576" cy="548640"/>
           </a:xfrm>
           <a:prstGeom prst="rect">
@@ -15298,7 +14874,7 @@
           <a:noFill/>
         </p:spPr>
         <p:txBody>
-          <a:bodyPr wrap="square" anchor="t" lIns="0" rIns="0" tIns="0" bIns="0">
+          <a:bodyPr wrap="square" lIns="0" tIns="0" rIns="0" bIns="0" anchor="t">
             <a:spAutoFit/>
           </a:bodyPr>
           <a:lstStyle/>
@@ -15328,7 +14904,7 @@
         </p:nvSpPr>
         <p:spPr>
           <a:xfrm>
-            <a:off x="3986784" y="2569464"/>
+            <a:off x="5712842" y="2126832"/>
             <a:ext cx="4608576" cy="182880"/>
           </a:xfrm>
           <a:prstGeom prst="rect">
@@ -15337,7 +14913,7 @@
           <a:noFill/>
         </p:spPr>
         <p:txBody>
-          <a:bodyPr wrap="square" anchor="t" lIns="0" rIns="0" tIns="0" bIns="0">
+          <a:bodyPr wrap="square" lIns="0" tIns="0" rIns="0" bIns="0" anchor="t">
             <a:spAutoFit/>
           </a:bodyPr>
           <a:lstStyle/>
@@ -15367,7 +14943,7 @@
         </p:nvSpPr>
         <p:spPr>
           <a:xfrm>
-            <a:off x="3840480" y="2862072"/>
+            <a:off x="5566538" y="2419440"/>
             <a:ext cx="100584" cy="100584"/>
           </a:xfrm>
           <a:prstGeom prst="ellipse">
@@ -15399,6 +14975,7 @@
           <a:lstStyle/>
           <a:p>
             <a:pPr algn="ctr"/>
+            <a:endParaRPr/>
           </a:p>
         </p:txBody>
       </p:sp>
@@ -15410,7 +14987,7 @@
         </p:nvSpPr>
         <p:spPr>
           <a:xfrm>
-            <a:off x="3986784" y="2770632"/>
+            <a:off x="5712842" y="2328000"/>
             <a:ext cx="4608576" cy="548640"/>
           </a:xfrm>
           <a:prstGeom prst="rect">
@@ -15419,7 +14996,7 @@
           <a:noFill/>
         </p:spPr>
         <p:txBody>
-          <a:bodyPr wrap="square" anchor="t" lIns="0" rIns="0" tIns="0" bIns="0">
+          <a:bodyPr wrap="square" lIns="0" tIns="0" rIns="0" bIns="0" anchor="t">
             <a:spAutoFit/>
           </a:bodyPr>
           <a:lstStyle/>
@@ -15430,7 +15007,7 @@
               </a:lnSpc>
             </a:pPr>
             <a:r>
-              <a:rPr sz="1100" b="1">
+              <a:rPr sz="1100" b="1" dirty="0">
                 <a:solidFill>
                   <a:srgbClr val="000000"/>
                 </a:solidFill>
@@ -15449,7 +15026,7 @@
         </p:nvSpPr>
         <p:spPr>
           <a:xfrm>
-            <a:off x="3986784" y="2953512"/>
+            <a:off x="5712842" y="2510880"/>
             <a:ext cx="4608576" cy="182880"/>
           </a:xfrm>
           <a:prstGeom prst="rect">
@@ -15458,7 +15035,7 @@
           <a:noFill/>
         </p:spPr>
         <p:txBody>
-          <a:bodyPr wrap="square" anchor="t" lIns="0" rIns="0" tIns="0" bIns="0">
+          <a:bodyPr wrap="square" lIns="0" tIns="0" rIns="0" bIns="0" anchor="t">
             <a:spAutoFit/>
           </a:bodyPr>
           <a:lstStyle/>
@@ -15488,7 +15065,7 @@
         </p:nvSpPr>
         <p:spPr>
           <a:xfrm>
-            <a:off x="3840480" y="3246120"/>
+            <a:off x="5566538" y="2803488"/>
             <a:ext cx="100584" cy="100584"/>
           </a:xfrm>
           <a:prstGeom prst="ellipse">
@@ -15520,6 +15097,7 @@
           <a:lstStyle/>
           <a:p>
             <a:pPr algn="ctr"/>
+            <a:endParaRPr/>
           </a:p>
         </p:txBody>
       </p:sp>
@@ -15531,7 +15109,7 @@
         </p:nvSpPr>
         <p:spPr>
           <a:xfrm>
-            <a:off x="3986784" y="3154679"/>
+            <a:off x="5712842" y="2712047"/>
             <a:ext cx="4608576" cy="548640"/>
           </a:xfrm>
           <a:prstGeom prst="rect">
@@ -15540,7 +15118,7 @@
           <a:noFill/>
         </p:spPr>
         <p:txBody>
-          <a:bodyPr wrap="square" anchor="t" lIns="0" rIns="0" tIns="0" bIns="0">
+          <a:bodyPr wrap="square" lIns="0" tIns="0" rIns="0" bIns="0" anchor="t">
             <a:spAutoFit/>
           </a:bodyPr>
           <a:lstStyle/>
@@ -15570,7 +15148,7 @@
         </p:nvSpPr>
         <p:spPr>
           <a:xfrm>
-            <a:off x="3986784" y="3337560"/>
+            <a:off x="5712842" y="2894928"/>
             <a:ext cx="4608576" cy="182880"/>
           </a:xfrm>
           <a:prstGeom prst="rect">
@@ -15579,7 +15157,7 @@
           <a:noFill/>
         </p:spPr>
         <p:txBody>
-          <a:bodyPr wrap="square" anchor="t" lIns="0" rIns="0" tIns="0" bIns="0">
+          <a:bodyPr wrap="square" lIns="0" tIns="0" rIns="0" bIns="0" anchor="t">
             <a:spAutoFit/>
           </a:bodyPr>
           <a:lstStyle/>
@@ -15609,7 +15187,7 @@
         </p:nvSpPr>
         <p:spPr>
           <a:xfrm>
-            <a:off x="3840480" y="3630168"/>
+            <a:off x="5566538" y="3187536"/>
             <a:ext cx="100584" cy="100584"/>
           </a:xfrm>
           <a:prstGeom prst="ellipse">
@@ -15641,6 +15219,7 @@
           <a:lstStyle/>
           <a:p>
             <a:pPr algn="ctr"/>
+            <a:endParaRPr/>
           </a:p>
         </p:txBody>
       </p:sp>
@@ -15652,7 +15231,7 @@
         </p:nvSpPr>
         <p:spPr>
           <a:xfrm>
-            <a:off x="3986784" y="3538727"/>
+            <a:off x="5712842" y="3096095"/>
             <a:ext cx="4608576" cy="548640"/>
           </a:xfrm>
           <a:prstGeom prst="rect">
@@ -15661,7 +15240,7 @@
           <a:noFill/>
         </p:spPr>
         <p:txBody>
-          <a:bodyPr wrap="square" anchor="t" lIns="0" rIns="0" tIns="0" bIns="0">
+          <a:bodyPr wrap="square" lIns="0" tIns="0" rIns="0" bIns="0" anchor="t">
             <a:spAutoFit/>
           </a:bodyPr>
           <a:lstStyle/>
@@ -15691,7 +15270,7 @@
         </p:nvSpPr>
         <p:spPr>
           <a:xfrm>
-            <a:off x="3986784" y="3721607"/>
+            <a:off x="5712842" y="3278975"/>
             <a:ext cx="4608576" cy="182880"/>
           </a:xfrm>
           <a:prstGeom prst="rect">
@@ -15700,7 +15279,7 @@
           <a:noFill/>
         </p:spPr>
         <p:txBody>
-          <a:bodyPr wrap="square" anchor="t" lIns="0" rIns="0" tIns="0" bIns="0">
+          <a:bodyPr wrap="square" lIns="0" tIns="0" rIns="0" bIns="0" anchor="t">
             <a:spAutoFit/>
           </a:bodyPr>
           <a:lstStyle/>
@@ -15730,7 +15309,7 @@
         </p:nvSpPr>
         <p:spPr>
           <a:xfrm>
-            <a:off x="3840480" y="4014215"/>
+            <a:off x="5566538" y="3571583"/>
             <a:ext cx="100584" cy="100584"/>
           </a:xfrm>
           <a:prstGeom prst="ellipse">
@@ -15762,6 +15341,7 @@
           <a:lstStyle/>
           <a:p>
             <a:pPr algn="ctr"/>
+            <a:endParaRPr/>
           </a:p>
         </p:txBody>
       </p:sp>
@@ -15773,7 +15353,7 @@
         </p:nvSpPr>
         <p:spPr>
           <a:xfrm>
-            <a:off x="3986784" y="3922776"/>
+            <a:off x="5712842" y="3480144"/>
             <a:ext cx="4608576" cy="548640"/>
           </a:xfrm>
           <a:prstGeom prst="rect">
@@ -15782,7 +15362,7 @@
           <a:noFill/>
         </p:spPr>
         <p:txBody>
-          <a:bodyPr wrap="square" anchor="t" lIns="0" rIns="0" tIns="0" bIns="0">
+          <a:bodyPr wrap="square" lIns="0" tIns="0" rIns="0" bIns="0" anchor="t">
             <a:spAutoFit/>
           </a:bodyPr>
           <a:lstStyle/>
@@ -15812,7 +15392,7 @@
         </p:nvSpPr>
         <p:spPr>
           <a:xfrm>
-            <a:off x="3986784" y="4105656"/>
+            <a:off x="5712842" y="3663024"/>
             <a:ext cx="4608576" cy="182880"/>
           </a:xfrm>
           <a:prstGeom prst="rect">
@@ -15821,7 +15401,7 @@
           <a:noFill/>
         </p:spPr>
         <p:txBody>
-          <a:bodyPr wrap="square" anchor="t" lIns="0" rIns="0" tIns="0" bIns="0">
+          <a:bodyPr wrap="square" lIns="0" tIns="0" rIns="0" bIns="0" anchor="t">
             <a:spAutoFit/>
           </a:bodyPr>
           <a:lstStyle/>
@@ -15851,7 +15431,7 @@
         </p:nvSpPr>
         <p:spPr>
           <a:xfrm>
-            <a:off x="3840480" y="4398264"/>
+            <a:off x="5566538" y="3944784"/>
             <a:ext cx="100584" cy="100584"/>
           </a:xfrm>
           <a:prstGeom prst="ellipse">
@@ -15883,6 +15463,7 @@
           <a:lstStyle/>
           <a:p>
             <a:pPr algn="ctr"/>
+            <a:endParaRPr/>
           </a:p>
         </p:txBody>
       </p:sp>
@@ -15894,7 +15475,7 @@
         </p:nvSpPr>
         <p:spPr>
           <a:xfrm>
-            <a:off x="3986784" y="4306824"/>
+            <a:off x="5712842" y="3863701"/>
             <a:ext cx="4608576" cy="548640"/>
           </a:xfrm>
           <a:prstGeom prst="rect">
@@ -15903,7 +15484,7 @@
           <a:noFill/>
         </p:spPr>
         <p:txBody>
-          <a:bodyPr wrap="square" anchor="t" lIns="0" rIns="0" tIns="0" bIns="0">
+          <a:bodyPr wrap="square" lIns="0" tIns="0" rIns="0" bIns="0" anchor="t">
             <a:spAutoFit/>
           </a:bodyPr>
           <a:lstStyle/>
@@ -15914,7 +15495,7 @@
               </a:lnSpc>
             </a:pPr>
             <a:r>
-              <a:rPr sz="1100" b="1">
+              <a:rPr sz="1100" b="1" dirty="0">
                 <a:solidFill>
                   <a:srgbClr val="000000"/>
                 </a:solidFill>
@@ -15933,7 +15514,7 @@
         </p:nvSpPr>
         <p:spPr>
           <a:xfrm>
-            <a:off x="3986784" y="4489704"/>
+            <a:off x="5712842" y="4036224"/>
             <a:ext cx="4608576" cy="182880"/>
           </a:xfrm>
           <a:prstGeom prst="rect">
@@ -15942,7 +15523,7 @@
           <a:noFill/>
         </p:spPr>
         <p:txBody>
-          <a:bodyPr wrap="square" anchor="t" lIns="0" rIns="0" tIns="0" bIns="0">
+          <a:bodyPr wrap="square" lIns="0" tIns="0" rIns="0" bIns="0" anchor="t">
             <a:spAutoFit/>
           </a:bodyPr>
           <a:lstStyle/>
@@ -15966,91 +15547,13 @@
       </p:sp>
       <p:sp>
         <p:nvSpPr>
-          <p:cNvPr id="40" name="TextBox 39"/>
-          <p:cNvSpPr txBox="1"/>
-          <p:nvPr/>
-        </p:nvSpPr>
-        <p:spPr>
-          <a:xfrm>
-            <a:off x="566928" y="3977639"/>
-            <a:ext cx="3017520" cy="274320"/>
-          </a:xfrm>
-          <a:prstGeom prst="rect">
-            <a:avLst/>
-          </a:prstGeom>
-          <a:noFill/>
-        </p:spPr>
-        <p:txBody>
-          <a:bodyPr wrap="square" anchor="t" lIns="0" rIns="0" tIns="0" bIns="0">
-            <a:spAutoFit/>
-          </a:bodyPr>
-          <a:lstStyle/>
-          <a:p>
-            <a:pPr algn="ctr">
-              <a:lnSpc>
-                <a:spcPct val="100000"/>
-              </a:lnSpc>
-            </a:pPr>
-            <a:r>
-              <a:rPr sz="1000" b="0">
-                <a:solidFill>
-                  <a:srgbClr val="000000"/>
-                </a:solidFill>
-                <a:latin typeface="Source Han Sans SC"/>
-              </a:rPr>
-              <a:t>(line-art stand-in for the</a:t>
-            </a:r>
-          </a:p>
-        </p:txBody>
-      </p:sp>
-      <p:sp>
-        <p:nvSpPr>
-          <p:cNvPr id="41" name="TextBox 40"/>
-          <p:cNvSpPr txBox="1"/>
-          <p:nvPr/>
-        </p:nvSpPr>
-        <p:spPr>
-          <a:xfrm>
-            <a:off x="566928" y="4187952"/>
-            <a:ext cx="3017520" cy="274320"/>
-          </a:xfrm>
-          <a:prstGeom prst="rect">
-            <a:avLst/>
-          </a:prstGeom>
-          <a:noFill/>
-        </p:spPr>
-        <p:txBody>
-          <a:bodyPr wrap="square" anchor="t" lIns="0" rIns="0" tIns="0" bIns="0">
-            <a:spAutoFit/>
-          </a:bodyPr>
-          <a:lstStyle/>
-          <a:p>
-            <a:pPr algn="ctr">
-              <a:lnSpc>
-                <a:spcPct val="100000"/>
-              </a:lnSpc>
-            </a:pPr>
-            <a:r>
-              <a:rPr sz="1000" b="0">
-                <a:solidFill>
-                  <a:srgbClr val="000000"/>
-                </a:solidFill>
-                <a:latin typeface="Source Han Sans SC"/>
-              </a:rPr>
-              <a:t>annotated board photo)</a:t>
-            </a:r>
-          </a:p>
-        </p:txBody>
-      </p:sp>
-      <p:sp>
-        <p:nvSpPr>
           <p:cNvPr id="42" name="Rectangle 41"/>
           <p:cNvSpPr/>
           <p:nvPr/>
         </p:nvSpPr>
         <p:spPr>
           <a:xfrm>
-            <a:off x="3840480" y="4572000"/>
+            <a:off x="5445380" y="4214150"/>
             <a:ext cx="54864" cy="475488"/>
           </a:xfrm>
           <a:prstGeom prst="rect">
@@ -16082,6 +15585,7 @@
           <a:lstStyle/>
           <a:p>
             <a:pPr algn="ctr"/>
+            <a:endParaRPr/>
           </a:p>
         </p:txBody>
       </p:sp>
@@ -16093,8 +15597,8 @@
         </p:nvSpPr>
         <p:spPr>
           <a:xfrm>
-            <a:off x="4041648" y="4590288"/>
-            <a:ext cx="4553712" cy="438912"/>
+            <a:off x="5589398" y="4262932"/>
+            <a:ext cx="2951098" cy="377924"/>
           </a:xfrm>
           <a:prstGeom prst="rect">
             <a:avLst/>
@@ -16102,7 +15606,7 @@
           <a:noFill/>
         </p:spPr>
         <p:txBody>
-          <a:bodyPr wrap="square" anchor="t" lIns="0" rIns="0" tIns="0" bIns="0">
+          <a:bodyPr wrap="square" lIns="0" tIns="0" rIns="0" bIns="0" anchor="t">
             <a:spAutoFit/>
           </a:bodyPr>
           <a:lstStyle/>
@@ -16113,7 +15617,7 @@
               </a:lnSpc>
             </a:pPr>
             <a:r>
-              <a:rPr sz="1100" b="0">
+              <a:rPr sz="1100" b="0" dirty="0">
                 <a:solidFill>
                   <a:srgbClr val="000000"/>
                 </a:solidFill>
@@ -16121,6 +15625,1194 @@
               </a:rPr>
               <a:t>Every time I name a part, find it on your board with your finger — and touch it.</a:t>
             </a:r>
+          </a:p>
+        </p:txBody>
+      </p:sp>
+      <p:pic>
+        <p:nvPicPr>
+          <p:cNvPr id="71" name="Picture 11">
+            <a:extLst>
+              <a:ext uri="{FF2B5EF4-FFF2-40B4-BE49-F238E27FC236}">
+                <a16:creationId xmlns:a16="http://schemas.microsoft.com/office/drawing/2014/main" id="{6173E07C-D0C9-A62E-6B8D-33C8E43EF811}"/>
+              </a:ext>
+            </a:extLst>
+          </p:cNvPr>
+          <p:cNvPicPr>
+            <a:picLocks noChangeAspect="1"/>
+          </p:cNvPicPr>
+          <p:nvPr/>
+        </p:nvPicPr>
+        <p:blipFill>
+          <a:blip r:embed="rId3"/>
+          <a:srcRect/>
+          <a:stretch>
+            <a:fillRect/>
+          </a:stretch>
+        </p:blipFill>
+        <p:spPr>
+          <a:xfrm rot="5400000">
+            <a:off x="771056" y="1364957"/>
+            <a:ext cx="2167109" cy="1253689"/>
+          </a:xfrm>
+          <a:prstGeom prst="rect">
+            <a:avLst/>
+          </a:prstGeom>
+          <a:ln w="12700">
+            <a:noFill/>
+            <a:prstDash val="solid"/>
+          </a:ln>
+        </p:spPr>
+      </p:pic>
+      <p:pic>
+        <p:nvPicPr>
+          <p:cNvPr id="73" name="Picture 9">
+            <a:extLst>
+              <a:ext uri="{FF2B5EF4-FFF2-40B4-BE49-F238E27FC236}">
+                <a16:creationId xmlns:a16="http://schemas.microsoft.com/office/drawing/2014/main" id="{44C4C9C7-49B1-88CB-5AAB-A70691C577E3}"/>
+              </a:ext>
+            </a:extLst>
+          </p:cNvPr>
+          <p:cNvPicPr>
+            <a:picLocks noChangeAspect="1"/>
+          </p:cNvPicPr>
+          <p:nvPr/>
+        </p:nvPicPr>
+        <p:blipFill>
+          <a:blip r:embed="rId4"/>
+          <a:srcRect/>
+          <a:stretch>
+            <a:fillRect/>
+          </a:stretch>
+        </p:blipFill>
+        <p:spPr>
+          <a:xfrm>
+            <a:off x="2235134" y="3073886"/>
+            <a:ext cx="2746024" cy="1002051"/>
+          </a:xfrm>
+          <a:prstGeom prst="rect">
+            <a:avLst/>
+          </a:prstGeom>
+          <a:ln w="12700">
+            <a:noFill/>
+            <a:prstDash val="solid"/>
+          </a:ln>
+        </p:spPr>
+      </p:pic>
+      <p:grpSp>
+        <p:nvGrpSpPr>
+          <p:cNvPr id="89" name="Group 88">
+            <a:extLst>
+              <a:ext uri="{FF2B5EF4-FFF2-40B4-BE49-F238E27FC236}">
+                <a16:creationId xmlns:a16="http://schemas.microsoft.com/office/drawing/2014/main" id="{4841CB1D-C4B5-6D4A-B522-3D08B8C1F410}"/>
+              </a:ext>
+            </a:extLst>
+          </p:cNvPr>
+          <p:cNvGrpSpPr/>
+          <p:nvPr/>
+        </p:nvGrpSpPr>
+        <p:grpSpPr>
+          <a:xfrm>
+            <a:off x="2496162" y="1100742"/>
+            <a:ext cx="2279650" cy="1811334"/>
+            <a:chOff x="2235200" y="1151033"/>
+            <a:chExt cx="2279650" cy="1869301"/>
+          </a:xfrm>
+        </p:grpSpPr>
+        <p:grpSp>
+          <p:nvGrpSpPr>
+            <p:cNvPr id="88" name="Group 87">
+              <a:extLst>
+                <a:ext uri="{FF2B5EF4-FFF2-40B4-BE49-F238E27FC236}">
+                  <a16:creationId xmlns:a16="http://schemas.microsoft.com/office/drawing/2014/main" id="{D2124140-E847-19CE-314C-3BE695173F36}"/>
+                </a:ext>
+              </a:extLst>
+            </p:cNvPr>
+            <p:cNvGrpSpPr/>
+            <p:nvPr/>
+          </p:nvGrpSpPr>
+          <p:grpSpPr>
+            <a:xfrm>
+              <a:off x="2235200" y="1151033"/>
+              <a:ext cx="2279650" cy="1869301"/>
+              <a:chOff x="2235200" y="1151033"/>
+              <a:chExt cx="2279650" cy="1869301"/>
+            </a:xfrm>
+          </p:grpSpPr>
+          <p:pic>
+            <p:nvPicPr>
+              <p:cNvPr id="69" name="Picture 2">
+                <a:extLst>
+                  <a:ext uri="{FF2B5EF4-FFF2-40B4-BE49-F238E27FC236}">
+                    <a16:creationId xmlns:a16="http://schemas.microsoft.com/office/drawing/2014/main" id="{AFAE547F-56D4-F715-D083-991E6CFB8CBC}"/>
+                  </a:ext>
+                </a:extLst>
+              </p:cNvPr>
+              <p:cNvPicPr>
+                <a:picLocks noChangeAspect="1"/>
+              </p:cNvPicPr>
+              <p:nvPr/>
+            </p:nvPicPr>
+            <p:blipFill>
+              <a:blip r:embed="rId5"/>
+              <a:srcRect l="20214" r="20003" b="39783"/>
+              <a:stretch>
+                <a:fillRect/>
+              </a:stretch>
+            </p:blipFill>
+            <p:spPr>
+              <a:xfrm>
+                <a:off x="2235200" y="1151033"/>
+                <a:ext cx="2279650" cy="1869301"/>
+              </a:xfrm>
+              <a:prstGeom prst="rect">
+                <a:avLst/>
+              </a:prstGeom>
+              <a:ln w="12700">
+                <a:noFill/>
+                <a:prstDash val="solid"/>
+              </a:ln>
+            </p:spPr>
+          </p:pic>
+          <p:sp>
+            <p:nvSpPr>
+              <p:cNvPr id="79" name="AutoShape 5">
+                <a:extLst>
+                  <a:ext uri="{FF2B5EF4-FFF2-40B4-BE49-F238E27FC236}">
+                    <a16:creationId xmlns:a16="http://schemas.microsoft.com/office/drawing/2014/main" id="{5D982CDA-14EE-3B2E-7CEA-066CE21CF911}"/>
+                  </a:ext>
+                </a:extLst>
+              </p:cNvPr>
+              <p:cNvSpPr/>
+              <p:nvPr/>
+            </p:nvSpPr>
+            <p:spPr>
+              <a:xfrm>
+                <a:off x="2372377" y="1348932"/>
+                <a:ext cx="1980547" cy="1394268"/>
+              </a:xfrm>
+              <a:prstGeom prst="roundRect">
+                <a:avLst>
+                  <a:gd name="adj" fmla="val 4205"/>
+                </a:avLst>
+              </a:prstGeom>
+              <a:solidFill>
+                <a:srgbClr val="333333">
+                  <a:alpha val="100000"/>
+                </a:srgbClr>
+              </a:solidFill>
+              <a:ln w="12700" cap="flat" cmpd="sng">
+                <a:solidFill>
+                  <a:srgbClr val="5C5C5C">
+                    <a:alpha val="100000"/>
+                  </a:srgbClr>
+                </a:solidFill>
+                <a:prstDash val="solid"/>
+                <a:miter lim="8000000"/>
+              </a:ln>
+            </p:spPr>
+            <p:txBody>
+              <a:bodyPr wrap="square" lIns="76200" tIns="38100" rIns="76200" bIns="38100" rtlCol="0" anchor="ctr">
+                <a:noAutofit/>
+              </a:bodyPr>
+              <a:lstStyle/>
+              <a:p>
+                <a:pPr marL="0" indent="0" algn="ctr">
+                  <a:lnSpc>
+                    <a:spcPct val="133333"/>
+                  </a:lnSpc>
+                  <a:defRPr/>
+                </a:pPr>
+                <a:r>
+                  <a:rPr lang="en-US" sz="1500" b="0" i="0" u="none" strike="noStrike">
+                    <a:solidFill>
+                      <a:srgbClr val="000000"/>
+                    </a:solidFill>
+                    <a:latin typeface="Arial"/>
+                    <a:ea typeface="Arial"/>
+                    <a:cs typeface="Arial"/>
+                    <a:sym typeface="Arial"/>
+                  </a:rPr>
+                  <a:t> </a:t>
+                </a:r>
+                <a:endParaRPr lang="en-US" sz="1100"/>
+              </a:p>
+            </p:txBody>
+          </p:sp>
+          <p:sp>
+            <p:nvSpPr>
+              <p:cNvPr id="81" name="AutoShape 7">
+                <a:extLst>
+                  <a:ext uri="{FF2B5EF4-FFF2-40B4-BE49-F238E27FC236}">
+                    <a16:creationId xmlns:a16="http://schemas.microsoft.com/office/drawing/2014/main" id="{5F9D0DAD-DBFD-61BA-EA56-21DF087F779C}"/>
+                  </a:ext>
+                </a:extLst>
+              </p:cNvPr>
+              <p:cNvSpPr/>
+              <p:nvPr/>
+            </p:nvSpPr>
+            <p:spPr>
+              <a:xfrm>
+                <a:off x="2712682" y="1479017"/>
+                <a:ext cx="1457550" cy="1044564"/>
+              </a:xfrm>
+              <a:prstGeom prst="rect">
+                <a:avLst/>
+              </a:prstGeom>
+              <a:solidFill>
+                <a:srgbClr val="9D9D9D">
+                  <a:alpha val="100000"/>
+                </a:srgbClr>
+              </a:solidFill>
+              <a:ln w="12700" cap="flat" cmpd="sng">
+                <a:solidFill>
+                  <a:srgbClr val="5C5C5C">
+                    <a:alpha val="100000"/>
+                  </a:srgbClr>
+                </a:solidFill>
+                <a:prstDash val="solid"/>
+                <a:miter lim="8000000"/>
+              </a:ln>
+            </p:spPr>
+            <p:txBody>
+              <a:bodyPr wrap="square" lIns="76200" tIns="38100" rIns="76200" bIns="38100" rtlCol="0" anchor="ctr">
+                <a:noAutofit/>
+              </a:bodyPr>
+              <a:lstStyle/>
+              <a:p>
+                <a:pPr marL="0" indent="0" algn="ctr">
+                  <a:lnSpc>
+                    <a:spcPct val="133333"/>
+                  </a:lnSpc>
+                  <a:defRPr/>
+                </a:pPr>
+                <a:r>
+                  <a:rPr lang="en-US" sz="1500" b="0" i="0" u="none" strike="noStrike">
+                    <a:solidFill>
+                      <a:srgbClr val="000000"/>
+                    </a:solidFill>
+                    <a:latin typeface="Arial"/>
+                    <a:ea typeface="Arial"/>
+                    <a:cs typeface="Arial"/>
+                    <a:sym typeface="Arial"/>
+                  </a:rPr>
+                  <a:t> </a:t>
+                </a:r>
+                <a:endParaRPr lang="en-US" sz="1100"/>
+              </a:p>
+            </p:txBody>
+          </p:sp>
+          <p:sp>
+            <p:nvSpPr>
+              <p:cNvPr id="83" name="AutoShape 8">
+                <a:extLst>
+                  <a:ext uri="{FF2B5EF4-FFF2-40B4-BE49-F238E27FC236}">
+                    <a16:creationId xmlns:a16="http://schemas.microsoft.com/office/drawing/2014/main" id="{050F9664-3347-5C92-15CA-EA38954E2591}"/>
+                  </a:ext>
+                </a:extLst>
+              </p:cNvPr>
+              <p:cNvSpPr/>
+              <p:nvPr/>
+            </p:nvSpPr>
+            <p:spPr>
+              <a:xfrm>
+                <a:off x="2643832" y="1726158"/>
+                <a:ext cx="1589349" cy="715530"/>
+              </a:xfrm>
+              <a:prstGeom prst="rect">
+                <a:avLst/>
+              </a:prstGeom>
+              <a:noFill/>
+              <a:ln w="12700">
+                <a:noFill/>
+                <a:prstDash val="solid"/>
+              </a:ln>
+            </p:spPr>
+            <p:txBody>
+              <a:bodyPr wrap="square" lIns="76200" tIns="38100" rIns="76200" bIns="38100" rtlCol="0" anchor="t">
+                <a:noAutofit/>
+              </a:bodyPr>
+              <a:lstStyle/>
+              <a:p>
+                <a:pPr marL="0" indent="0" algn="ctr">
+                  <a:lnSpc>
+                    <a:spcPct val="133333"/>
+                  </a:lnSpc>
+                  <a:defRPr/>
+                </a:pPr>
+                <a:r>
+                  <a:rPr lang="en-US" sz="1400" b="1" i="0" u="none" strike="noStrike" dirty="0">
+                    <a:solidFill>
+                      <a:srgbClr val="FFFFFF"/>
+                    </a:solidFill>
+                    <a:latin typeface="Calibri"/>
+                    <a:ea typeface="Calibri"/>
+                    <a:cs typeface="Calibri"/>
+                    <a:sym typeface="Calibri"/>
+                  </a:rPr>
+                  <a:t>320 x 240</a:t>
+                </a:r>
+                <a:endParaRPr lang="en-US" sz="700" dirty="0"/>
+              </a:p>
+              <a:p>
+                <a:pPr marL="0" indent="0" algn="ctr">
+                  <a:lnSpc>
+                    <a:spcPct val="133333"/>
+                  </a:lnSpc>
+                </a:pPr>
+                <a:r>
+                  <a:rPr lang="en-US" sz="1400" b="1" i="0" u="none" strike="noStrike" dirty="0">
+                    <a:solidFill>
+                      <a:srgbClr val="FFFFFF"/>
+                    </a:solidFill>
+                    <a:latin typeface="Calibri"/>
+                    <a:ea typeface="Calibri"/>
+                    <a:cs typeface="Calibri"/>
+                    <a:sym typeface="Calibri"/>
+                  </a:rPr>
+                  <a:t>Color screen</a:t>
+                </a:r>
+              </a:p>
+            </p:txBody>
+          </p:sp>
+        </p:grpSp>
+        <p:sp>
+          <p:nvSpPr>
+            <p:cNvPr id="85" name="AutoShape 6">
+              <a:extLst>
+                <a:ext uri="{FF2B5EF4-FFF2-40B4-BE49-F238E27FC236}">
+                  <a16:creationId xmlns:a16="http://schemas.microsoft.com/office/drawing/2014/main" id="{3ECB8CD2-C580-4CF9-8756-85972FD4B765}"/>
+                </a:ext>
+              </a:extLst>
+            </p:cNvPr>
+            <p:cNvSpPr/>
+            <p:nvPr/>
+          </p:nvSpPr>
+          <p:spPr>
+            <a:xfrm>
+              <a:off x="3968496" y="2594719"/>
+              <a:ext cx="331200" cy="331200"/>
+            </a:xfrm>
+            <a:prstGeom prst="ellipse">
+              <a:avLst/>
+            </a:prstGeom>
+            <a:solidFill>
+              <a:srgbClr val="3E7DCC">
+                <a:alpha val="100000"/>
+              </a:srgbClr>
+            </a:solidFill>
+            <a:ln w="12700">
+              <a:noFill/>
+              <a:prstDash val="solid"/>
+            </a:ln>
+          </p:spPr>
+          <p:txBody>
+            <a:bodyPr wrap="square" lIns="76200" tIns="38100" rIns="76200" bIns="38100" rtlCol="0" anchor="ctr">
+              <a:noAutofit/>
+            </a:bodyPr>
+            <a:lstStyle/>
+            <a:p>
+              <a:pPr marL="0" indent="0" algn="ctr">
+                <a:lnSpc>
+                  <a:spcPct val="133333"/>
+                </a:lnSpc>
+                <a:defRPr/>
+              </a:pPr>
+              <a:r>
+                <a:rPr lang="en-US" sz="1500" b="0" i="0" u="none" strike="noStrike" dirty="0">
+                  <a:solidFill>
+                    <a:srgbClr val="000000"/>
+                  </a:solidFill>
+                  <a:latin typeface="Arial"/>
+                  <a:ea typeface="Arial"/>
+                  <a:cs typeface="Arial"/>
+                  <a:sym typeface="Arial"/>
+                </a:rPr>
+                <a:t> </a:t>
+              </a:r>
+              <a:endParaRPr lang="en-US" sz="1100" dirty="0"/>
+            </a:p>
+          </p:txBody>
+        </p:sp>
+      </p:grpSp>
+      <p:sp>
+        <p:nvSpPr>
+          <p:cNvPr id="87" name="AutoShape 22">
+            <a:extLst>
+              <a:ext uri="{FF2B5EF4-FFF2-40B4-BE49-F238E27FC236}">
+                <a16:creationId xmlns:a16="http://schemas.microsoft.com/office/drawing/2014/main" id="{9D3C45BC-7378-AF54-A507-44620144D204}"/>
+              </a:ext>
+            </a:extLst>
+          </p:cNvPr>
+          <p:cNvSpPr/>
+          <p:nvPr/>
+        </p:nvSpPr>
+        <p:spPr>
+          <a:xfrm>
+            <a:off x="2330111" y="2845367"/>
+            <a:ext cx="2404725" cy="282000"/>
+          </a:xfrm>
+          <a:prstGeom prst="rect">
+            <a:avLst/>
+          </a:prstGeom>
+          <a:noFill/>
+          <a:ln w="12700">
+            <a:noFill/>
+            <a:prstDash val="solid"/>
+          </a:ln>
+        </p:spPr>
+        <p:txBody>
+          <a:bodyPr wrap="square" lIns="76200" tIns="38100" rIns="76200" bIns="38100" rtlCol="0" anchor="t">
+            <a:spAutoFit/>
+          </a:bodyPr>
+          <a:lstStyle/>
+          <a:p>
+            <a:pPr marL="0" indent="0" algn="ctr">
+              <a:lnSpc>
+                <a:spcPct val="133333"/>
+              </a:lnSpc>
+              <a:defRPr/>
+            </a:pPr>
+            <a:r>
+              <a:rPr lang="en-US" sz="1100" b="0" i="0" u="none" strike="noStrike" dirty="0">
+                <a:solidFill>
+                  <a:srgbClr val="334155"/>
+                </a:solidFill>
+                <a:latin typeface="Arial"/>
+                <a:ea typeface="Arial"/>
+                <a:cs typeface="Arial"/>
+                <a:sym typeface="Arial"/>
+              </a:rPr>
+              <a:t>Microphone and buzzer</a:t>
+            </a:r>
+            <a:endParaRPr lang="en-US" sz="900" dirty="0"/>
+          </a:p>
+        </p:txBody>
+      </p:sp>
+      <p:sp>
+        <p:nvSpPr>
+          <p:cNvPr id="91" name="AutoShape 10">
+            <a:extLst>
+              <a:ext uri="{FF2B5EF4-FFF2-40B4-BE49-F238E27FC236}">
+                <a16:creationId xmlns:a16="http://schemas.microsoft.com/office/drawing/2014/main" id="{45F58EDC-0B26-E718-C370-5E06A713BE25}"/>
+              </a:ext>
+            </a:extLst>
+          </p:cNvPr>
+          <p:cNvSpPr/>
+          <p:nvPr/>
+        </p:nvSpPr>
+        <p:spPr>
+          <a:xfrm>
+            <a:off x="4717453" y="2423257"/>
+            <a:ext cx="715376" cy="507127"/>
+          </a:xfrm>
+          <a:prstGeom prst="rect">
+            <a:avLst/>
+          </a:prstGeom>
+          <a:noFill/>
+          <a:ln w="12700">
+            <a:noFill/>
+            <a:prstDash val="solid"/>
+          </a:ln>
+        </p:spPr>
+        <p:txBody>
+          <a:bodyPr wrap="square" lIns="76200" tIns="38100" rIns="76200" bIns="38100" rtlCol="0" anchor="t">
+            <a:spAutoFit/>
+          </a:bodyPr>
+          <a:lstStyle/>
+          <a:p>
+            <a:pPr marL="0" indent="0" algn="l">
+              <a:lnSpc>
+                <a:spcPct val="133333"/>
+              </a:lnSpc>
+              <a:defRPr/>
+            </a:pPr>
+            <a:r>
+              <a:rPr lang="en-US" sz="1100" b="0" i="0" u="none" strike="noStrike" dirty="0">
+                <a:solidFill>
+                  <a:srgbClr val="334155"/>
+                </a:solidFill>
+                <a:latin typeface="Arial"/>
+                <a:ea typeface="Arial"/>
+                <a:cs typeface="Arial"/>
+                <a:sym typeface="Arial"/>
+              </a:rPr>
+              <a:t>5-way joystick</a:t>
+            </a:r>
+            <a:endParaRPr lang="en-US" sz="900" dirty="0"/>
+          </a:p>
+        </p:txBody>
+      </p:sp>
+      <p:sp>
+        <p:nvSpPr>
+          <p:cNvPr id="93" name="AutoShape 23">
+            <a:extLst>
+              <a:ext uri="{FF2B5EF4-FFF2-40B4-BE49-F238E27FC236}">
+                <a16:creationId xmlns:a16="http://schemas.microsoft.com/office/drawing/2014/main" id="{06EC3D31-878A-F3BA-955E-386A02E87C8E}"/>
+              </a:ext>
+            </a:extLst>
+          </p:cNvPr>
+          <p:cNvSpPr/>
+          <p:nvPr/>
+        </p:nvSpPr>
+        <p:spPr>
+          <a:xfrm>
+            <a:off x="2056070" y="707717"/>
+            <a:ext cx="2946145" cy="503086"/>
+          </a:xfrm>
+          <a:prstGeom prst="rect">
+            <a:avLst/>
+          </a:prstGeom>
+          <a:noFill/>
+          <a:ln w="12700">
+            <a:noFill/>
+            <a:prstDash val="solid"/>
+          </a:ln>
+        </p:spPr>
+        <p:txBody>
+          <a:bodyPr wrap="square" lIns="76200" tIns="38100" rIns="76200" bIns="38100" rtlCol="0" anchor="t">
+            <a:spAutoFit/>
+          </a:bodyPr>
+          <a:lstStyle/>
+          <a:p>
+            <a:pPr marL="0" indent="0" algn="ctr">
+              <a:lnSpc>
+                <a:spcPct val="133333"/>
+              </a:lnSpc>
+              <a:defRPr/>
+            </a:pPr>
+            <a:r>
+              <a:rPr lang="en-US" sz="1100" b="0" i="0" u="none" strike="noStrike" dirty="0">
+                <a:solidFill>
+                  <a:srgbClr val="334155"/>
+                </a:solidFill>
+                <a:latin typeface="Arial"/>
+                <a:ea typeface="Arial"/>
+                <a:cs typeface="Arial"/>
+                <a:sym typeface="Arial"/>
+              </a:rPr>
+              <a:t>3 programmable buttons</a:t>
+            </a:r>
+            <a:endParaRPr lang="en-US" sz="1100" dirty="0"/>
+          </a:p>
+          <a:p>
+            <a:pPr marL="0" indent="0" algn="ctr">
+              <a:lnSpc>
+                <a:spcPct val="133333"/>
+              </a:lnSpc>
+            </a:pPr>
+            <a:r>
+              <a:rPr lang="en-US" sz="1100" b="0" i="0" u="none" strike="noStrike" dirty="0">
+                <a:solidFill>
+                  <a:srgbClr val="334155"/>
+                </a:solidFill>
+                <a:latin typeface="Arial"/>
+                <a:ea typeface="Arial"/>
+                <a:cs typeface="Arial"/>
+                <a:sym typeface="Arial"/>
+              </a:rPr>
+              <a:t>(WIO_KEY_A, B, C)</a:t>
+            </a:r>
+          </a:p>
+        </p:txBody>
+      </p:sp>
+      <p:sp>
+        <p:nvSpPr>
+          <p:cNvPr id="94" name="AutoShape 13">
+            <a:extLst>
+              <a:ext uri="{FF2B5EF4-FFF2-40B4-BE49-F238E27FC236}">
+                <a16:creationId xmlns:a16="http://schemas.microsoft.com/office/drawing/2014/main" id="{4DD0582A-D0A2-B32C-13B6-A8C08E095970}"/>
+              </a:ext>
+            </a:extLst>
+          </p:cNvPr>
+          <p:cNvSpPr/>
+          <p:nvPr/>
+        </p:nvSpPr>
+        <p:spPr>
+          <a:xfrm>
+            <a:off x="3178855" y="4004830"/>
+            <a:ext cx="852000" cy="282000"/>
+          </a:xfrm>
+          <a:prstGeom prst="rect">
+            <a:avLst/>
+          </a:prstGeom>
+          <a:noFill/>
+          <a:ln w="12700">
+            <a:noFill/>
+            <a:prstDash val="solid"/>
+          </a:ln>
+        </p:spPr>
+        <p:txBody>
+          <a:bodyPr wrap="square" lIns="76200" tIns="38100" rIns="76200" bIns="38100" rtlCol="0" anchor="t">
+            <a:spAutoFit/>
+          </a:bodyPr>
+          <a:lstStyle/>
+          <a:p>
+            <a:pPr marL="0" indent="0" algn="ctr">
+              <a:lnSpc>
+                <a:spcPct val="133333"/>
+              </a:lnSpc>
+              <a:defRPr/>
+            </a:pPr>
+            <a:r>
+              <a:rPr lang="en-US" sz="1100" b="0" i="0" u="none" strike="noStrike" dirty="0">
+                <a:solidFill>
+                  <a:srgbClr val="334155"/>
+                </a:solidFill>
+                <a:latin typeface="Arial"/>
+                <a:ea typeface="Arial"/>
+                <a:cs typeface="Arial"/>
+                <a:sym typeface="Arial"/>
+              </a:rPr>
+              <a:t>Type-C</a:t>
+            </a:r>
+            <a:endParaRPr lang="en-US" sz="1100" dirty="0"/>
+          </a:p>
+        </p:txBody>
+      </p:sp>
+      <p:sp>
+        <p:nvSpPr>
+          <p:cNvPr id="95" name="AutoShape 14">
+            <a:extLst>
+              <a:ext uri="{FF2B5EF4-FFF2-40B4-BE49-F238E27FC236}">
+                <a16:creationId xmlns:a16="http://schemas.microsoft.com/office/drawing/2014/main" id="{58701684-6CE9-4A6A-D6E6-99F4CC10B735}"/>
+              </a:ext>
+            </a:extLst>
+          </p:cNvPr>
+          <p:cNvSpPr/>
+          <p:nvPr/>
+        </p:nvSpPr>
+        <p:spPr>
+          <a:xfrm>
+            <a:off x="1760372" y="4020919"/>
+            <a:ext cx="1588627" cy="282000"/>
+          </a:xfrm>
+          <a:prstGeom prst="rect">
+            <a:avLst/>
+          </a:prstGeom>
+          <a:noFill/>
+          <a:ln w="12700">
+            <a:noFill/>
+            <a:prstDash val="solid"/>
+          </a:ln>
+        </p:spPr>
+        <p:txBody>
+          <a:bodyPr wrap="square" lIns="76200" tIns="38100" rIns="76200" bIns="38100" rtlCol="0" anchor="t">
+            <a:spAutoFit/>
+          </a:bodyPr>
+          <a:lstStyle/>
+          <a:p>
+            <a:pPr marL="0" indent="0" algn="ctr">
+              <a:lnSpc>
+                <a:spcPct val="133333"/>
+              </a:lnSpc>
+              <a:defRPr/>
+            </a:pPr>
+            <a:r>
+              <a:rPr lang="en-US" sz="1100" b="0" i="0" u="none" strike="noStrike" dirty="0">
+                <a:solidFill>
+                  <a:srgbClr val="334155"/>
+                </a:solidFill>
+                <a:latin typeface="Arial"/>
+                <a:ea typeface="Arial"/>
+                <a:cs typeface="Arial"/>
+                <a:sym typeface="Arial"/>
+              </a:rPr>
+              <a:t>Grove interface</a:t>
+            </a:r>
+            <a:endParaRPr lang="en-US" sz="1100" dirty="0"/>
+          </a:p>
+        </p:txBody>
+      </p:sp>
+      <p:sp>
+        <p:nvSpPr>
+          <p:cNvPr id="96" name="AutoShape 15">
+            <a:extLst>
+              <a:ext uri="{FF2B5EF4-FFF2-40B4-BE49-F238E27FC236}">
+                <a16:creationId xmlns:a16="http://schemas.microsoft.com/office/drawing/2014/main" id="{D969738C-884F-C25B-071E-902BB72762CE}"/>
+              </a:ext>
+            </a:extLst>
+          </p:cNvPr>
+          <p:cNvSpPr/>
+          <p:nvPr/>
+        </p:nvSpPr>
+        <p:spPr>
+          <a:xfrm>
+            <a:off x="3766155" y="4020687"/>
+            <a:ext cx="1860952" cy="282000"/>
+          </a:xfrm>
+          <a:prstGeom prst="rect">
+            <a:avLst/>
+          </a:prstGeom>
+          <a:noFill/>
+          <a:ln w="12700">
+            <a:noFill/>
+            <a:prstDash val="solid"/>
+          </a:ln>
+        </p:spPr>
+        <p:txBody>
+          <a:bodyPr wrap="square" lIns="76200" tIns="38100" rIns="76200" bIns="38100" rtlCol="0" anchor="t">
+            <a:spAutoFit/>
+          </a:bodyPr>
+          <a:lstStyle/>
+          <a:p>
+            <a:pPr marL="0" indent="0" algn="ctr">
+              <a:lnSpc>
+                <a:spcPct val="133333"/>
+              </a:lnSpc>
+              <a:defRPr/>
+            </a:pPr>
+            <a:r>
+              <a:rPr lang="en-US" sz="1100" b="0" i="0" u="none" strike="noStrike" dirty="0">
+                <a:solidFill>
+                  <a:srgbClr val="334155"/>
+                </a:solidFill>
+                <a:latin typeface="Arial"/>
+                <a:ea typeface="Arial"/>
+                <a:cs typeface="Arial"/>
+                <a:sym typeface="Arial"/>
+              </a:rPr>
+              <a:t>Grove interface</a:t>
+            </a:r>
+            <a:endParaRPr lang="en-US" sz="900" dirty="0"/>
+          </a:p>
+        </p:txBody>
+      </p:sp>
+      <p:sp>
+        <p:nvSpPr>
+          <p:cNvPr id="97" name="AutoShape 16">
+            <a:extLst>
+              <a:ext uri="{FF2B5EF4-FFF2-40B4-BE49-F238E27FC236}">
+                <a16:creationId xmlns:a16="http://schemas.microsoft.com/office/drawing/2014/main" id="{C8A9F686-8779-ACAB-B10D-262CDEE00792}"/>
+              </a:ext>
+            </a:extLst>
+          </p:cNvPr>
+          <p:cNvSpPr/>
+          <p:nvPr/>
+        </p:nvSpPr>
+        <p:spPr>
+          <a:xfrm>
+            <a:off x="1987159" y="4335055"/>
+            <a:ext cx="1248900" cy="282000"/>
+          </a:xfrm>
+          <a:prstGeom prst="rect">
+            <a:avLst/>
+          </a:prstGeom>
+          <a:noFill/>
+          <a:ln w="12700">
+            <a:noFill/>
+            <a:prstDash val="solid"/>
+          </a:ln>
+        </p:spPr>
+        <p:txBody>
+          <a:bodyPr wrap="square" lIns="76200" tIns="38100" rIns="76200" bIns="38100" rtlCol="0" anchor="t">
+            <a:spAutoFit/>
+          </a:bodyPr>
+          <a:lstStyle/>
+          <a:p>
+            <a:pPr marL="0" indent="0" algn="ctr">
+              <a:lnSpc>
+                <a:spcPct val="133333"/>
+              </a:lnSpc>
+              <a:defRPr/>
+            </a:pPr>
+            <a:r>
+              <a:rPr lang="en-US" sz="1100" b="0" i="0" u="none" strike="noStrike" dirty="0">
+                <a:solidFill>
+                  <a:srgbClr val="87C120"/>
+                </a:solidFill>
+                <a:latin typeface="Arial"/>
+                <a:ea typeface="Arial"/>
+                <a:cs typeface="Arial"/>
+                <a:sym typeface="Arial"/>
+              </a:rPr>
+              <a:t>Green LED</a:t>
+            </a:r>
+            <a:endParaRPr lang="en-US" sz="1100" dirty="0"/>
+          </a:p>
+        </p:txBody>
+      </p:sp>
+      <p:cxnSp>
+        <p:nvCxnSpPr>
+          <p:cNvPr id="99" name="Connector 20">
+            <a:extLst>
+              <a:ext uri="{FF2B5EF4-FFF2-40B4-BE49-F238E27FC236}">
+                <a16:creationId xmlns:a16="http://schemas.microsoft.com/office/drawing/2014/main" id="{7366B6BE-95C5-3862-EA44-7CF2A2A453D0}"/>
+              </a:ext>
+            </a:extLst>
+          </p:cNvPr>
+          <p:cNvCxnSpPr>
+            <a:cxnSpLocks/>
+          </p:cNvCxnSpPr>
+          <p:nvPr/>
+        </p:nvCxnSpPr>
+        <p:spPr>
+          <a:xfrm rot="5400000">
+            <a:off x="2928861" y="4105749"/>
+            <a:ext cx="519894" cy="253784"/>
+          </a:xfrm>
+          <a:prstGeom prst="bentConnector3">
+            <a:avLst>
+              <a:gd name="adj1" fmla="val 101345"/>
+            </a:avLst>
+          </a:prstGeom>
+          <a:noFill/>
+          <a:ln w="25400" cap="flat" cmpd="sng">
+            <a:solidFill>
+              <a:srgbClr val="F3D230">
+                <a:alpha val="100000"/>
+              </a:srgbClr>
+            </a:solidFill>
+            <a:prstDash val="dot"/>
+            <a:round/>
+            <a:headEnd type="none" w="med" len="med"/>
+            <a:tailEnd type="triangle" w="med" len="med"/>
+          </a:ln>
+        </p:spPr>
+      </p:cxnSp>
+      <p:cxnSp>
+        <p:nvCxnSpPr>
+          <p:cNvPr id="107" name="Connector 20">
+            <a:extLst>
+              <a:ext uri="{FF2B5EF4-FFF2-40B4-BE49-F238E27FC236}">
+                <a16:creationId xmlns:a16="http://schemas.microsoft.com/office/drawing/2014/main" id="{3E829B29-4B0E-951D-527A-3F65A4605B2C}"/>
+              </a:ext>
+            </a:extLst>
+          </p:cNvPr>
+          <p:cNvCxnSpPr>
+            <a:cxnSpLocks/>
+          </p:cNvCxnSpPr>
+          <p:nvPr/>
+        </p:nvCxnSpPr>
+        <p:spPr>
+          <a:xfrm rot="16200000" flipH="1">
+            <a:off x="3778660" y="4054561"/>
+            <a:ext cx="568361" cy="319177"/>
+          </a:xfrm>
+          <a:prstGeom prst="bentConnector3">
+            <a:avLst>
+              <a:gd name="adj1" fmla="val 100649"/>
+            </a:avLst>
+          </a:prstGeom>
+          <a:noFill/>
+          <a:ln w="25400" cap="flat" cmpd="sng">
+            <a:solidFill>
+              <a:srgbClr val="F3D230">
+                <a:alpha val="100000"/>
+              </a:srgbClr>
+            </a:solidFill>
+            <a:prstDash val="dot"/>
+            <a:round/>
+            <a:headEnd type="none" w="med" len="med"/>
+            <a:tailEnd type="triangle" w="med" len="med"/>
+          </a:ln>
+        </p:spPr>
+      </p:cxnSp>
+      <p:sp>
+        <p:nvSpPr>
+          <p:cNvPr id="123" name="AutoShape 3">
+            <a:extLst>
+              <a:ext uri="{FF2B5EF4-FFF2-40B4-BE49-F238E27FC236}">
+                <a16:creationId xmlns:a16="http://schemas.microsoft.com/office/drawing/2014/main" id="{6514BD5F-782D-35FC-0A1A-65CF4F0DA8A0}"/>
+              </a:ext>
+            </a:extLst>
+          </p:cNvPr>
+          <p:cNvSpPr/>
+          <p:nvPr/>
+        </p:nvSpPr>
+        <p:spPr>
+          <a:xfrm>
+            <a:off x="214341" y="1417210"/>
+            <a:ext cx="1089820" cy="487569"/>
+          </a:xfrm>
+          <a:prstGeom prst="rect">
+            <a:avLst/>
+          </a:prstGeom>
+          <a:noFill/>
+          <a:ln w="12700">
+            <a:noFill/>
+            <a:prstDash val="solid"/>
+          </a:ln>
+        </p:spPr>
+        <p:txBody>
+          <a:bodyPr wrap="square" lIns="76200" tIns="38100" rIns="76200" bIns="38100" rtlCol="0" anchor="t">
+            <a:spAutoFit/>
+          </a:bodyPr>
+          <a:lstStyle/>
+          <a:p>
+            <a:pPr marL="0" indent="0" algn="r">
+              <a:lnSpc>
+                <a:spcPct val="133333"/>
+              </a:lnSpc>
+              <a:defRPr/>
+            </a:pPr>
+            <a:r>
+              <a:rPr lang="en-US" sz="1050" b="0" i="0" u="none" strike="noStrike" dirty="0">
+                <a:solidFill>
+                  <a:srgbClr val="334155"/>
+                </a:solidFill>
+                <a:latin typeface="Arial"/>
+                <a:ea typeface="Arial"/>
+                <a:cs typeface="Arial"/>
+                <a:sym typeface="Arial"/>
+              </a:rPr>
+              <a:t>Reset the slider switch</a:t>
+            </a:r>
+            <a:endParaRPr lang="en-US" sz="800" dirty="0"/>
+          </a:p>
+        </p:txBody>
+      </p:sp>
+      <p:sp>
+        <p:nvSpPr>
+          <p:cNvPr id="125" name="AutoShape 12">
+            <a:extLst>
+              <a:ext uri="{FF2B5EF4-FFF2-40B4-BE49-F238E27FC236}">
+                <a16:creationId xmlns:a16="http://schemas.microsoft.com/office/drawing/2014/main" id="{C9F85E53-B235-C594-204A-A3F9D5B9C5B4}"/>
+              </a:ext>
+            </a:extLst>
+          </p:cNvPr>
+          <p:cNvSpPr/>
+          <p:nvPr/>
+        </p:nvSpPr>
+        <p:spPr>
+          <a:xfrm>
+            <a:off x="377255" y="2114751"/>
+            <a:ext cx="926906" cy="487569"/>
+          </a:xfrm>
+          <a:prstGeom prst="rect">
+            <a:avLst/>
+          </a:prstGeom>
+          <a:noFill/>
+          <a:ln w="12700">
+            <a:noFill/>
+            <a:prstDash val="solid"/>
+          </a:ln>
+        </p:spPr>
+        <p:txBody>
+          <a:bodyPr wrap="square" lIns="76200" tIns="38100" rIns="76200" bIns="38100" rtlCol="0" anchor="t">
+            <a:spAutoFit/>
+          </a:bodyPr>
+          <a:lstStyle/>
+          <a:p>
+            <a:pPr marL="0" indent="0" algn="r">
+              <a:lnSpc>
+                <a:spcPct val="133333"/>
+              </a:lnSpc>
+              <a:defRPr/>
+            </a:pPr>
+            <a:r>
+              <a:rPr lang="en-US" sz="1050" b="0" i="0" u="none" strike="noStrike" dirty="0">
+                <a:solidFill>
+                  <a:srgbClr val="334155"/>
+                </a:solidFill>
+                <a:latin typeface="Arial"/>
+                <a:ea typeface="Arial"/>
+                <a:cs typeface="Arial"/>
+                <a:sym typeface="Arial"/>
+              </a:rPr>
+              <a:t>microSD card slot</a:t>
+            </a:r>
+            <a:endParaRPr lang="en-US" sz="800" dirty="0"/>
+          </a:p>
+        </p:txBody>
+      </p:sp>
+      <p:grpSp>
+        <p:nvGrpSpPr>
+          <p:cNvPr id="130" name="Group 129">
+            <a:extLst>
+              <a:ext uri="{FF2B5EF4-FFF2-40B4-BE49-F238E27FC236}">
+                <a16:creationId xmlns:a16="http://schemas.microsoft.com/office/drawing/2014/main" id="{92689DEF-D0EF-6967-B1AB-0E6869FA3E2F}"/>
+              </a:ext>
+            </a:extLst>
+          </p:cNvPr>
+          <p:cNvGrpSpPr/>
+          <p:nvPr/>
+        </p:nvGrpSpPr>
+        <p:grpSpPr>
+          <a:xfrm>
+            <a:off x="3289299" y="3878510"/>
+            <a:ext cx="638176" cy="45719"/>
+            <a:chOff x="3094834" y="3871377"/>
+            <a:chExt cx="843879" cy="45719"/>
+          </a:xfrm>
+        </p:grpSpPr>
+        <p:sp>
+          <p:nvSpPr>
+            <p:cNvPr id="127" name="AutoShape 18">
+              <a:extLst>
+                <a:ext uri="{FF2B5EF4-FFF2-40B4-BE49-F238E27FC236}">
+                  <a16:creationId xmlns:a16="http://schemas.microsoft.com/office/drawing/2014/main" id="{DB27C7B1-2CF8-B1C3-06A2-917E4A4F3647}"/>
+                </a:ext>
+              </a:extLst>
+            </p:cNvPr>
+            <p:cNvSpPr/>
+            <p:nvPr/>
+          </p:nvSpPr>
+          <p:spPr>
+            <a:xfrm>
+              <a:off x="3094834" y="3871377"/>
+              <a:ext cx="45719" cy="45719"/>
+            </a:xfrm>
+            <a:prstGeom prst="ellipse">
+              <a:avLst/>
+            </a:prstGeom>
+            <a:solidFill>
+              <a:srgbClr val="87C120">
+                <a:alpha val="100000"/>
+              </a:srgbClr>
+            </a:solidFill>
+            <a:ln w="12700" cap="flat" cmpd="sng">
+              <a:solidFill>
+                <a:srgbClr val="5C5C5C">
+                  <a:alpha val="100000"/>
+                </a:srgbClr>
+              </a:solidFill>
+              <a:prstDash val="solid"/>
+              <a:miter lim="8000000"/>
+            </a:ln>
+          </p:spPr>
+          <p:txBody>
+            <a:bodyPr wrap="square" lIns="76200" tIns="38100" rIns="76200" bIns="38100" rtlCol="0" anchor="ctr">
+              <a:noAutofit/>
+            </a:bodyPr>
+            <a:lstStyle/>
+            <a:p>
+              <a:pPr marL="0" indent="0" algn="ctr">
+                <a:lnSpc>
+                  <a:spcPct val="133333"/>
+                </a:lnSpc>
+                <a:defRPr/>
+              </a:pPr>
+              <a:r>
+                <a:rPr lang="en-US" sz="1500" b="0" i="0" u="none" strike="noStrike">
+                  <a:solidFill>
+                    <a:srgbClr val="000000"/>
+                  </a:solidFill>
+                  <a:latin typeface="Arial"/>
+                  <a:ea typeface="Arial"/>
+                  <a:cs typeface="Arial"/>
+                  <a:sym typeface="Arial"/>
+                </a:rPr>
+                <a:t> </a:t>
+              </a:r>
+              <a:endParaRPr lang="en-US" sz="1100"/>
+            </a:p>
+          </p:txBody>
+        </p:sp>
+        <p:sp>
+          <p:nvSpPr>
+            <p:cNvPr id="129" name="AutoShape 19">
+              <a:extLst>
+                <a:ext uri="{FF2B5EF4-FFF2-40B4-BE49-F238E27FC236}">
+                  <a16:creationId xmlns:a16="http://schemas.microsoft.com/office/drawing/2014/main" id="{706A5D4A-0B84-D7FD-2F94-71451958130E}"/>
+                </a:ext>
+              </a:extLst>
+            </p:cNvPr>
+            <p:cNvSpPr/>
+            <p:nvPr/>
+          </p:nvSpPr>
+          <p:spPr>
+            <a:xfrm>
+              <a:off x="3892994" y="3871377"/>
+              <a:ext cx="45719" cy="45719"/>
+            </a:xfrm>
+            <a:prstGeom prst="ellipse">
+              <a:avLst/>
+            </a:prstGeom>
+            <a:solidFill>
+              <a:srgbClr val="0188FB">
+                <a:alpha val="100000"/>
+              </a:srgbClr>
+            </a:solidFill>
+            <a:ln w="12700" cap="flat" cmpd="sng">
+              <a:solidFill>
+                <a:srgbClr val="5C5C5C">
+                  <a:alpha val="100000"/>
+                </a:srgbClr>
+              </a:solidFill>
+              <a:prstDash val="solid"/>
+              <a:miter lim="8000000"/>
+            </a:ln>
+          </p:spPr>
+          <p:txBody>
+            <a:bodyPr wrap="square" lIns="76200" tIns="38100" rIns="76200" bIns="38100" rtlCol="0" anchor="ctr">
+              <a:noAutofit/>
+            </a:bodyPr>
+            <a:lstStyle/>
+            <a:p>
+              <a:pPr marL="0" indent="0" algn="ctr">
+                <a:lnSpc>
+                  <a:spcPct val="133333"/>
+                </a:lnSpc>
+                <a:defRPr/>
+              </a:pPr>
+              <a:r>
+                <a:rPr lang="en-US" sz="1500" b="0" i="0" u="none" strike="noStrike">
+                  <a:solidFill>
+                    <a:srgbClr val="000000"/>
+                  </a:solidFill>
+                  <a:latin typeface="Arial"/>
+                  <a:ea typeface="Arial"/>
+                  <a:cs typeface="Arial"/>
+                  <a:sym typeface="Arial"/>
+                </a:rPr>
+                <a:t> </a:t>
+              </a:r>
+              <a:endParaRPr lang="en-US" sz="1100"/>
+            </a:p>
+          </p:txBody>
+        </p:sp>
+      </p:grpSp>
+      <p:sp>
+        <p:nvSpPr>
+          <p:cNvPr id="141" name="AutoShape 17">
+            <a:extLst>
+              <a:ext uri="{FF2B5EF4-FFF2-40B4-BE49-F238E27FC236}">
+                <a16:creationId xmlns:a16="http://schemas.microsoft.com/office/drawing/2014/main" id="{1D538151-9AF4-3D23-3CB4-0686610812E2}"/>
+              </a:ext>
+            </a:extLst>
+          </p:cNvPr>
+          <p:cNvSpPr/>
+          <p:nvPr/>
+        </p:nvSpPr>
+        <p:spPr>
+          <a:xfrm>
+            <a:off x="4011558" y="4343369"/>
+            <a:ext cx="1248900" cy="282000"/>
+          </a:xfrm>
+          <a:prstGeom prst="rect">
+            <a:avLst/>
+          </a:prstGeom>
+          <a:noFill/>
+          <a:ln w="12700">
+            <a:noFill/>
+            <a:prstDash val="solid"/>
+          </a:ln>
+        </p:spPr>
+        <p:txBody>
+          <a:bodyPr wrap="square" lIns="76200" tIns="38100" rIns="76200" bIns="38100" rtlCol="0" anchor="t">
+            <a:spAutoFit/>
+          </a:bodyPr>
+          <a:lstStyle/>
+          <a:p>
+            <a:pPr marL="0" indent="0" algn="ctr">
+              <a:lnSpc>
+                <a:spcPct val="133333"/>
+              </a:lnSpc>
+              <a:defRPr/>
+            </a:pPr>
+            <a:r>
+              <a:rPr lang="en-US" sz="1100" b="0" i="0" u="none" strike="noStrike" dirty="0">
+                <a:solidFill>
+                  <a:srgbClr val="0188FB"/>
+                </a:solidFill>
+                <a:latin typeface="Arial"/>
+                <a:ea typeface="Arial"/>
+                <a:cs typeface="Arial"/>
+                <a:sym typeface="Arial"/>
+              </a:rPr>
+              <a:t>Blue LED</a:t>
+            </a:r>
+            <a:endParaRPr lang="en-US" sz="1100" dirty="0"/>
           </a:p>
         </p:txBody>
       </p:sp>
@@ -16133,7 +16825,7 @@
 </file>
 
 <file path=ppt/slides/slide6.xml><?xml version="1.0" encoding="utf-8"?>
-<p:sld xmlns:a="http://schemas.openxmlformats.org/drawingml/2006/main" xmlns:p="http://schemas.openxmlformats.org/presentationml/2006/main" xmlns:r="http://schemas.openxmlformats.org/officeDocument/2006/relationships">
+<p:sld xmlns:a="http://schemas.openxmlformats.org/drawingml/2006/main" xmlns:r="http://schemas.openxmlformats.org/officeDocument/2006/relationships" xmlns:p="http://schemas.openxmlformats.org/presentationml/2006/main">
   <p:cSld>
     <p:spTree>
       <p:nvGrpSpPr>
@@ -16141,50 +16833,14 @@
         <p:cNvGrpSpPr/>
         <p:nvPr/>
       </p:nvGrpSpPr>
-      <p:grpSpPr/>
-      <p:sp>
-        <p:nvSpPr>
-          <p:cNvPr id="2" name="Rectangle 1"/>
-          <p:cNvSpPr/>
-          <p:nvPr/>
-        </p:nvSpPr>
-        <p:spPr>
-          <a:xfrm>
-            <a:off x="0" y="0"/>
-            <a:ext cx="9144000" cy="5143500"/>
-          </a:xfrm>
-          <a:prstGeom prst="rect">
-            <a:avLst/>
-          </a:prstGeom>
-          <a:solidFill>
-            <a:srgbClr val="FFFFFF"/>
-          </a:solidFill>
-          <a:ln>
-            <a:noFill/>
-          </a:ln>
-        </p:spPr>
-        <p:style>
-          <a:lnRef idx="1">
-            <a:schemeClr val="accent1"/>
-          </a:lnRef>
-          <a:fillRef idx="3">
-            <a:schemeClr val="accent1"/>
-          </a:fillRef>
-          <a:effectRef idx="2">
-            <a:schemeClr val="accent1"/>
-          </a:effectRef>
-          <a:fontRef idx="minor">
-            <a:schemeClr val="lt1"/>
-          </a:fontRef>
-        </p:style>
-        <p:txBody>
-          <a:bodyPr rtlCol="0" anchor="ctr"/>
-          <a:lstStyle/>
-          <a:p>
-            <a:pPr algn="ctr"/>
-          </a:p>
-        </p:txBody>
-      </p:sp>
+      <p:grpSpPr>
+        <a:xfrm>
+          <a:off x="0" y="0"/>
+          <a:ext cx="0" cy="0"/>
+          <a:chOff x="0" y="0"/>
+          <a:chExt cx="0" cy="0"/>
+        </a:xfrm>
+      </p:grpSpPr>
       <p:sp>
         <p:nvSpPr>
           <p:cNvPr id="3" name="TextBox 2"/>
@@ -16202,7 +16858,7 @@
           <a:noFill/>
         </p:spPr>
         <p:txBody>
-          <a:bodyPr wrap="square" anchor="t" lIns="0" rIns="0" tIns="0" bIns="0">
+          <a:bodyPr wrap="square" lIns="0" tIns="0" rIns="0" bIns="0" anchor="t">
             <a:spAutoFit/>
           </a:bodyPr>
           <a:lstStyle/>
@@ -16264,6 +16920,7 @@
           <a:lstStyle/>
           <a:p>
             <a:pPr algn="ctr"/>
+            <a:endParaRPr/>
           </a:p>
         </p:txBody>
       </p:sp>
@@ -16284,7 +16941,7 @@
           <a:noFill/>
         </p:spPr>
         <p:txBody>
-          <a:bodyPr wrap="square" anchor="t" lIns="0" rIns="0" tIns="0" bIns="0">
+          <a:bodyPr wrap="square" lIns="0" tIns="0" rIns="0" bIns="0" anchor="t">
             <a:spAutoFit/>
           </a:bodyPr>
           <a:lstStyle/>
@@ -16295,7 +16952,7 @@
               </a:lnSpc>
             </a:pPr>
             <a:r>
-              <a:rPr sz="2600" b="1">
+              <a:rPr sz="2600" b="1" dirty="0">
                 <a:solidFill>
                   <a:srgbClr val="000000"/>
                 </a:solidFill>
@@ -16323,7 +16980,7 @@
           <a:noFill/>
         </p:spPr>
         <p:txBody>
-          <a:bodyPr wrap="square" anchor="t" lIns="0" rIns="0" tIns="0" bIns="0">
+          <a:bodyPr wrap="square" lIns="0" tIns="0" rIns="0" bIns="0" anchor="t">
             <a:spAutoFit/>
           </a:bodyPr>
           <a:lstStyle/>
@@ -16354,15 +17011,16 @@
           <p:nvPr/>
         </p:nvPicPr>
         <p:blipFill>
-          <a:blip r:embed="rId2"/>
+          <a:blip r:embed="rId3"/>
+          <a:srcRect r="11736"/>
           <a:stretch>
             <a:fillRect/>
           </a:stretch>
         </p:blipFill>
         <p:spPr>
-          <a:xfrm>
-            <a:off x="960120" y="1280160"/>
-            <a:ext cx="2926080" cy="2194560"/>
+          <a:xfrm rot="5400000">
+            <a:off x="1340150" y="637250"/>
+            <a:ext cx="2172392" cy="3706091"/>
           </a:xfrm>
           <a:prstGeom prst="rect">
             <a:avLst/>
@@ -16386,7 +17044,7 @@
           <a:noFill/>
         </p:spPr>
         <p:txBody>
-          <a:bodyPr wrap="square" anchor="t" lIns="0" rIns="0" tIns="0" bIns="0">
+          <a:bodyPr wrap="square" lIns="0" tIns="0" rIns="0" bIns="0" anchor="t">
             <a:spAutoFit/>
           </a:bodyPr>
           <a:lstStyle/>
@@ -16397,7 +17055,7 @@
               </a:lnSpc>
             </a:pPr>
             <a:r>
-              <a:rPr sz="1200" b="0">
+              <a:rPr sz="1200" b="0" dirty="0">
                 <a:solidFill>
                   <a:srgbClr val="000000"/>
                 </a:solidFill>
@@ -16425,7 +17083,7 @@
           <a:noFill/>
         </p:spPr>
         <p:txBody>
-          <a:bodyPr wrap="square" anchor="t" lIns="0" rIns="0" tIns="0" bIns="0">
+          <a:bodyPr wrap="square" lIns="0" tIns="0" rIns="0" bIns="0" anchor="t">
             <a:spAutoFit/>
           </a:bodyPr>
           <a:lstStyle/>
@@ -16455,7 +17113,7 @@
         </p:nvSpPr>
         <p:spPr>
           <a:xfrm>
-            <a:off x="4572000" y="960120"/>
+            <a:off x="4828035" y="960120"/>
             <a:ext cx="4023360" cy="274320"/>
           </a:xfrm>
           <a:prstGeom prst="rect">
@@ -16464,7 +17122,7 @@
           <a:noFill/>
         </p:spPr>
         <p:txBody>
-          <a:bodyPr wrap="square" anchor="t" lIns="0" rIns="0" tIns="0" bIns="0">
+          <a:bodyPr wrap="square" lIns="0" tIns="0" rIns="0" bIns="0" anchor="t">
             <a:spAutoFit/>
           </a:bodyPr>
           <a:lstStyle/>
@@ -16475,323 +17133,32 @@
               </a:lnSpc>
             </a:pPr>
             <a:r>
-              <a:rPr sz="1250" b="1">
+              <a:rPr sz="1250" b="1" dirty="0">
                 <a:solidFill>
                   <a:srgbClr val="000000"/>
                 </a:solidFill>
                 <a:latin typeface="Source Han Sans SC"/>
               </a:rPr>
-              <a:t>NEW HANDHELD (Wio Terminal)</a:t>
-            </a:r>
-          </a:p>
-        </p:txBody>
-      </p:sp>
-      <p:sp>
-        <p:nvSpPr>
-          <p:cNvPr id="11" name="Rectangle 10"/>
-          <p:cNvSpPr/>
-          <p:nvPr/>
-        </p:nvSpPr>
-        <p:spPr>
-          <a:xfrm>
-            <a:off x="5166360" y="1280160"/>
-            <a:ext cx="2377440" cy="1737360"/>
-          </a:xfrm>
-          <a:prstGeom prst="rect">
-            <a:avLst/>
-          </a:prstGeom>
-          <a:solidFill>
-            <a:srgbClr val="FFFFFF"/>
-          </a:solidFill>
-          <a:ln w="25400">
-            <a:solidFill>
-              <a:srgbClr val="000000"/>
-            </a:solidFill>
-          </a:ln>
-        </p:spPr>
-        <p:style>
-          <a:lnRef idx="1">
-            <a:schemeClr val="accent1"/>
-          </a:lnRef>
-          <a:fillRef idx="3">
-            <a:schemeClr val="accent1"/>
-          </a:fillRef>
-          <a:effectRef idx="2">
-            <a:schemeClr val="accent1"/>
-          </a:effectRef>
-          <a:fontRef idx="minor">
-            <a:schemeClr val="lt1"/>
-          </a:fontRef>
-        </p:style>
-        <p:txBody>
-          <a:bodyPr rtlCol="0" anchor="ctr"/>
-          <a:lstStyle/>
-          <a:p>
-            <a:pPr algn="ctr"/>
-          </a:p>
-        </p:txBody>
-      </p:sp>
-      <p:sp>
-        <p:nvSpPr>
-          <p:cNvPr id="12" name="Rectangle 11"/>
-          <p:cNvSpPr/>
-          <p:nvPr/>
-        </p:nvSpPr>
-        <p:spPr>
-          <a:xfrm>
-            <a:off x="5618073" y="1389888"/>
-            <a:ext cx="1474012" cy="903427"/>
-          </a:xfrm>
-          <a:prstGeom prst="rect">
-            <a:avLst/>
-          </a:prstGeom>
-          <a:solidFill>
-            <a:srgbClr val="FFFFFF"/>
-          </a:solidFill>
-          <a:ln w="19050">
-            <a:solidFill>
-              <a:srgbClr val="000000"/>
-            </a:solidFill>
-          </a:ln>
-        </p:spPr>
-        <p:style>
-          <a:lnRef idx="1">
-            <a:schemeClr val="accent1"/>
-          </a:lnRef>
-          <a:fillRef idx="3">
-            <a:schemeClr val="accent1"/>
-          </a:fillRef>
-          <a:effectRef idx="2">
-            <a:schemeClr val="accent1"/>
-          </a:effectRef>
-          <a:fontRef idx="minor">
-            <a:schemeClr val="lt1"/>
-          </a:fontRef>
-        </p:style>
-        <p:txBody>
-          <a:bodyPr rtlCol="0" anchor="ctr"/>
-          <a:lstStyle/>
-          <a:p>
-            <a:pPr algn="ctr"/>
-          </a:p>
-        </p:txBody>
-      </p:sp>
-      <p:sp>
-        <p:nvSpPr>
-          <p:cNvPr id="13" name="TextBox 12"/>
-          <p:cNvSpPr txBox="1"/>
-          <p:nvPr/>
-        </p:nvSpPr>
-        <p:spPr>
-          <a:xfrm>
-            <a:off x="5618073" y="1677009"/>
-            <a:ext cx="1474012" cy="329184"/>
-          </a:xfrm>
-          <a:prstGeom prst="rect">
-            <a:avLst/>
-          </a:prstGeom>
-          <a:noFill/>
-        </p:spPr>
-        <p:txBody>
-          <a:bodyPr wrap="square" anchor="t" lIns="0" rIns="0" tIns="0" bIns="0">
-            <a:spAutoFit/>
-          </a:bodyPr>
-          <a:lstStyle/>
-          <a:p>
-            <a:pPr algn="ctr">
-              <a:lnSpc>
-                <a:spcPct val="100000"/>
-              </a:lnSpc>
-            </a:pPr>
-            <a:r>
-              <a:rPr sz="1300" b="1">
-                <a:solidFill>
-                  <a:srgbClr val="000000"/>
-                </a:solidFill>
-                <a:latin typeface="Source Code Pro"/>
-              </a:rPr>
-              <a:t>WIO</a:t>
-            </a:r>
-          </a:p>
-        </p:txBody>
-      </p:sp>
-      <p:sp>
-        <p:nvSpPr>
-          <p:cNvPr id="14" name="Oval 13"/>
-          <p:cNvSpPr/>
-          <p:nvPr/>
-        </p:nvSpPr>
-        <p:spPr>
-          <a:xfrm>
-            <a:off x="5422392" y="2706624"/>
-            <a:ext cx="146304" cy="146304"/>
-          </a:xfrm>
-          <a:prstGeom prst="ellipse">
-            <a:avLst/>
-          </a:prstGeom>
-          <a:solidFill>
-            <a:srgbClr val="F3D230"/>
-          </a:solidFill>
-          <a:ln w="12700">
-            <a:solidFill>
-              <a:srgbClr val="000000"/>
-            </a:solidFill>
-          </a:ln>
-        </p:spPr>
-        <p:style>
-          <a:lnRef idx="1">
-            <a:schemeClr val="accent1"/>
-          </a:lnRef>
-          <a:fillRef idx="3">
-            <a:schemeClr val="accent1"/>
-          </a:fillRef>
-          <a:effectRef idx="2">
-            <a:schemeClr val="accent1"/>
-          </a:effectRef>
-          <a:fontRef idx="minor">
-            <a:schemeClr val="lt1"/>
-          </a:fontRef>
-        </p:style>
-        <p:txBody>
-          <a:bodyPr rtlCol="0" anchor="ctr"/>
-          <a:lstStyle/>
-          <a:p>
-            <a:pPr algn="ctr"/>
-          </a:p>
-        </p:txBody>
-      </p:sp>
-      <p:sp>
-        <p:nvSpPr>
-          <p:cNvPr id="15" name="Oval 14"/>
-          <p:cNvSpPr/>
-          <p:nvPr/>
-        </p:nvSpPr>
-        <p:spPr>
-          <a:xfrm>
-            <a:off x="5806440" y="2706624"/>
-            <a:ext cx="146304" cy="146304"/>
-          </a:xfrm>
-          <a:prstGeom prst="ellipse">
-            <a:avLst/>
-          </a:prstGeom>
-          <a:solidFill>
-            <a:srgbClr val="F3D230"/>
-          </a:solidFill>
-          <a:ln w="12700">
-            <a:solidFill>
-              <a:srgbClr val="000000"/>
-            </a:solidFill>
-          </a:ln>
-        </p:spPr>
-        <p:style>
-          <a:lnRef idx="1">
-            <a:schemeClr val="accent1"/>
-          </a:lnRef>
-          <a:fillRef idx="3">
-            <a:schemeClr val="accent1"/>
-          </a:fillRef>
-          <a:effectRef idx="2">
-            <a:schemeClr val="accent1"/>
-          </a:effectRef>
-          <a:fontRef idx="minor">
-            <a:schemeClr val="lt1"/>
-          </a:fontRef>
-        </p:style>
-        <p:txBody>
-          <a:bodyPr rtlCol="0" anchor="ctr"/>
-          <a:lstStyle/>
-          <a:p>
-            <a:pPr algn="ctr"/>
-          </a:p>
-        </p:txBody>
-      </p:sp>
-      <p:sp>
-        <p:nvSpPr>
-          <p:cNvPr id="16" name="Oval 15"/>
-          <p:cNvSpPr/>
-          <p:nvPr/>
-        </p:nvSpPr>
-        <p:spPr>
-          <a:xfrm>
-            <a:off x="6190488" y="2706624"/>
-            <a:ext cx="146304" cy="146304"/>
-          </a:xfrm>
-          <a:prstGeom prst="ellipse">
-            <a:avLst/>
-          </a:prstGeom>
-          <a:solidFill>
-            <a:srgbClr val="F3D230"/>
-          </a:solidFill>
-          <a:ln w="12700">
-            <a:solidFill>
-              <a:srgbClr val="000000"/>
-            </a:solidFill>
-          </a:ln>
-        </p:spPr>
-        <p:style>
-          <a:lnRef idx="1">
-            <a:schemeClr val="accent1"/>
-          </a:lnRef>
-          <a:fillRef idx="3">
-            <a:schemeClr val="accent1"/>
-          </a:fillRef>
-          <a:effectRef idx="2">
-            <a:schemeClr val="accent1"/>
-          </a:effectRef>
-          <a:fontRef idx="minor">
-            <a:schemeClr val="lt1"/>
-          </a:fontRef>
-        </p:style>
-        <p:txBody>
-          <a:bodyPr rtlCol="0" anchor="ctr"/>
-          <a:lstStyle/>
-          <a:p>
-            <a:pPr algn="ctr"/>
-          </a:p>
-        </p:txBody>
-      </p:sp>
-      <p:sp>
-        <p:nvSpPr>
-          <p:cNvPr id="17" name="Oval 16"/>
-          <p:cNvSpPr/>
-          <p:nvPr/>
-        </p:nvSpPr>
-        <p:spPr>
-          <a:xfrm>
-            <a:off x="7086600" y="2642616"/>
-            <a:ext cx="237744" cy="237744"/>
-          </a:xfrm>
-          <a:prstGeom prst="ellipse">
-            <a:avLst/>
-          </a:prstGeom>
-          <a:solidFill>
-            <a:srgbClr val="FFFFFF"/>
-          </a:solidFill>
-          <a:ln w="12700">
-            <a:solidFill>
-              <a:srgbClr val="000000"/>
-            </a:solidFill>
-          </a:ln>
-        </p:spPr>
-        <p:style>
-          <a:lnRef idx="1">
-            <a:schemeClr val="accent1"/>
-          </a:lnRef>
-          <a:fillRef idx="3">
-            <a:schemeClr val="accent1"/>
-          </a:fillRef>
-          <a:effectRef idx="2">
-            <a:schemeClr val="accent1"/>
-          </a:effectRef>
-          <a:fontRef idx="minor">
-            <a:schemeClr val="lt1"/>
-          </a:fontRef>
-        </p:style>
-        <p:txBody>
-          <a:bodyPr rtlCol="0" anchor="ctr"/>
-          <a:lstStyle/>
-          <a:p>
-            <a:pPr algn="ctr"/>
+              <a:t>NEW HANDHELD (</a:t>
+            </a:r>
+            <a:r>
+              <a:rPr sz="1250" b="1" dirty="0" err="1">
+                <a:solidFill>
+                  <a:srgbClr val="000000"/>
+                </a:solidFill>
+                <a:latin typeface="Source Han Sans SC"/>
+              </a:rPr>
+              <a:t>Wio</a:t>
+            </a:r>
+            <a:r>
+              <a:rPr sz="1250" b="1" dirty="0">
+                <a:solidFill>
+                  <a:srgbClr val="000000"/>
+                </a:solidFill>
+                <a:latin typeface="Source Han Sans SC"/>
+              </a:rPr>
+              <a:t> Terminal)</a:t>
+            </a:r>
           </a:p>
         </p:txBody>
       </p:sp>
@@ -16812,7 +17179,7 @@
           <a:noFill/>
         </p:spPr>
         <p:txBody>
-          <a:bodyPr wrap="square" anchor="t" lIns="0" rIns="0" tIns="0" bIns="0">
+          <a:bodyPr wrap="square" lIns="0" tIns="0" rIns="0" bIns="0" anchor="t">
             <a:spAutoFit/>
           </a:bodyPr>
           <a:lstStyle/>
@@ -16874,6 +17241,7 @@
           <a:lstStyle/>
           <a:p>
             <a:pPr algn="ctr"/>
+            <a:endParaRPr/>
           </a:p>
         </p:txBody>
       </p:sp>
@@ -16894,7 +17262,7 @@
           <a:noFill/>
         </p:spPr>
         <p:txBody>
-          <a:bodyPr wrap="square" anchor="t" lIns="0" rIns="0" tIns="0" bIns="0">
+          <a:bodyPr wrap="square" lIns="0" tIns="0" rIns="0" bIns="0" anchor="t">
             <a:spAutoFit/>
           </a:bodyPr>
           <a:lstStyle/>
@@ -16924,8 +17292,8 @@
         </p:nvSpPr>
         <p:spPr>
           <a:xfrm>
-            <a:off x="566928" y="1298448"/>
-            <a:ext cx="8010144" cy="256032"/>
+            <a:off x="488788" y="1146009"/>
+            <a:ext cx="3556739" cy="323165"/>
           </a:xfrm>
           <a:prstGeom prst="rect">
             <a:avLst/>
@@ -16933,7 +17301,7 @@
           <a:noFill/>
         </p:spPr>
         <p:txBody>
-          <a:bodyPr wrap="square" anchor="t" lIns="0" rIns="0" tIns="0" bIns="0">
+          <a:bodyPr wrap="square" lIns="0" tIns="0" rIns="0" bIns="0" anchor="t">
             <a:spAutoFit/>
           </a:bodyPr>
           <a:lstStyle/>
@@ -16944,17 +17312,70 @@
               </a:lnSpc>
             </a:pPr>
             <a:r>
-              <a:rPr sz="1050" b="0">
+              <a:rPr sz="1050" b="0" dirty="0">
                 <a:solidFill>
                   <a:srgbClr val="000000"/>
                 </a:solidFill>
                 <a:latin typeface="Source Han Sans SC"/>
               </a:rPr>
-              <a:t>Write in your workbook:  "Wio has ___ more than the old board (at least 3)"  ·  "the first thing I want to make with it is ___"</a:t>
-            </a:r>
-          </a:p>
-        </p:txBody>
-      </p:sp>
+              <a:t>Write in your workbook:  "</a:t>
+            </a:r>
+            <a:r>
+              <a:rPr sz="1050" b="0" dirty="0" err="1">
+                <a:solidFill>
+                  <a:srgbClr val="000000"/>
+                </a:solidFill>
+                <a:latin typeface="Source Han Sans SC"/>
+              </a:rPr>
+              <a:t>Wio</a:t>
+            </a:r>
+            <a:r>
+              <a:rPr sz="1050" b="0" dirty="0">
+                <a:solidFill>
+                  <a:srgbClr val="000000"/>
+                </a:solidFill>
+                <a:latin typeface="Source Han Sans SC"/>
+              </a:rPr>
+              <a:t> has ___ more than the old board (at least 3)"  ·  "the first thing I want to make with it is ___"</a:t>
+            </a:r>
+          </a:p>
+        </p:txBody>
+      </p:sp>
+      <p:pic>
+        <p:nvPicPr>
+          <p:cNvPr id="25" name="Picture 2">
+            <a:extLst>
+              <a:ext uri="{FF2B5EF4-FFF2-40B4-BE49-F238E27FC236}">
+                <a16:creationId xmlns:a16="http://schemas.microsoft.com/office/drawing/2014/main" id="{49D9FA71-426E-DE8D-097F-177CA88272B8}"/>
+              </a:ext>
+            </a:extLst>
+          </p:cNvPr>
+          <p:cNvPicPr>
+            <a:picLocks noChangeAspect="1"/>
+          </p:cNvPicPr>
+          <p:nvPr/>
+        </p:nvPicPr>
+        <p:blipFill>
+          <a:blip r:embed="rId4"/>
+          <a:srcRect l="21324" t="3564" r="21928" b="43146"/>
+          <a:stretch>
+            <a:fillRect/>
+          </a:stretch>
+        </p:blipFill>
+        <p:spPr>
+          <a:xfrm>
+            <a:off x="4755992" y="1404099"/>
+            <a:ext cx="2926080" cy="2087827"/>
+          </a:xfrm>
+          <a:prstGeom prst="rect">
+            <a:avLst/>
+          </a:prstGeom>
+          <a:ln w="12700">
+            <a:noFill/>
+            <a:prstDash val="solid"/>
+          </a:ln>
+        </p:spPr>
+      </p:pic>
     </p:spTree>
   </p:cSld>
   <p:clrMapOvr>
@@ -16964,7 +17385,7 @@
 </file>
 
 <file path=ppt/slides/slide7.xml><?xml version="1.0" encoding="utf-8"?>
-<p:sld xmlns:a="http://schemas.openxmlformats.org/drawingml/2006/main" xmlns:p="http://schemas.openxmlformats.org/presentationml/2006/main" xmlns:r="http://schemas.openxmlformats.org/officeDocument/2006/relationships">
+<p:sld xmlns:a="http://schemas.openxmlformats.org/drawingml/2006/main" xmlns:r="http://schemas.openxmlformats.org/officeDocument/2006/relationships" xmlns:p="http://schemas.openxmlformats.org/presentationml/2006/main">
   <p:cSld>
     <p:spTree>
       <p:nvGrpSpPr>
@@ -16972,7 +17393,14 @@
         <p:cNvGrpSpPr/>
         <p:nvPr/>
       </p:nvGrpSpPr>
-      <p:grpSpPr/>
+      <p:grpSpPr>
+        <a:xfrm>
+          <a:off x="0" y="0"/>
+          <a:ext cx="0" cy="0"/>
+          <a:chOff x="0" y="0"/>
+          <a:chExt cx="0" cy="0"/>
+        </a:xfrm>
+      </p:grpSpPr>
       <p:sp>
         <p:nvSpPr>
           <p:cNvPr id="2" name="Rectangle 1"/>
@@ -17013,6 +17441,7 @@
           <a:lstStyle/>
           <a:p>
             <a:pPr algn="ctr"/>
+            <a:endParaRPr/>
           </a:p>
         </p:txBody>
       </p:sp>
@@ -17033,7 +17462,7 @@
           <a:noFill/>
         </p:spPr>
         <p:txBody>
-          <a:bodyPr wrap="square" anchor="t" lIns="0" rIns="0" tIns="0" bIns="0">
+          <a:bodyPr wrap="square" lIns="0" tIns="0" rIns="0" bIns="0" anchor="t">
             <a:spAutoFit/>
           </a:bodyPr>
           <a:lstStyle/>
@@ -17095,6 +17524,7 @@
           <a:lstStyle/>
           <a:p>
             <a:pPr algn="ctr"/>
+            <a:endParaRPr/>
           </a:p>
         </p:txBody>
       </p:sp>
@@ -17115,7 +17545,7 @@
           <a:noFill/>
         </p:spPr>
         <p:txBody>
-          <a:bodyPr wrap="square" anchor="t" lIns="0" rIns="0" tIns="0" bIns="0">
+          <a:bodyPr wrap="square" lIns="0" tIns="0" rIns="0" bIns="0" anchor="t">
             <a:spAutoFit/>
           </a:bodyPr>
           <a:lstStyle/>
@@ -17179,6 +17609,7 @@
           <a:lstStyle/>
           <a:p>
             <a:pPr algn="ctr"/>
+            <a:endParaRPr/>
           </a:p>
         </p:txBody>
       </p:sp>
@@ -17199,7 +17630,7 @@
           <a:noFill/>
         </p:spPr>
         <p:txBody>
-          <a:bodyPr wrap="square" anchor="t" lIns="0" rIns="0" tIns="0" bIns="0">
+          <a:bodyPr wrap="square" lIns="0" tIns="0" rIns="0" bIns="0" anchor="t">
             <a:spAutoFit/>
           </a:bodyPr>
           <a:lstStyle/>
@@ -17263,6 +17694,7 @@
           <a:lstStyle/>
           <a:p>
             <a:pPr algn="ctr"/>
+            <a:endParaRPr/>
           </a:p>
         </p:txBody>
       </p:sp>
@@ -17308,6 +17740,7 @@
           <a:lstStyle/>
           <a:p>
             <a:pPr algn="ctr"/>
+            <a:endParaRPr/>
           </a:p>
         </p:txBody>
       </p:sp>
@@ -17328,7 +17761,7 @@
           <a:noFill/>
         </p:spPr>
         <p:txBody>
-          <a:bodyPr wrap="square" anchor="t" lIns="0" rIns="0" tIns="0" bIns="0">
+          <a:bodyPr wrap="square" lIns="0" tIns="0" rIns="0" bIns="0" anchor="t">
             <a:spAutoFit/>
           </a:bodyPr>
           <a:lstStyle/>
@@ -17392,6 +17825,7 @@
           <a:lstStyle/>
           <a:p>
             <a:pPr algn="ctr"/>
+            <a:endParaRPr/>
           </a:p>
         </p:txBody>
       </p:sp>
@@ -17437,6 +17871,7 @@
           <a:lstStyle/>
           <a:p>
             <a:pPr algn="ctr"/>
+            <a:endParaRPr/>
           </a:p>
         </p:txBody>
       </p:sp>
@@ -17457,7 +17892,7 @@
           <a:noFill/>
         </p:spPr>
         <p:txBody>
-          <a:bodyPr wrap="square" anchor="t" lIns="0" rIns="0" tIns="0" bIns="0">
+          <a:bodyPr wrap="square" lIns="0" tIns="0" rIns="0" bIns="0" anchor="t">
             <a:spAutoFit/>
           </a:bodyPr>
           <a:lstStyle/>
@@ -17521,6 +17956,7 @@
           <a:lstStyle/>
           <a:p>
             <a:pPr algn="ctr"/>
+            <a:endParaRPr/>
           </a:p>
         </p:txBody>
       </p:sp>
@@ -17566,6 +18002,7 @@
           <a:lstStyle/>
           <a:p>
             <a:pPr algn="ctr"/>
+            <a:endParaRPr/>
           </a:p>
         </p:txBody>
       </p:sp>
@@ -17586,7 +18023,7 @@
           <a:noFill/>
         </p:spPr>
         <p:txBody>
-          <a:bodyPr wrap="square" anchor="t" lIns="0" rIns="0" tIns="0" bIns="0">
+          <a:bodyPr wrap="square" lIns="0" tIns="0" rIns="0" bIns="0" anchor="t">
             <a:spAutoFit/>
           </a:bodyPr>
           <a:lstStyle/>
@@ -17650,6 +18087,7 @@
           <a:lstStyle/>
           <a:p>
             <a:pPr algn="ctr"/>
+            <a:endParaRPr/>
           </a:p>
         </p:txBody>
       </p:sp>
@@ -17695,6 +18133,7 @@
           <a:lstStyle/>
           <a:p>
             <a:pPr algn="ctr"/>
+            <a:endParaRPr/>
           </a:p>
         </p:txBody>
       </p:sp>
@@ -17715,7 +18154,7 @@
           <a:noFill/>
         </p:spPr>
         <p:txBody>
-          <a:bodyPr wrap="square" anchor="t" lIns="0" rIns="0" tIns="0" bIns="0">
+          <a:bodyPr wrap="square" lIns="0" tIns="0" rIns="0" bIns="0" anchor="t">
             <a:spAutoFit/>
           </a:bodyPr>
           <a:lstStyle/>
@@ -17779,6 +18218,7 @@
           <a:lstStyle/>
           <a:p>
             <a:pPr algn="ctr"/>
+            <a:endParaRPr/>
           </a:p>
         </p:txBody>
       </p:sp>
@@ -17799,7 +18239,7 @@
           <a:noFill/>
         </p:spPr>
         <p:txBody>
-          <a:bodyPr wrap="square" anchor="t" lIns="0" rIns="0" tIns="0" bIns="0">
+          <a:bodyPr wrap="square" lIns="0" tIns="0" rIns="0" bIns="0" anchor="t">
             <a:spAutoFit/>
           </a:bodyPr>
           <a:lstStyle/>
@@ -17838,7 +18278,7 @@
           <a:noFill/>
         </p:spPr>
         <p:txBody>
-          <a:bodyPr wrap="square" anchor="t" lIns="0" rIns="0" tIns="0" bIns="0">
+          <a:bodyPr wrap="square" lIns="0" tIns="0" rIns="0" bIns="0" anchor="t">
             <a:spAutoFit/>
           </a:bodyPr>
           <a:lstStyle/>
@@ -17900,6 +18340,7 @@
           <a:lstStyle/>
           <a:p>
             <a:pPr algn="ctr"/>
+            <a:endParaRPr/>
           </a:p>
         </p:txBody>
       </p:sp>
@@ -17920,7 +18361,7 @@
           <a:noFill/>
         </p:spPr>
         <p:txBody>
-          <a:bodyPr wrap="square" anchor="t" lIns="0" rIns="0" tIns="0" bIns="0">
+          <a:bodyPr wrap="square" lIns="0" tIns="0" rIns="0" bIns="0" anchor="t">
             <a:spAutoFit/>
           </a:bodyPr>
           <a:lstStyle/>
@@ -17959,7 +18400,7 @@
           <a:noFill/>
         </p:spPr>
         <p:txBody>
-          <a:bodyPr wrap="square" anchor="t" lIns="0" rIns="0" tIns="0" bIns="0">
+          <a:bodyPr wrap="square" lIns="0" tIns="0" rIns="0" bIns="0" anchor="t">
             <a:spAutoFit/>
           </a:bodyPr>
           <a:lstStyle/>
@@ -17990,7 +18431,7 @@
 </file>
 
 <file path=ppt/slides/slide8.xml><?xml version="1.0" encoding="utf-8"?>
-<p:sld xmlns:a="http://schemas.openxmlformats.org/drawingml/2006/main" xmlns:p="http://schemas.openxmlformats.org/presentationml/2006/main" xmlns:r="http://schemas.openxmlformats.org/officeDocument/2006/relationships">
+<p:sld xmlns:a="http://schemas.openxmlformats.org/drawingml/2006/main" xmlns:r="http://schemas.openxmlformats.org/officeDocument/2006/relationships" xmlns:p="http://schemas.openxmlformats.org/presentationml/2006/main">
   <p:cSld>
     <p:spTree>
       <p:nvGrpSpPr>
@@ -17998,7 +18439,14 @@
         <p:cNvGrpSpPr/>
         <p:nvPr/>
       </p:nvGrpSpPr>
-      <p:grpSpPr/>
+      <p:grpSpPr>
+        <a:xfrm>
+          <a:off x="0" y="0"/>
+          <a:ext cx="0" cy="0"/>
+          <a:chOff x="0" y="0"/>
+          <a:chExt cx="0" cy="0"/>
+        </a:xfrm>
+      </p:grpSpPr>
       <p:sp>
         <p:nvSpPr>
           <p:cNvPr id="2" name="Rectangle 1"/>
@@ -18039,6 +18487,7 @@
           <a:lstStyle/>
           <a:p>
             <a:pPr algn="ctr"/>
+            <a:endParaRPr/>
           </a:p>
         </p:txBody>
       </p:sp>
@@ -18059,7 +18508,7 @@
           <a:noFill/>
         </p:spPr>
         <p:txBody>
-          <a:bodyPr wrap="square" anchor="t" lIns="0" rIns="0" tIns="0" bIns="0">
+          <a:bodyPr wrap="square" lIns="0" tIns="0" rIns="0" bIns="0" anchor="t">
             <a:spAutoFit/>
           </a:bodyPr>
           <a:lstStyle/>
@@ -18121,6 +18570,7 @@
           <a:lstStyle/>
           <a:p>
             <a:pPr algn="ctr"/>
+            <a:endParaRPr/>
           </a:p>
         </p:txBody>
       </p:sp>
@@ -18141,7 +18591,7 @@
           <a:noFill/>
         </p:spPr>
         <p:txBody>
-          <a:bodyPr wrap="square" anchor="t" lIns="0" rIns="0" tIns="0" bIns="0">
+          <a:bodyPr wrap="square" lIns="0" tIns="0" rIns="0" bIns="0" anchor="t">
             <a:spAutoFit/>
           </a:bodyPr>
           <a:lstStyle/>
@@ -18180,7 +18630,7 @@
           <a:noFill/>
         </p:spPr>
         <p:txBody>
-          <a:bodyPr wrap="square" anchor="t" lIns="0" rIns="0" tIns="0" bIns="0">
+          <a:bodyPr wrap="square" lIns="0" tIns="0" rIns="0" bIns="0" anchor="t">
             <a:spAutoFit/>
           </a:bodyPr>
           <a:lstStyle/>
@@ -18244,6 +18694,7 @@
           <a:lstStyle/>
           <a:p>
             <a:pPr algn="ctr"/>
+            <a:endParaRPr/>
           </a:p>
         </p:txBody>
       </p:sp>
@@ -18264,7 +18715,7 @@
           <a:noFill/>
         </p:spPr>
         <p:txBody>
-          <a:bodyPr wrap="square" anchor="t" lIns="0" rIns="0" tIns="0" bIns="0">
+          <a:bodyPr wrap="square" lIns="0" tIns="0" rIns="0" bIns="0" anchor="t">
             <a:spAutoFit/>
           </a:bodyPr>
           <a:lstStyle/>
@@ -18360,6 +18811,7 @@
           <a:lstStyle/>
           <a:p>
             <a:pPr algn="ctr"/>
+            <a:endParaRPr/>
           </a:p>
         </p:txBody>
       </p:sp>
@@ -18380,7 +18832,7 @@
           <a:noFill/>
         </p:spPr>
         <p:txBody>
-          <a:bodyPr wrap="square" anchor="t" lIns="0" rIns="0" tIns="0" bIns="0">
+          <a:bodyPr wrap="square" lIns="0" tIns="0" rIns="0" bIns="0" anchor="t">
             <a:spAutoFit/>
           </a:bodyPr>
           <a:lstStyle/>
@@ -18451,7 +18903,7 @@
           <a:noFill/>
         </p:spPr>
         <p:txBody>
-          <a:bodyPr wrap="square" anchor="t" lIns="0" rIns="0" tIns="0" bIns="0">
+          <a:bodyPr wrap="square" lIns="0" tIns="0" rIns="0" bIns="0" anchor="t">
             <a:spAutoFit/>
           </a:bodyPr>
           <a:lstStyle/>
@@ -18490,7 +18942,7 @@
           <a:noFill/>
         </p:spPr>
         <p:txBody>
-          <a:bodyPr wrap="square" anchor="t" lIns="0" rIns="0" tIns="0" bIns="0">
+          <a:bodyPr wrap="square" lIns="0" tIns="0" rIns="0" bIns="0" anchor="t">
             <a:spAutoFit/>
           </a:bodyPr>
           <a:lstStyle/>
@@ -18521,7 +18973,7 @@
 </file>
 
 <file path=ppt/slides/slide9.xml><?xml version="1.0" encoding="utf-8"?>
-<p:sld xmlns:a="http://schemas.openxmlformats.org/drawingml/2006/main" xmlns:p="http://schemas.openxmlformats.org/presentationml/2006/main" xmlns:r="http://schemas.openxmlformats.org/officeDocument/2006/relationships">
+<p:sld xmlns:a="http://schemas.openxmlformats.org/drawingml/2006/main" xmlns:r="http://schemas.openxmlformats.org/officeDocument/2006/relationships" xmlns:p="http://schemas.openxmlformats.org/presentationml/2006/main">
   <p:cSld>
     <p:spTree>
       <p:nvGrpSpPr>
@@ -18529,7 +18981,14 @@
         <p:cNvGrpSpPr/>
         <p:nvPr/>
       </p:nvGrpSpPr>
-      <p:grpSpPr/>
+      <p:grpSpPr>
+        <a:xfrm>
+          <a:off x="0" y="0"/>
+          <a:ext cx="0" cy="0"/>
+          <a:chOff x="0" y="0"/>
+          <a:chExt cx="0" cy="0"/>
+        </a:xfrm>
+      </p:grpSpPr>
       <p:sp>
         <p:nvSpPr>
           <p:cNvPr id="2" name="Rectangle 1"/>
@@ -18570,6 +19029,7 @@
           <a:lstStyle/>
           <a:p>
             <a:pPr algn="ctr"/>
+            <a:endParaRPr/>
           </a:p>
         </p:txBody>
       </p:sp>
@@ -18590,7 +19050,7 @@
           <a:noFill/>
         </p:spPr>
         <p:txBody>
-          <a:bodyPr wrap="square" anchor="t" lIns="0" rIns="0" tIns="0" bIns="0">
+          <a:bodyPr wrap="square" lIns="0" tIns="0" rIns="0" bIns="0" anchor="t">
             <a:spAutoFit/>
           </a:bodyPr>
           <a:lstStyle/>
@@ -18652,6 +19112,7 @@
           <a:lstStyle/>
           <a:p>
             <a:pPr algn="ctr"/>
+            <a:endParaRPr/>
           </a:p>
         </p:txBody>
       </p:sp>
@@ -18672,7 +19133,7 @@
           <a:noFill/>
         </p:spPr>
         <p:txBody>
-          <a:bodyPr wrap="square" anchor="t" lIns="0" rIns="0" tIns="0" bIns="0">
+          <a:bodyPr wrap="square" lIns="0" tIns="0" rIns="0" bIns="0" anchor="t">
             <a:spAutoFit/>
           </a:bodyPr>
           <a:lstStyle/>
@@ -18711,7 +19172,7 @@
           <a:noFill/>
         </p:spPr>
         <p:txBody>
-          <a:bodyPr wrap="square" anchor="t" lIns="0" rIns="0" tIns="0" bIns="0">
+          <a:bodyPr wrap="square" lIns="0" tIns="0" rIns="0" bIns="0" anchor="t">
             <a:spAutoFit/>
           </a:bodyPr>
           <a:lstStyle/>
@@ -18775,6 +19236,7 @@
           <a:lstStyle/>
           <a:p>
             <a:pPr algn="ctr"/>
+            <a:endParaRPr/>
           </a:p>
         </p:txBody>
       </p:sp>
@@ -18795,7 +19257,7 @@
           <a:noFill/>
         </p:spPr>
         <p:txBody>
-          <a:bodyPr wrap="square" anchor="t" lIns="0" rIns="0" tIns="0" bIns="0">
+          <a:bodyPr wrap="square" lIns="0" tIns="0" rIns="0" bIns="0" anchor="t">
             <a:spAutoFit/>
           </a:bodyPr>
           <a:lstStyle/>
@@ -18891,6 +19353,7 @@
           <a:lstStyle/>
           <a:p>
             <a:pPr algn="ctr"/>
+            <a:endParaRPr/>
           </a:p>
         </p:txBody>
       </p:sp>
@@ -18911,7 +19374,7 @@
           <a:noFill/>
         </p:spPr>
         <p:txBody>
-          <a:bodyPr wrap="square" anchor="t" lIns="0" rIns="0" tIns="0" bIns="0">
+          <a:bodyPr wrap="square" lIns="0" tIns="0" rIns="0" bIns="0" anchor="t">
             <a:spAutoFit/>
           </a:bodyPr>
           <a:lstStyle/>
@@ -18982,7 +19445,7 @@
           <a:noFill/>
         </p:spPr>
         <p:txBody>
-          <a:bodyPr wrap="square" anchor="t" lIns="0" rIns="0" tIns="0" bIns="0">
+          <a:bodyPr wrap="square" lIns="0" tIns="0" rIns="0" bIns="0" anchor="t">
             <a:spAutoFit/>
           </a:bodyPr>
           <a:lstStyle/>
@@ -19021,7 +19484,7 @@
           <a:noFill/>
         </p:spPr>
         <p:txBody>
-          <a:bodyPr wrap="square" anchor="t" lIns="0" rIns="0" tIns="0" bIns="0">
+          <a:bodyPr wrap="square" lIns="0" tIns="0" rIns="0" bIns="0" anchor="t">
             <a:spAutoFit/>
           </a:bodyPr>
           <a:lstStyle/>
@@ -19060,7 +19523,7 @@
           <a:noFill/>
         </p:spPr>
         <p:txBody>
-          <a:bodyPr wrap="square" anchor="t" lIns="0" rIns="0" tIns="0" bIns="0">
+          <a:bodyPr wrap="square" lIns="0" tIns="0" rIns="0" bIns="0" anchor="t">
             <a:spAutoFit/>
           </a:bodyPr>
           <a:lstStyle/>
@@ -19421,44 +19884,44 @@
         <a:sysClr val="window" lastClr="FFFFFF"/>
       </a:lt1>
       <a:dk2>
-        <a:srgbClr val="1F497D"/>
+        <a:srgbClr val="0E2841"/>
       </a:dk2>
       <a:lt2>
-        <a:srgbClr val="EEECE1"/>
+        <a:srgbClr val="E8E8E8"/>
       </a:lt2>
       <a:accent1>
-        <a:srgbClr val="4F81BD"/>
+        <a:srgbClr val="156082"/>
       </a:accent1>
       <a:accent2>
-        <a:srgbClr val="C0504D"/>
+        <a:srgbClr val="E97132"/>
       </a:accent2>
       <a:accent3>
-        <a:srgbClr val="9BBB59"/>
+        <a:srgbClr val="196B24"/>
       </a:accent3>
       <a:accent4>
-        <a:srgbClr val="8064A2"/>
+        <a:srgbClr val="0F9ED5"/>
       </a:accent4>
       <a:accent5>
-        <a:srgbClr val="4BACC6"/>
+        <a:srgbClr val="A02B93"/>
       </a:accent5>
       <a:accent6>
-        <a:srgbClr val="F79646"/>
+        <a:srgbClr val="4EA72E"/>
       </a:accent6>
       <a:hlink>
-        <a:srgbClr val="0000FF"/>
+        <a:srgbClr val="467886"/>
       </a:hlink>
       <a:folHlink>
-        <a:srgbClr val="800080"/>
+        <a:srgbClr val="96607D"/>
       </a:folHlink>
     </a:clrScheme>
     <a:fontScheme name="Office">
       <a:majorFont>
-        <a:latin typeface="Calibri"/>
+        <a:latin typeface="Aptos Display" panose="02110004020202020204"/>
         <a:ea typeface=""/>
         <a:cs typeface=""/>
-        <a:font script="Jpan" typeface="ＭＳ Ｐゴシック"/>
+        <a:font script="Jpan" typeface="游ゴシック Light"/>
         <a:font script="Hang" typeface="맑은 고딕"/>
-        <a:font script="Hans" typeface="宋体"/>
+        <a:font script="Hans" typeface="等线 Light"/>
         <a:font script="Hant" typeface="新細明體"/>
         <a:font script="Arab" typeface="Times New Roman"/>
         <a:font script="Hebr" typeface="Times New Roman"/>
@@ -19486,14 +19949,31 @@
         <a:font script="Viet" typeface="Times New Roman"/>
         <a:font script="Uigh" typeface="Microsoft Uighur"/>
         <a:font script="Geor" typeface="Sylfaen"/>
+        <a:font script="Armn" typeface="Arial"/>
+        <a:font script="Bugi" typeface="Leelawadee UI"/>
+        <a:font script="Bopo" typeface="Microsoft JhengHei"/>
+        <a:font script="Java" typeface="Javanese Text"/>
+        <a:font script="Lisu" typeface="Segoe UI"/>
+        <a:font script="Mymr" typeface="Myanmar Text"/>
+        <a:font script="Nkoo" typeface="Ebrima"/>
+        <a:font script="Olck" typeface="Nirmala UI"/>
+        <a:font script="Osma" typeface="Ebrima"/>
+        <a:font script="Phag" typeface="Phagspa"/>
+        <a:font script="Syrn" typeface="Estrangelo Edessa"/>
+        <a:font script="Syrj" typeface="Estrangelo Edessa"/>
+        <a:font script="Syre" typeface="Estrangelo Edessa"/>
+        <a:font script="Sora" typeface="Nirmala UI"/>
+        <a:font script="Tale" typeface="Microsoft Tai Le"/>
+        <a:font script="Talu" typeface="Microsoft New Tai Lue"/>
+        <a:font script="Tfng" typeface="Ebrima"/>
       </a:majorFont>
       <a:minorFont>
-        <a:latin typeface="Calibri"/>
+        <a:latin typeface="Aptos" panose="02110004020202020204"/>
         <a:ea typeface=""/>
         <a:cs typeface=""/>
-        <a:font script="Jpan" typeface="ＭＳ Ｐゴシック"/>
+        <a:font script="Jpan" typeface="游ゴシック"/>
         <a:font script="Hang" typeface="맑은 고딕"/>
-        <a:font script="Hans" typeface="宋体"/>
+        <a:font script="Hans" typeface="等线"/>
         <a:font script="Hant" typeface="新細明體"/>
         <a:font script="Arab" typeface="Arial"/>
         <a:font script="Hebr" typeface="Arial"/>
@@ -19521,6 +20001,23 @@
         <a:font script="Viet" typeface="Arial"/>
         <a:font script="Uigh" typeface="Microsoft Uighur"/>
         <a:font script="Geor" typeface="Sylfaen"/>
+        <a:font script="Armn" typeface="Arial"/>
+        <a:font script="Bugi" typeface="Leelawadee UI"/>
+        <a:font script="Bopo" typeface="Microsoft JhengHei"/>
+        <a:font script="Java" typeface="Javanese Text"/>
+        <a:font script="Lisu" typeface="Segoe UI"/>
+        <a:font script="Mymr" typeface="Myanmar Text"/>
+        <a:font script="Nkoo" typeface="Ebrima"/>
+        <a:font script="Olck" typeface="Nirmala UI"/>
+        <a:font script="Osma" typeface="Ebrima"/>
+        <a:font script="Phag" typeface="Phagspa"/>
+        <a:font script="Syrn" typeface="Estrangelo Edessa"/>
+        <a:font script="Syrj" typeface="Estrangelo Edessa"/>
+        <a:font script="Syre" typeface="Estrangelo Edessa"/>
+        <a:font script="Sora" typeface="Nirmala UI"/>
+        <a:font script="Tale" typeface="Microsoft Tai Le"/>
+        <a:font script="Talu" typeface="Microsoft New Tai Lue"/>
+        <a:font script="Tfng" typeface="Ebrima"/>
       </a:minorFont>
     </a:fontScheme>
     <a:fmtScheme name="Office">
@@ -19532,180 +20029,136 @@
           <a:gsLst>
             <a:gs pos="0">
               <a:schemeClr val="phClr">
-                <a:tint val="50000"/>
-                <a:satMod val="300000"/>
+                <a:lumMod val="110000"/>
+                <a:satMod val="105000"/>
+                <a:tint val="67000"/>
               </a:schemeClr>
             </a:gs>
-            <a:gs pos="35000">
+            <a:gs pos="50000">
               <a:schemeClr val="phClr">
-                <a:tint val="37000"/>
-                <a:satMod val="300000"/>
+                <a:lumMod val="105000"/>
+                <a:satMod val="103000"/>
+                <a:tint val="73000"/>
               </a:schemeClr>
             </a:gs>
             <a:gs pos="100000">
               <a:schemeClr val="phClr">
-                <a:tint val="15000"/>
-                <a:satMod val="350000"/>
+                <a:lumMod val="105000"/>
+                <a:satMod val="109000"/>
+                <a:tint val="81000"/>
               </a:schemeClr>
             </a:gs>
           </a:gsLst>
-          <a:lin ang="16200000" scaled="1"/>
+          <a:lin ang="5400000" scaled="0"/>
         </a:gradFill>
         <a:gradFill rotWithShape="1">
           <a:gsLst>
             <a:gs pos="0">
               <a:schemeClr val="phClr">
-                <a:tint val="100000"/>
+                <a:satMod val="103000"/>
+                <a:lumMod val="102000"/>
+                <a:tint val="94000"/>
+              </a:schemeClr>
+            </a:gs>
+            <a:gs pos="50000">
+              <a:schemeClr val="phClr">
+                <a:satMod val="110000"/>
+                <a:lumMod val="100000"/>
                 <a:shade val="100000"/>
-                <a:satMod val="130000"/>
               </a:schemeClr>
             </a:gs>
             <a:gs pos="100000">
               <a:schemeClr val="phClr">
-                <a:tint val="50000"/>
-                <a:shade val="100000"/>
-                <a:satMod val="350000"/>
+                <a:lumMod val="99000"/>
+                <a:satMod val="120000"/>
+                <a:shade val="78000"/>
               </a:schemeClr>
             </a:gs>
           </a:gsLst>
-          <a:lin ang="16200000" scaled="0"/>
+          <a:lin ang="5400000" scaled="0"/>
         </a:gradFill>
       </a:fillStyleLst>
       <a:lnStyleLst>
-        <a:ln w="9525" cap="flat" cmpd="sng" algn="ctr">
+        <a:ln w="12700" cap="flat" cmpd="sng" algn="ctr">
           <a:solidFill>
-            <a:schemeClr val="phClr">
-              <a:shade val="95000"/>
-              <a:satMod val="105000"/>
-            </a:schemeClr>
+            <a:schemeClr val="phClr"/>
           </a:solidFill>
           <a:prstDash val="solid"/>
+          <a:miter lim="800000"/>
+        </a:ln>
+        <a:ln w="19050" cap="flat" cmpd="sng" algn="ctr">
+          <a:solidFill>
+            <a:schemeClr val="phClr"/>
+          </a:solidFill>
+          <a:prstDash val="solid"/>
+          <a:miter lim="800000"/>
         </a:ln>
         <a:ln w="25400" cap="flat" cmpd="sng" algn="ctr">
           <a:solidFill>
             <a:schemeClr val="phClr"/>
           </a:solidFill>
           <a:prstDash val="solid"/>
-        </a:ln>
-        <a:ln w="38100" cap="flat" cmpd="sng" algn="ctr">
-          <a:solidFill>
-            <a:schemeClr val="phClr"/>
-          </a:solidFill>
-          <a:prstDash val="solid"/>
+          <a:miter lim="800000"/>
         </a:ln>
       </a:lnStyleLst>
       <a:effectStyleLst>
         <a:effectStyle>
+          <a:effectLst/>
+        </a:effectStyle>
+        <a:effectStyle>
+          <a:effectLst/>
+        </a:effectStyle>
+        <a:effectStyle>
           <a:effectLst>
-            <a:outerShdw blurRad="40000" dist="20000" dir="5400000" rotWithShape="0">
+            <a:outerShdw blurRad="57150" dist="19050" dir="5400000" algn="ctr" rotWithShape="0">
               <a:srgbClr val="000000">
-                <a:alpha val="38000"/>
+                <a:alpha val="63000"/>
               </a:srgbClr>
             </a:outerShdw>
           </a:effectLst>
-        </a:effectStyle>
-        <a:effectStyle>
-          <a:effectLst>
-            <a:outerShdw blurRad="40000" dist="23000" dir="5400000" rotWithShape="0">
-              <a:srgbClr val="000000">
-                <a:alpha val="35000"/>
-              </a:srgbClr>
-            </a:outerShdw>
-          </a:effectLst>
-        </a:effectStyle>
-        <a:effectStyle>
-          <a:effectLst>
-            <a:outerShdw blurRad="40000" dist="23000" dir="5400000" rotWithShape="0">
-              <a:srgbClr val="000000">
-                <a:alpha val="35000"/>
-              </a:srgbClr>
-            </a:outerShdw>
-          </a:effectLst>
-          <a:scene3d>
-            <a:camera prst="orthographicFront">
-              <a:rot lat="0" lon="0" rev="0"/>
-            </a:camera>
-            <a:lightRig rig="threePt" dir="t">
-              <a:rot lat="0" lon="0" rev="1200000"/>
-            </a:lightRig>
-          </a:scene3d>
-          <a:sp3d>
-            <a:bevelT w="63500" h="25400"/>
-          </a:sp3d>
         </a:effectStyle>
       </a:effectStyleLst>
       <a:bgFillStyleLst>
         <a:solidFill>
           <a:schemeClr val="phClr"/>
         </a:solidFill>
+        <a:solidFill>
+          <a:schemeClr val="phClr">
+            <a:tint val="95000"/>
+            <a:satMod val="170000"/>
+          </a:schemeClr>
+        </a:solidFill>
         <a:gradFill rotWithShape="1">
           <a:gsLst>
             <a:gs pos="0">
               <a:schemeClr val="phClr">
-                <a:tint val="40000"/>
-                <a:satMod val="350000"/>
+                <a:tint val="93000"/>
+                <a:satMod val="150000"/>
+                <a:shade val="98000"/>
+                <a:lumMod val="102000"/>
               </a:schemeClr>
             </a:gs>
-            <a:gs pos="40000">
+            <a:gs pos="50000">
               <a:schemeClr val="phClr">
-                <a:tint val="45000"/>
-                <a:shade val="99000"/>
-                <a:satMod val="350000"/>
+                <a:tint val="98000"/>
+                <a:satMod val="130000"/>
+                <a:shade val="90000"/>
+                <a:lumMod val="103000"/>
               </a:schemeClr>
             </a:gs>
             <a:gs pos="100000">
               <a:schemeClr val="phClr">
-                <a:shade val="20000"/>
-                <a:satMod val="255000"/>
+                <a:shade val="63000"/>
+                <a:satMod val="120000"/>
               </a:schemeClr>
             </a:gs>
           </a:gsLst>
-          <a:path path="circle">
-            <a:fillToRect l="50000" t="-80000" r="50000" b="180000"/>
-          </a:path>
-        </a:gradFill>
-        <a:gradFill rotWithShape="1">
-          <a:gsLst>
-            <a:gs pos="0">
-              <a:schemeClr val="phClr">
-                <a:tint val="80000"/>
-                <a:satMod val="300000"/>
-              </a:schemeClr>
-            </a:gs>
-            <a:gs pos="100000">
-              <a:schemeClr val="phClr">
-                <a:shade val="30000"/>
-                <a:satMod val="200000"/>
-              </a:schemeClr>
-            </a:gs>
-          </a:gsLst>
-          <a:path path="circle">
-            <a:fillToRect l="50000" t="50000" r="50000" b="50000"/>
-          </a:path>
+          <a:lin ang="5400000" scaled="0"/>
         </a:gradFill>
       </a:bgFillStyleLst>
     </a:fmtScheme>
   </a:themeElements>
   <a:objectDefaults>
-    <a:spDef>
-      <a:spPr/>
-      <a:bodyPr/>
-      <a:lstStyle/>
-      <a:style>
-        <a:lnRef idx="1">
-          <a:schemeClr val="accent1"/>
-        </a:lnRef>
-        <a:fillRef idx="3">
-          <a:schemeClr val="accent1"/>
-        </a:fillRef>
-        <a:effectRef idx="2">
-          <a:schemeClr val="accent1"/>
-        </a:effectRef>
-        <a:fontRef idx="minor">
-          <a:schemeClr val="lt1"/>
-        </a:fontRef>
-      </a:style>
-    </a:spDef>
     <a:lnDef>
       <a:spPr/>
       <a:bodyPr/>
@@ -19727,5 +20180,10 @@
     </a:lnDef>
   </a:objectDefaults>
   <a:extraClrSchemeLst/>
+  <a:extLst>
+    <a:ext uri="{05A4C25C-085E-4340-85A3-A5531E510DB2}">
+      <thm15:themeFamily xmlns:thm15="http://schemas.microsoft.com/office/thememl/2012/main" name="Office Theme" id="{2E142A2C-CD16-42D6-873A-C26D2A0506FA}" vid="{1BDDFF52-6CD6-40A5-AB3C-68EB2F1E4D0A}"/>
+    </a:ext>
+  </a:extLst>
 </a:theme>
 </file>